--- a/ppt/Python.pptx
+++ b/ppt/Python.pptx
@@ -5,13 +5,24 @@
     <p:sldMasterId id="2147483660" r:id="rId1"/>
   </p:sldMasterIdLst>
   <p:notesMasterIdLst>
-    <p:notesMasterId r:id="rId6"/>
+    <p:notesMasterId r:id="rId17"/>
   </p:notesMasterIdLst>
   <p:sldIdLst>
     <p:sldId id="256" r:id="rId2"/>
     <p:sldId id="259" r:id="rId3"/>
     <p:sldId id="257" r:id="rId4"/>
     <p:sldId id="258" r:id="rId5"/>
+    <p:sldId id="273" r:id="rId6"/>
+    <p:sldId id="297" r:id="rId7"/>
+    <p:sldId id="274" r:id="rId8"/>
+    <p:sldId id="275" r:id="rId9"/>
+    <p:sldId id="290" r:id="rId10"/>
+    <p:sldId id="277" r:id="rId11"/>
+    <p:sldId id="286" r:id="rId12"/>
+    <p:sldId id="287" r:id="rId13"/>
+    <p:sldId id="288" r:id="rId14"/>
+    <p:sldId id="289" r:id="rId15"/>
+    <p:sldId id="291" r:id="rId16"/>
   </p:sldIdLst>
   <p:sldSz cx="18288000" cy="10287000"/>
   <p:notesSz cx="6858000" cy="9144000"/>
@@ -3679,7 +3690,7 @@
           <a:p>
             <a:fld id="{452E040F-5B67-45C2-AB20-74E1C646C8CA}" type="datetimeFigureOut">
               <a:rPr lang="en-IN" smtClean="0"/>
-              <a:t>14-03-2025</a:t>
+              <a:t>15-03-2025</a:t>
             </a:fld>
             <a:endParaRPr lang="en-IN"/>
           </a:p>
@@ -4031,6 +4042,798 @@
 </p:notes>
 </file>
 
+<file path=ppt/notesSlides/notesSlide2.xml><?xml version="1.0" encoding="utf-8"?>
+<p:notes xmlns:a="http://schemas.openxmlformats.org/drawingml/2006/main" xmlns:r="http://schemas.openxmlformats.org/officeDocument/2006/relationships" xmlns:p="http://schemas.openxmlformats.org/presentationml/2006/main">
+  <p:cSld>
+    <p:spTree>
+      <p:nvGrpSpPr>
+        <p:cNvPr id="1" name=""/>
+        <p:cNvGrpSpPr/>
+        <p:nvPr/>
+      </p:nvGrpSpPr>
+      <p:grpSpPr>
+        <a:xfrm>
+          <a:off x="0" y="0"/>
+          <a:ext cx="0" cy="0"/>
+          <a:chOff x="0" y="0"/>
+          <a:chExt cx="0" cy="0"/>
+        </a:xfrm>
+      </p:grpSpPr>
+      <p:sp>
+        <p:nvSpPr>
+          <p:cNvPr id="2" name="Slide Image Placeholder 1"/>
+          <p:cNvSpPr>
+            <a:spLocks noGrp="1" noRot="1" noChangeAspect="1"/>
+          </p:cNvSpPr>
+          <p:nvPr>
+            <p:ph type="sldImg"/>
+          </p:nvPr>
+        </p:nvSpPr>
+        <p:spPr/>
+      </p:sp>
+      <p:sp>
+        <p:nvSpPr>
+          <p:cNvPr id="3" name="Notes Placeholder 2"/>
+          <p:cNvSpPr>
+            <a:spLocks noGrp="1"/>
+          </p:cNvSpPr>
+          <p:nvPr>
+            <p:ph type="body" idx="1"/>
+          </p:nvPr>
+        </p:nvSpPr>
+        <p:spPr/>
+        <p:txBody>
+          <a:bodyPr/>
+          <a:lstStyle/>
+          <a:p>
+            <a:endParaRPr lang="en-IN" dirty="0"/>
+          </a:p>
+        </p:txBody>
+      </p:sp>
+      <p:sp>
+        <p:nvSpPr>
+          <p:cNvPr id="4" name="Slide Number Placeholder 3"/>
+          <p:cNvSpPr>
+            <a:spLocks noGrp="1"/>
+          </p:cNvSpPr>
+          <p:nvPr>
+            <p:ph type="sldNum" sz="quarter" idx="5"/>
+          </p:nvPr>
+        </p:nvSpPr>
+        <p:spPr/>
+        <p:txBody>
+          <a:bodyPr/>
+          <a:lstStyle/>
+          <a:p>
+            <a:fld id="{8745FC1C-588B-4A38-9F7C-E8E5DAED71F6}" type="slidenum">
+              <a:rPr lang="en-IN" smtClean="0"/>
+              <a:t>5</a:t>
+            </a:fld>
+            <a:endParaRPr lang="en-IN"/>
+          </a:p>
+        </p:txBody>
+      </p:sp>
+    </p:spTree>
+    <p:extLst>
+      <p:ext uri="{BB962C8B-B14F-4D97-AF65-F5344CB8AC3E}">
+        <p14:creationId xmlns:p14="http://schemas.microsoft.com/office/powerpoint/2010/main" val="1335219931"/>
+      </p:ext>
+    </p:extLst>
+  </p:cSld>
+  <p:clrMapOvr>
+    <a:masterClrMapping/>
+  </p:clrMapOvr>
+</p:notes>
+</file>
+
+<file path=ppt/notesSlides/notesSlide3.xml><?xml version="1.0" encoding="utf-8"?>
+<p:notes xmlns:a="http://schemas.openxmlformats.org/drawingml/2006/main" xmlns:r="http://schemas.openxmlformats.org/officeDocument/2006/relationships" xmlns:p="http://schemas.openxmlformats.org/presentationml/2006/main">
+  <p:cSld>
+    <p:spTree>
+      <p:nvGrpSpPr>
+        <p:cNvPr id="1" name=""/>
+        <p:cNvGrpSpPr/>
+        <p:nvPr/>
+      </p:nvGrpSpPr>
+      <p:grpSpPr>
+        <a:xfrm>
+          <a:off x="0" y="0"/>
+          <a:ext cx="0" cy="0"/>
+          <a:chOff x="0" y="0"/>
+          <a:chExt cx="0" cy="0"/>
+        </a:xfrm>
+      </p:grpSpPr>
+      <p:sp>
+        <p:nvSpPr>
+          <p:cNvPr id="2" name="Slide Image Placeholder 1"/>
+          <p:cNvSpPr>
+            <a:spLocks noGrp="1" noRot="1" noChangeAspect="1"/>
+          </p:cNvSpPr>
+          <p:nvPr>
+            <p:ph type="sldImg"/>
+          </p:nvPr>
+        </p:nvSpPr>
+        <p:spPr/>
+      </p:sp>
+      <p:sp>
+        <p:nvSpPr>
+          <p:cNvPr id="3" name="Notes Placeholder 2"/>
+          <p:cNvSpPr>
+            <a:spLocks noGrp="1"/>
+          </p:cNvSpPr>
+          <p:nvPr>
+            <p:ph type="body" idx="1"/>
+          </p:nvPr>
+        </p:nvSpPr>
+        <p:spPr/>
+        <p:txBody>
+          <a:bodyPr/>
+          <a:lstStyle/>
+          <a:p>
+            <a:endParaRPr lang="en-IN" dirty="0"/>
+          </a:p>
+        </p:txBody>
+      </p:sp>
+      <p:sp>
+        <p:nvSpPr>
+          <p:cNvPr id="4" name="Slide Number Placeholder 3"/>
+          <p:cNvSpPr>
+            <a:spLocks noGrp="1"/>
+          </p:cNvSpPr>
+          <p:nvPr>
+            <p:ph type="sldNum" sz="quarter" idx="5"/>
+          </p:nvPr>
+        </p:nvSpPr>
+        <p:spPr/>
+        <p:txBody>
+          <a:bodyPr/>
+          <a:lstStyle/>
+          <a:p>
+            <a:fld id="{8745FC1C-588B-4A38-9F7C-E8E5DAED71F6}" type="slidenum">
+              <a:rPr lang="en-IN" smtClean="0"/>
+              <a:t>8</a:t>
+            </a:fld>
+            <a:endParaRPr lang="en-IN"/>
+          </a:p>
+        </p:txBody>
+      </p:sp>
+    </p:spTree>
+    <p:extLst>
+      <p:ext uri="{BB962C8B-B14F-4D97-AF65-F5344CB8AC3E}">
+        <p14:creationId xmlns:p14="http://schemas.microsoft.com/office/powerpoint/2010/main" val="1381362546"/>
+      </p:ext>
+    </p:extLst>
+  </p:cSld>
+  <p:clrMapOvr>
+    <a:masterClrMapping/>
+  </p:clrMapOvr>
+</p:notes>
+</file>
+
+<file path=ppt/notesSlides/notesSlide4.xml><?xml version="1.0" encoding="utf-8"?>
+<p:notes xmlns:a="http://schemas.openxmlformats.org/drawingml/2006/main" xmlns:r="http://schemas.openxmlformats.org/officeDocument/2006/relationships" xmlns:p="http://schemas.openxmlformats.org/presentationml/2006/main">
+  <p:cSld>
+    <p:spTree>
+      <p:nvGrpSpPr>
+        <p:cNvPr id="1" name="">
+          <a:extLst>
+            <a:ext uri="{FF2B5EF4-FFF2-40B4-BE49-F238E27FC236}">
+              <a16:creationId xmlns:a16="http://schemas.microsoft.com/office/drawing/2014/main" id="{E0FE1475-E71A-B2E2-85FF-1B1D7E84AAA6}"/>
+            </a:ext>
+          </a:extLst>
+        </p:cNvPr>
+        <p:cNvGrpSpPr/>
+        <p:nvPr/>
+      </p:nvGrpSpPr>
+      <p:grpSpPr>
+        <a:xfrm>
+          <a:off x="0" y="0"/>
+          <a:ext cx="0" cy="0"/>
+          <a:chOff x="0" y="0"/>
+          <a:chExt cx="0" cy="0"/>
+        </a:xfrm>
+      </p:grpSpPr>
+      <p:sp>
+        <p:nvSpPr>
+          <p:cNvPr id="2" name="Slide Image Placeholder 1">
+            <a:extLst>
+              <a:ext uri="{FF2B5EF4-FFF2-40B4-BE49-F238E27FC236}">
+                <a16:creationId xmlns:a16="http://schemas.microsoft.com/office/drawing/2014/main" id="{C8564FD6-917B-E02B-A587-1D61FD93DE90}"/>
+              </a:ext>
+            </a:extLst>
+          </p:cNvPr>
+          <p:cNvSpPr>
+            <a:spLocks noGrp="1" noRot="1" noChangeAspect="1"/>
+          </p:cNvSpPr>
+          <p:nvPr>
+            <p:ph type="sldImg"/>
+          </p:nvPr>
+        </p:nvSpPr>
+        <p:spPr/>
+      </p:sp>
+      <p:sp>
+        <p:nvSpPr>
+          <p:cNvPr id="3" name="Notes Placeholder 2">
+            <a:extLst>
+              <a:ext uri="{FF2B5EF4-FFF2-40B4-BE49-F238E27FC236}">
+                <a16:creationId xmlns:a16="http://schemas.microsoft.com/office/drawing/2014/main" id="{8BAAB92D-C784-BCC1-19DE-61F13CAE1762}"/>
+              </a:ext>
+            </a:extLst>
+          </p:cNvPr>
+          <p:cNvSpPr>
+            <a:spLocks noGrp="1"/>
+          </p:cNvSpPr>
+          <p:nvPr>
+            <p:ph type="body" idx="1"/>
+          </p:nvPr>
+        </p:nvSpPr>
+        <p:spPr/>
+        <p:txBody>
+          <a:bodyPr/>
+          <a:lstStyle/>
+          <a:p>
+            <a:endParaRPr lang="en-IN" dirty="0"/>
+          </a:p>
+        </p:txBody>
+      </p:sp>
+      <p:sp>
+        <p:nvSpPr>
+          <p:cNvPr id="4" name="Slide Number Placeholder 3">
+            <a:extLst>
+              <a:ext uri="{FF2B5EF4-FFF2-40B4-BE49-F238E27FC236}">
+                <a16:creationId xmlns:a16="http://schemas.microsoft.com/office/drawing/2014/main" id="{CABEEA61-8658-4CB3-649C-0DE2B4EBC06B}"/>
+              </a:ext>
+            </a:extLst>
+          </p:cNvPr>
+          <p:cNvSpPr>
+            <a:spLocks noGrp="1"/>
+          </p:cNvSpPr>
+          <p:nvPr>
+            <p:ph type="sldNum" sz="quarter" idx="5"/>
+          </p:nvPr>
+        </p:nvSpPr>
+        <p:spPr/>
+        <p:txBody>
+          <a:bodyPr/>
+          <a:lstStyle/>
+          <a:p>
+            <a:fld id="{8745FC1C-588B-4A38-9F7C-E8E5DAED71F6}" type="slidenum">
+              <a:rPr lang="en-IN" smtClean="0"/>
+              <a:t>9</a:t>
+            </a:fld>
+            <a:endParaRPr lang="en-IN"/>
+          </a:p>
+        </p:txBody>
+      </p:sp>
+    </p:spTree>
+    <p:extLst>
+      <p:ext uri="{BB962C8B-B14F-4D97-AF65-F5344CB8AC3E}">
+        <p14:creationId xmlns:p14="http://schemas.microsoft.com/office/powerpoint/2010/main" val="3867853075"/>
+      </p:ext>
+    </p:extLst>
+  </p:cSld>
+  <p:clrMapOvr>
+    <a:masterClrMapping/>
+  </p:clrMapOvr>
+</p:notes>
+</file>
+
+<file path=ppt/notesSlides/notesSlide5.xml><?xml version="1.0" encoding="utf-8"?>
+<p:notes xmlns:a="http://schemas.openxmlformats.org/drawingml/2006/main" xmlns:r="http://schemas.openxmlformats.org/officeDocument/2006/relationships" xmlns:p="http://schemas.openxmlformats.org/presentationml/2006/main">
+  <p:cSld>
+    <p:spTree>
+      <p:nvGrpSpPr>
+        <p:cNvPr id="1" name=""/>
+        <p:cNvGrpSpPr/>
+        <p:nvPr/>
+      </p:nvGrpSpPr>
+      <p:grpSpPr>
+        <a:xfrm>
+          <a:off x="0" y="0"/>
+          <a:ext cx="0" cy="0"/>
+          <a:chOff x="0" y="0"/>
+          <a:chExt cx="0" cy="0"/>
+        </a:xfrm>
+      </p:grpSpPr>
+      <p:sp>
+        <p:nvSpPr>
+          <p:cNvPr id="2" name="Slide Image Placeholder 1"/>
+          <p:cNvSpPr>
+            <a:spLocks noGrp="1" noRot="1" noChangeAspect="1"/>
+          </p:cNvSpPr>
+          <p:nvPr>
+            <p:ph type="sldImg"/>
+          </p:nvPr>
+        </p:nvSpPr>
+        <p:spPr/>
+      </p:sp>
+      <p:sp>
+        <p:nvSpPr>
+          <p:cNvPr id="3" name="Notes Placeholder 2"/>
+          <p:cNvSpPr>
+            <a:spLocks noGrp="1"/>
+          </p:cNvSpPr>
+          <p:nvPr>
+            <p:ph type="body" idx="1"/>
+          </p:nvPr>
+        </p:nvSpPr>
+        <p:spPr/>
+        <p:txBody>
+          <a:bodyPr/>
+          <a:lstStyle/>
+          <a:p>
+            <a:endParaRPr lang="en-IN" dirty="0"/>
+          </a:p>
+        </p:txBody>
+      </p:sp>
+      <p:sp>
+        <p:nvSpPr>
+          <p:cNvPr id="4" name="Slide Number Placeholder 3"/>
+          <p:cNvSpPr>
+            <a:spLocks noGrp="1"/>
+          </p:cNvSpPr>
+          <p:nvPr>
+            <p:ph type="sldNum" sz="quarter" idx="5"/>
+          </p:nvPr>
+        </p:nvSpPr>
+        <p:spPr/>
+        <p:txBody>
+          <a:bodyPr/>
+          <a:lstStyle/>
+          <a:p>
+            <a:fld id="{8745FC1C-588B-4A38-9F7C-E8E5DAED71F6}" type="slidenum">
+              <a:rPr lang="en-IN" smtClean="0"/>
+              <a:t>11</a:t>
+            </a:fld>
+            <a:endParaRPr lang="en-IN"/>
+          </a:p>
+        </p:txBody>
+      </p:sp>
+    </p:spTree>
+    <p:extLst>
+      <p:ext uri="{BB962C8B-B14F-4D97-AF65-F5344CB8AC3E}">
+        <p14:creationId xmlns:p14="http://schemas.microsoft.com/office/powerpoint/2010/main" val="2450365150"/>
+      </p:ext>
+    </p:extLst>
+  </p:cSld>
+  <p:clrMapOvr>
+    <a:masterClrMapping/>
+  </p:clrMapOvr>
+</p:notes>
+</file>
+
+<file path=ppt/notesSlides/notesSlide6.xml><?xml version="1.0" encoding="utf-8"?>
+<p:notes xmlns:a="http://schemas.openxmlformats.org/drawingml/2006/main" xmlns:r="http://schemas.openxmlformats.org/officeDocument/2006/relationships" xmlns:p="http://schemas.openxmlformats.org/presentationml/2006/main">
+  <p:cSld>
+    <p:spTree>
+      <p:nvGrpSpPr>
+        <p:cNvPr id="1" name="">
+          <a:extLst>
+            <a:ext uri="{FF2B5EF4-FFF2-40B4-BE49-F238E27FC236}">
+              <a16:creationId xmlns:a16="http://schemas.microsoft.com/office/drawing/2014/main" id="{3DDC4F01-A0E2-FC02-5204-DD6465A91CB9}"/>
+            </a:ext>
+          </a:extLst>
+        </p:cNvPr>
+        <p:cNvGrpSpPr/>
+        <p:nvPr/>
+      </p:nvGrpSpPr>
+      <p:grpSpPr>
+        <a:xfrm>
+          <a:off x="0" y="0"/>
+          <a:ext cx="0" cy="0"/>
+          <a:chOff x="0" y="0"/>
+          <a:chExt cx="0" cy="0"/>
+        </a:xfrm>
+      </p:grpSpPr>
+      <p:sp>
+        <p:nvSpPr>
+          <p:cNvPr id="2" name="Slide Image Placeholder 1">
+            <a:extLst>
+              <a:ext uri="{FF2B5EF4-FFF2-40B4-BE49-F238E27FC236}">
+                <a16:creationId xmlns:a16="http://schemas.microsoft.com/office/drawing/2014/main" id="{C35C6A02-00D0-F31A-73F8-8ED4D5F21AFF}"/>
+              </a:ext>
+            </a:extLst>
+          </p:cNvPr>
+          <p:cNvSpPr>
+            <a:spLocks noGrp="1" noRot="1" noChangeAspect="1"/>
+          </p:cNvSpPr>
+          <p:nvPr>
+            <p:ph type="sldImg"/>
+          </p:nvPr>
+        </p:nvSpPr>
+        <p:spPr/>
+      </p:sp>
+      <p:sp>
+        <p:nvSpPr>
+          <p:cNvPr id="3" name="Notes Placeholder 2">
+            <a:extLst>
+              <a:ext uri="{FF2B5EF4-FFF2-40B4-BE49-F238E27FC236}">
+                <a16:creationId xmlns:a16="http://schemas.microsoft.com/office/drawing/2014/main" id="{077ED00B-19EB-D7A0-881A-2CB46B4F4364}"/>
+              </a:ext>
+            </a:extLst>
+          </p:cNvPr>
+          <p:cNvSpPr>
+            <a:spLocks noGrp="1"/>
+          </p:cNvSpPr>
+          <p:nvPr>
+            <p:ph type="body" idx="1"/>
+          </p:nvPr>
+        </p:nvSpPr>
+        <p:spPr/>
+        <p:txBody>
+          <a:bodyPr/>
+          <a:lstStyle/>
+          <a:p>
+            <a:endParaRPr lang="en-IN" dirty="0"/>
+          </a:p>
+        </p:txBody>
+      </p:sp>
+      <p:sp>
+        <p:nvSpPr>
+          <p:cNvPr id="4" name="Slide Number Placeholder 3">
+            <a:extLst>
+              <a:ext uri="{FF2B5EF4-FFF2-40B4-BE49-F238E27FC236}">
+                <a16:creationId xmlns:a16="http://schemas.microsoft.com/office/drawing/2014/main" id="{3AA9CA2E-F2A3-65C6-1503-586AD631DBEA}"/>
+              </a:ext>
+            </a:extLst>
+          </p:cNvPr>
+          <p:cNvSpPr>
+            <a:spLocks noGrp="1"/>
+          </p:cNvSpPr>
+          <p:nvPr>
+            <p:ph type="sldNum" sz="quarter" idx="5"/>
+          </p:nvPr>
+        </p:nvSpPr>
+        <p:spPr/>
+        <p:txBody>
+          <a:bodyPr/>
+          <a:lstStyle/>
+          <a:p>
+            <a:fld id="{8745FC1C-588B-4A38-9F7C-E8E5DAED71F6}" type="slidenum">
+              <a:rPr lang="en-IN" smtClean="0"/>
+              <a:t>12</a:t>
+            </a:fld>
+            <a:endParaRPr lang="en-IN"/>
+          </a:p>
+        </p:txBody>
+      </p:sp>
+    </p:spTree>
+    <p:extLst>
+      <p:ext uri="{BB962C8B-B14F-4D97-AF65-F5344CB8AC3E}">
+        <p14:creationId xmlns:p14="http://schemas.microsoft.com/office/powerpoint/2010/main" val="1937182830"/>
+      </p:ext>
+    </p:extLst>
+  </p:cSld>
+  <p:clrMapOvr>
+    <a:masterClrMapping/>
+  </p:clrMapOvr>
+</p:notes>
+</file>
+
+<file path=ppt/notesSlides/notesSlide7.xml><?xml version="1.0" encoding="utf-8"?>
+<p:notes xmlns:a="http://schemas.openxmlformats.org/drawingml/2006/main" xmlns:r="http://schemas.openxmlformats.org/officeDocument/2006/relationships" xmlns:p="http://schemas.openxmlformats.org/presentationml/2006/main">
+  <p:cSld>
+    <p:spTree>
+      <p:nvGrpSpPr>
+        <p:cNvPr id="1" name="">
+          <a:extLst>
+            <a:ext uri="{FF2B5EF4-FFF2-40B4-BE49-F238E27FC236}">
+              <a16:creationId xmlns:a16="http://schemas.microsoft.com/office/drawing/2014/main" id="{0F9A3AD7-7411-17A8-D754-8933F0FE28FA}"/>
+            </a:ext>
+          </a:extLst>
+        </p:cNvPr>
+        <p:cNvGrpSpPr/>
+        <p:nvPr/>
+      </p:nvGrpSpPr>
+      <p:grpSpPr>
+        <a:xfrm>
+          <a:off x="0" y="0"/>
+          <a:ext cx="0" cy="0"/>
+          <a:chOff x="0" y="0"/>
+          <a:chExt cx="0" cy="0"/>
+        </a:xfrm>
+      </p:grpSpPr>
+      <p:sp>
+        <p:nvSpPr>
+          <p:cNvPr id="2" name="Slide Image Placeholder 1">
+            <a:extLst>
+              <a:ext uri="{FF2B5EF4-FFF2-40B4-BE49-F238E27FC236}">
+                <a16:creationId xmlns:a16="http://schemas.microsoft.com/office/drawing/2014/main" id="{41854877-D937-DFFD-F168-311289EDC29A}"/>
+              </a:ext>
+            </a:extLst>
+          </p:cNvPr>
+          <p:cNvSpPr>
+            <a:spLocks noGrp="1" noRot="1" noChangeAspect="1"/>
+          </p:cNvSpPr>
+          <p:nvPr>
+            <p:ph type="sldImg"/>
+          </p:nvPr>
+        </p:nvSpPr>
+        <p:spPr/>
+      </p:sp>
+      <p:sp>
+        <p:nvSpPr>
+          <p:cNvPr id="3" name="Notes Placeholder 2">
+            <a:extLst>
+              <a:ext uri="{FF2B5EF4-FFF2-40B4-BE49-F238E27FC236}">
+                <a16:creationId xmlns:a16="http://schemas.microsoft.com/office/drawing/2014/main" id="{8C16A81C-37E2-C55D-C999-FC52E518C961}"/>
+              </a:ext>
+            </a:extLst>
+          </p:cNvPr>
+          <p:cNvSpPr>
+            <a:spLocks noGrp="1"/>
+          </p:cNvSpPr>
+          <p:nvPr>
+            <p:ph type="body" idx="1"/>
+          </p:nvPr>
+        </p:nvSpPr>
+        <p:spPr/>
+        <p:txBody>
+          <a:bodyPr/>
+          <a:lstStyle/>
+          <a:p>
+            <a:endParaRPr lang="en-IN" dirty="0"/>
+          </a:p>
+        </p:txBody>
+      </p:sp>
+      <p:sp>
+        <p:nvSpPr>
+          <p:cNvPr id="4" name="Slide Number Placeholder 3">
+            <a:extLst>
+              <a:ext uri="{FF2B5EF4-FFF2-40B4-BE49-F238E27FC236}">
+                <a16:creationId xmlns:a16="http://schemas.microsoft.com/office/drawing/2014/main" id="{F1334162-D81F-0FA1-4C09-F4B4B2281F4A}"/>
+              </a:ext>
+            </a:extLst>
+          </p:cNvPr>
+          <p:cNvSpPr>
+            <a:spLocks noGrp="1"/>
+          </p:cNvSpPr>
+          <p:nvPr>
+            <p:ph type="sldNum" sz="quarter" idx="5"/>
+          </p:nvPr>
+        </p:nvSpPr>
+        <p:spPr/>
+        <p:txBody>
+          <a:bodyPr/>
+          <a:lstStyle/>
+          <a:p>
+            <a:fld id="{8745FC1C-588B-4A38-9F7C-E8E5DAED71F6}" type="slidenum">
+              <a:rPr lang="en-IN" smtClean="0"/>
+              <a:t>13</a:t>
+            </a:fld>
+            <a:endParaRPr lang="en-IN"/>
+          </a:p>
+        </p:txBody>
+      </p:sp>
+    </p:spTree>
+    <p:extLst>
+      <p:ext uri="{BB962C8B-B14F-4D97-AF65-F5344CB8AC3E}">
+        <p14:creationId xmlns:p14="http://schemas.microsoft.com/office/powerpoint/2010/main" val="2049344414"/>
+      </p:ext>
+    </p:extLst>
+  </p:cSld>
+  <p:clrMapOvr>
+    <a:masterClrMapping/>
+  </p:clrMapOvr>
+</p:notes>
+</file>
+
+<file path=ppt/notesSlides/notesSlide8.xml><?xml version="1.0" encoding="utf-8"?>
+<p:notes xmlns:a="http://schemas.openxmlformats.org/drawingml/2006/main" xmlns:r="http://schemas.openxmlformats.org/officeDocument/2006/relationships" xmlns:p="http://schemas.openxmlformats.org/presentationml/2006/main">
+  <p:cSld>
+    <p:spTree>
+      <p:nvGrpSpPr>
+        <p:cNvPr id="1" name="">
+          <a:extLst>
+            <a:ext uri="{FF2B5EF4-FFF2-40B4-BE49-F238E27FC236}">
+              <a16:creationId xmlns:a16="http://schemas.microsoft.com/office/drawing/2014/main" id="{E2DB5931-6763-92B6-1895-03F9E052381C}"/>
+            </a:ext>
+          </a:extLst>
+        </p:cNvPr>
+        <p:cNvGrpSpPr/>
+        <p:nvPr/>
+      </p:nvGrpSpPr>
+      <p:grpSpPr>
+        <a:xfrm>
+          <a:off x="0" y="0"/>
+          <a:ext cx="0" cy="0"/>
+          <a:chOff x="0" y="0"/>
+          <a:chExt cx="0" cy="0"/>
+        </a:xfrm>
+      </p:grpSpPr>
+      <p:sp>
+        <p:nvSpPr>
+          <p:cNvPr id="2" name="Slide Image Placeholder 1">
+            <a:extLst>
+              <a:ext uri="{FF2B5EF4-FFF2-40B4-BE49-F238E27FC236}">
+                <a16:creationId xmlns:a16="http://schemas.microsoft.com/office/drawing/2014/main" id="{364E8EC0-FBC0-1D66-FE26-B0D617729A42}"/>
+              </a:ext>
+            </a:extLst>
+          </p:cNvPr>
+          <p:cNvSpPr>
+            <a:spLocks noGrp="1" noRot="1" noChangeAspect="1"/>
+          </p:cNvSpPr>
+          <p:nvPr>
+            <p:ph type="sldImg"/>
+          </p:nvPr>
+        </p:nvSpPr>
+        <p:spPr/>
+      </p:sp>
+      <p:sp>
+        <p:nvSpPr>
+          <p:cNvPr id="3" name="Notes Placeholder 2">
+            <a:extLst>
+              <a:ext uri="{FF2B5EF4-FFF2-40B4-BE49-F238E27FC236}">
+                <a16:creationId xmlns:a16="http://schemas.microsoft.com/office/drawing/2014/main" id="{052C8B8D-57A1-7849-7F6E-667BAEFAB12D}"/>
+              </a:ext>
+            </a:extLst>
+          </p:cNvPr>
+          <p:cNvSpPr>
+            <a:spLocks noGrp="1"/>
+          </p:cNvSpPr>
+          <p:nvPr>
+            <p:ph type="body" idx="1"/>
+          </p:nvPr>
+        </p:nvSpPr>
+        <p:spPr/>
+        <p:txBody>
+          <a:bodyPr/>
+          <a:lstStyle/>
+          <a:p>
+            <a:endParaRPr lang="en-IN" dirty="0"/>
+          </a:p>
+        </p:txBody>
+      </p:sp>
+      <p:sp>
+        <p:nvSpPr>
+          <p:cNvPr id="4" name="Slide Number Placeholder 3">
+            <a:extLst>
+              <a:ext uri="{FF2B5EF4-FFF2-40B4-BE49-F238E27FC236}">
+                <a16:creationId xmlns:a16="http://schemas.microsoft.com/office/drawing/2014/main" id="{8CEF45A5-BF4F-F833-91A4-92E7BA909C03}"/>
+              </a:ext>
+            </a:extLst>
+          </p:cNvPr>
+          <p:cNvSpPr>
+            <a:spLocks noGrp="1"/>
+          </p:cNvSpPr>
+          <p:nvPr>
+            <p:ph type="sldNum" sz="quarter" idx="5"/>
+          </p:nvPr>
+        </p:nvSpPr>
+        <p:spPr/>
+        <p:txBody>
+          <a:bodyPr/>
+          <a:lstStyle/>
+          <a:p>
+            <a:fld id="{8745FC1C-588B-4A38-9F7C-E8E5DAED71F6}" type="slidenum">
+              <a:rPr lang="en-IN" smtClean="0"/>
+              <a:t>14</a:t>
+            </a:fld>
+            <a:endParaRPr lang="en-IN"/>
+          </a:p>
+        </p:txBody>
+      </p:sp>
+    </p:spTree>
+    <p:extLst>
+      <p:ext uri="{BB962C8B-B14F-4D97-AF65-F5344CB8AC3E}">
+        <p14:creationId xmlns:p14="http://schemas.microsoft.com/office/powerpoint/2010/main" val="2560346877"/>
+      </p:ext>
+    </p:extLst>
+  </p:cSld>
+  <p:clrMapOvr>
+    <a:masterClrMapping/>
+  </p:clrMapOvr>
+</p:notes>
+</file>
+
+<file path=ppt/notesSlides/notesSlide9.xml><?xml version="1.0" encoding="utf-8"?>
+<p:notes xmlns:a="http://schemas.openxmlformats.org/drawingml/2006/main" xmlns:r="http://schemas.openxmlformats.org/officeDocument/2006/relationships" xmlns:p="http://schemas.openxmlformats.org/presentationml/2006/main">
+  <p:cSld>
+    <p:spTree>
+      <p:nvGrpSpPr>
+        <p:cNvPr id="1" name="">
+          <a:extLst>
+            <a:ext uri="{FF2B5EF4-FFF2-40B4-BE49-F238E27FC236}">
+              <a16:creationId xmlns:a16="http://schemas.microsoft.com/office/drawing/2014/main" id="{BF28B62D-FCDC-1102-52AF-43AA3B58C42D}"/>
+            </a:ext>
+          </a:extLst>
+        </p:cNvPr>
+        <p:cNvGrpSpPr/>
+        <p:nvPr/>
+      </p:nvGrpSpPr>
+      <p:grpSpPr>
+        <a:xfrm>
+          <a:off x="0" y="0"/>
+          <a:ext cx="0" cy="0"/>
+          <a:chOff x="0" y="0"/>
+          <a:chExt cx="0" cy="0"/>
+        </a:xfrm>
+      </p:grpSpPr>
+      <p:sp>
+        <p:nvSpPr>
+          <p:cNvPr id="2" name="Slide Image Placeholder 1">
+            <a:extLst>
+              <a:ext uri="{FF2B5EF4-FFF2-40B4-BE49-F238E27FC236}">
+                <a16:creationId xmlns:a16="http://schemas.microsoft.com/office/drawing/2014/main" id="{150CBA3F-6E0F-B470-3906-2C0425315307}"/>
+              </a:ext>
+            </a:extLst>
+          </p:cNvPr>
+          <p:cNvSpPr>
+            <a:spLocks noGrp="1" noRot="1" noChangeAspect="1"/>
+          </p:cNvSpPr>
+          <p:nvPr>
+            <p:ph type="sldImg"/>
+          </p:nvPr>
+        </p:nvSpPr>
+        <p:spPr/>
+      </p:sp>
+      <p:sp>
+        <p:nvSpPr>
+          <p:cNvPr id="3" name="Notes Placeholder 2">
+            <a:extLst>
+              <a:ext uri="{FF2B5EF4-FFF2-40B4-BE49-F238E27FC236}">
+                <a16:creationId xmlns:a16="http://schemas.microsoft.com/office/drawing/2014/main" id="{C3209F73-A83E-1971-471F-15505A58B5B1}"/>
+              </a:ext>
+            </a:extLst>
+          </p:cNvPr>
+          <p:cNvSpPr>
+            <a:spLocks noGrp="1"/>
+          </p:cNvSpPr>
+          <p:nvPr>
+            <p:ph type="body" idx="1"/>
+          </p:nvPr>
+        </p:nvSpPr>
+        <p:spPr/>
+        <p:txBody>
+          <a:bodyPr/>
+          <a:lstStyle/>
+          <a:p>
+            <a:endParaRPr lang="en-IN" dirty="0"/>
+          </a:p>
+        </p:txBody>
+      </p:sp>
+      <p:sp>
+        <p:nvSpPr>
+          <p:cNvPr id="4" name="Slide Number Placeholder 3">
+            <a:extLst>
+              <a:ext uri="{FF2B5EF4-FFF2-40B4-BE49-F238E27FC236}">
+                <a16:creationId xmlns:a16="http://schemas.microsoft.com/office/drawing/2014/main" id="{CDFB38C4-1298-0F09-BF6E-1E3407B52796}"/>
+              </a:ext>
+            </a:extLst>
+          </p:cNvPr>
+          <p:cNvSpPr>
+            <a:spLocks noGrp="1"/>
+          </p:cNvSpPr>
+          <p:nvPr>
+            <p:ph type="sldNum" sz="quarter" idx="5"/>
+          </p:nvPr>
+        </p:nvSpPr>
+        <p:spPr/>
+        <p:txBody>
+          <a:bodyPr/>
+          <a:lstStyle/>
+          <a:p>
+            <a:fld id="{8745FC1C-588B-4A38-9F7C-E8E5DAED71F6}" type="slidenum">
+              <a:rPr lang="en-IN" smtClean="0"/>
+              <a:t>15</a:t>
+            </a:fld>
+            <a:endParaRPr lang="en-IN"/>
+          </a:p>
+        </p:txBody>
+      </p:sp>
+    </p:spTree>
+    <p:extLst>
+      <p:ext uri="{BB962C8B-B14F-4D97-AF65-F5344CB8AC3E}">
+        <p14:creationId xmlns:p14="http://schemas.microsoft.com/office/powerpoint/2010/main" val="3448444657"/>
+      </p:ext>
+    </p:extLst>
+  </p:cSld>
+  <p:clrMapOvr>
+    <a:masterClrMapping/>
+  </p:clrMapOvr>
+</p:notes>
+</file>
+
 <file path=ppt/slideLayouts/slideLayout1.xml><?xml version="1.0" encoding="utf-8"?>
 <p:sldLayout xmlns:a="http://schemas.openxmlformats.org/drawingml/2006/main" xmlns:r="http://schemas.openxmlformats.org/officeDocument/2006/relationships" xmlns:p="http://schemas.openxmlformats.org/presentationml/2006/main" type="title" preserve="1">
   <p:cSld name="Title Slide">
@@ -4161,7 +4964,7 @@
           <a:p>
             <a:fld id="{512FD7D0-BF4F-4E08-BD42-AA649BFE9809}" type="datetimeFigureOut">
               <a:rPr lang="en-IN" smtClean="0"/>
-              <a:t>14-03-2025</a:t>
+              <a:t>15-03-2025</a:t>
             </a:fld>
             <a:endParaRPr lang="en-IN"/>
           </a:p>
@@ -4256,7 +5059,7 @@
           <a:p>
             <a:fld id="{512FD7D0-BF4F-4E08-BD42-AA649BFE9809}" type="datetimeFigureOut">
               <a:rPr lang="en-IN" smtClean="0"/>
-              <a:t>14-03-2025</a:t>
+              <a:t>15-03-2025</a:t>
             </a:fld>
             <a:endParaRPr lang="en-IN"/>
           </a:p>
@@ -4549,7 +5352,7 @@
           <a:p>
             <a:fld id="{512FD7D0-BF4F-4E08-BD42-AA649BFE9809}" type="datetimeFigureOut">
               <a:rPr lang="en-IN" smtClean="0"/>
-              <a:t>14-03-2025</a:t>
+              <a:t>15-03-2025</a:t>
             </a:fld>
             <a:endParaRPr lang="en-IN"/>
           </a:p>
@@ -4806,7 +5609,7 @@
           <a:p>
             <a:fld id="{512FD7D0-BF4F-4E08-BD42-AA649BFE9809}" type="datetimeFigureOut">
               <a:rPr lang="en-IN" smtClean="0"/>
-              <a:t>14-03-2025</a:t>
+              <a:t>15-03-2025</a:t>
             </a:fld>
             <a:endParaRPr lang="en-IN"/>
           </a:p>
@@ -4976,7 +5779,7 @@
           <a:p>
             <a:fld id="{512FD7D0-BF4F-4E08-BD42-AA649BFE9809}" type="datetimeFigureOut">
               <a:rPr lang="en-IN" smtClean="0"/>
-              <a:t>14-03-2025</a:t>
+              <a:t>15-03-2025</a:t>
             </a:fld>
             <a:endParaRPr lang="en-IN"/>
           </a:p>
@@ -5156,7 +5959,7 @@
           <a:p>
             <a:fld id="{512FD7D0-BF4F-4E08-BD42-AA649BFE9809}" type="datetimeFigureOut">
               <a:rPr lang="en-IN" smtClean="0"/>
-              <a:t>14-03-2025</a:t>
+              <a:t>15-03-2025</a:t>
             </a:fld>
             <a:endParaRPr lang="en-IN"/>
           </a:p>
@@ -5289,7 +6092,7 @@
           <a:p>
             <a:fld id="{512FD7D0-BF4F-4E08-BD42-AA649BFE9809}" type="datetimeFigureOut">
               <a:rPr lang="en-IN" smtClean="0"/>
-              <a:t>14-03-2025</a:t>
+              <a:t>15-03-2025</a:t>
             </a:fld>
             <a:endParaRPr lang="en-IN"/>
           </a:p>
@@ -5419,7 +6222,7 @@
           <a:p>
             <a:fld id="{512FD7D0-BF4F-4E08-BD42-AA649BFE9809}" type="datetimeFigureOut">
               <a:rPr lang="en-IN" smtClean="0"/>
-              <a:t>14-03-2025</a:t>
+              <a:t>15-03-2025</a:t>
             </a:fld>
             <a:endParaRPr lang="en-IN"/>
           </a:p>
@@ -5621,7 +6424,7 @@
           <a:p>
             <a:fld id="{512FD7D0-BF4F-4E08-BD42-AA649BFE9809}" type="datetimeFigureOut">
               <a:rPr lang="en-IN" smtClean="0"/>
-              <a:t>14-03-2025</a:t>
+              <a:t>15-03-2025</a:t>
             </a:fld>
             <a:endParaRPr lang="en-IN"/>
           </a:p>
@@ -5843,7 +6646,7 @@
           <a:p>
             <a:fld id="{512FD7D0-BF4F-4E08-BD42-AA649BFE9809}" type="datetimeFigureOut">
               <a:rPr lang="en-IN" smtClean="0"/>
-              <a:t>14-03-2025</a:t>
+              <a:t>15-03-2025</a:t>
             </a:fld>
             <a:endParaRPr lang="en-IN"/>
           </a:p>
@@ -6089,7 +6892,7 @@
           <a:p>
             <a:fld id="{512FD7D0-BF4F-4E08-BD42-AA649BFE9809}" type="datetimeFigureOut">
               <a:rPr lang="en-IN" smtClean="0"/>
-              <a:t>14-03-2025</a:t>
+              <a:t>15-03-2025</a:t>
             </a:fld>
             <a:endParaRPr lang="en-IN"/>
           </a:p>
@@ -6321,7 +7124,7 @@
           <a:p>
             <a:fld id="{512FD7D0-BF4F-4E08-BD42-AA649BFE9809}" type="datetimeFigureOut">
               <a:rPr lang="en-IN" smtClean="0"/>
-              <a:t>14-03-2025</a:t>
+              <a:t>15-03-2025</a:t>
             </a:fld>
             <a:endParaRPr lang="en-IN"/>
           </a:p>
@@ -6688,7 +7491,7 @@
           <a:p>
             <a:fld id="{512FD7D0-BF4F-4E08-BD42-AA649BFE9809}" type="datetimeFigureOut">
               <a:rPr lang="en-IN" smtClean="0"/>
-              <a:t>14-03-2025</a:t>
+              <a:t>15-03-2025</a:t>
             </a:fld>
             <a:endParaRPr lang="en-IN"/>
           </a:p>
@@ -6811,7 +7614,7 @@
           <a:p>
             <a:fld id="{512FD7D0-BF4F-4E08-BD42-AA649BFE9809}" type="datetimeFigureOut">
               <a:rPr lang="en-IN" smtClean="0"/>
-              <a:t>14-03-2025</a:t>
+              <a:t>15-03-2025</a:t>
             </a:fld>
             <a:endParaRPr lang="en-IN"/>
           </a:p>
@@ -7022,7 +7825,7 @@
           <a:p>
             <a:fld id="{512FD7D0-BF4F-4E08-BD42-AA649BFE9809}" type="datetimeFigureOut">
               <a:rPr lang="en-IN" smtClean="0"/>
-              <a:t>14-03-2025</a:t>
+              <a:t>15-03-2025</a:t>
             </a:fld>
             <a:endParaRPr lang="en-IN"/>
           </a:p>
@@ -7484,18 +8287,4611 @@
   <p:clrMapOvr>
     <a:masterClrMapping/>
   </p:clrMapOvr>
-  <mc:AlternateContent xmlns:mc="http://schemas.openxmlformats.org/markup-compatibility/2006">
-    <mc:Choice xmlns:p159="http://schemas.microsoft.com/office/powerpoint/2015/09/main" Requires="p159">
+  <mc:AlternateContent xmlns:mc="http://schemas.openxmlformats.org/markup-compatibility/2006" xmlns:p159="http://schemas.microsoft.com/office/powerpoint/2015/09/main">
+    <mc:Choice Requires="p159">
       <p:transition xmlns:p14="http://schemas.microsoft.com/office/powerpoint/2010/main" spd="slow" p14:dur="2000">
         <p159:morph option="byObject"/>
       </p:transition>
     </mc:Choice>
-    <mc:Fallback>
+    <mc:Fallback xmlns="">
       <p:transition spd="slow">
         <p:fade/>
       </p:transition>
     </mc:Fallback>
   </mc:AlternateContent>
+</p:sld>
+</file>
+
+<file path=ppt/slides/slide10.xml><?xml version="1.0" encoding="utf-8"?>
+<p:sld xmlns:a="http://schemas.openxmlformats.org/drawingml/2006/main" xmlns:r="http://schemas.openxmlformats.org/officeDocument/2006/relationships" xmlns:p="http://schemas.openxmlformats.org/presentationml/2006/main">
+  <p:cSld>
+    <p:spTree>
+      <p:nvGrpSpPr>
+        <p:cNvPr id="1" name="">
+          <a:extLst>
+            <a:ext uri="{FF2B5EF4-FFF2-40B4-BE49-F238E27FC236}">
+              <a16:creationId xmlns:a16="http://schemas.microsoft.com/office/drawing/2014/main" id="{11E00DC4-D586-6835-2FBC-10D3896139FD}"/>
+            </a:ext>
+          </a:extLst>
+        </p:cNvPr>
+        <p:cNvGrpSpPr/>
+        <p:nvPr/>
+      </p:nvGrpSpPr>
+      <p:grpSpPr>
+        <a:xfrm>
+          <a:off x="0" y="0"/>
+          <a:ext cx="0" cy="0"/>
+          <a:chOff x="0" y="0"/>
+          <a:chExt cx="0" cy="0"/>
+        </a:xfrm>
+      </p:grpSpPr>
+      <p:sp>
+        <p:nvSpPr>
+          <p:cNvPr id="2" name="Title 1">
+            <a:extLst>
+              <a:ext uri="{FF2B5EF4-FFF2-40B4-BE49-F238E27FC236}">
+                <a16:creationId xmlns:a16="http://schemas.microsoft.com/office/drawing/2014/main" id="{2F9EE1A7-6133-B4DE-224B-BD94D93E0E43}"/>
+              </a:ext>
+            </a:extLst>
+          </p:cNvPr>
+          <p:cNvSpPr>
+            <a:spLocks noGrp="1"/>
+          </p:cNvSpPr>
+          <p:nvPr>
+            <p:ph type="title"/>
+          </p:nvPr>
+        </p:nvSpPr>
+        <p:spPr/>
+        <p:txBody>
+          <a:bodyPr/>
+          <a:lstStyle/>
+          <a:p>
+            <a:r>
+              <a:rPr lang="en-IN" dirty="0"/>
+              <a:t>print</a:t>
+            </a:r>
+          </a:p>
+        </p:txBody>
+      </p:sp>
+      <p:sp>
+        <p:nvSpPr>
+          <p:cNvPr id="3" name="Content Placeholder 2">
+            <a:extLst>
+              <a:ext uri="{FF2B5EF4-FFF2-40B4-BE49-F238E27FC236}">
+                <a16:creationId xmlns:a16="http://schemas.microsoft.com/office/drawing/2014/main" id="{D335C074-1C72-0D5A-1FE4-8ACD2EE30F7B}"/>
+              </a:ext>
+            </a:extLst>
+          </p:cNvPr>
+          <p:cNvSpPr>
+            <a:spLocks noGrp="1"/>
+          </p:cNvSpPr>
+          <p:nvPr>
+            <p:ph idx="1"/>
+          </p:nvPr>
+        </p:nvSpPr>
+        <p:spPr/>
+        <p:txBody>
+          <a:bodyPr anchor="t">
+            <a:normAutofit/>
+          </a:bodyPr>
+          <a:lstStyle/>
+          <a:p>
+            <a:pPr marL="0" indent="0" algn="ctr">
+              <a:buNone/>
+            </a:pPr>
+            <a:endParaRPr lang="en-IN" sz="6400" dirty="0">
+              <a:solidFill>
+                <a:schemeClr val="accent5"/>
+              </a:solidFill>
+            </a:endParaRPr>
+          </a:p>
+          <a:p>
+            <a:pPr marL="0" indent="0" algn="ctr">
+              <a:buNone/>
+            </a:pPr>
+            <a:endParaRPr lang="en-IN" sz="6400" dirty="0">
+              <a:solidFill>
+                <a:schemeClr val="accent5"/>
+              </a:solidFill>
+            </a:endParaRPr>
+          </a:p>
+          <a:p>
+            <a:pPr marL="0" indent="0" algn="ctr">
+              <a:buNone/>
+            </a:pPr>
+            <a:r>
+              <a:rPr lang="en-IN" sz="6400" dirty="0">
+                <a:solidFill>
+                  <a:srgbClr val="0009C4"/>
+                </a:solidFill>
+              </a:rPr>
+              <a:t>print</a:t>
+            </a:r>
+            <a:r>
+              <a:rPr lang="en-IN" sz="6400" dirty="0">
+                <a:solidFill>
+                  <a:schemeClr val="tx1"/>
+                </a:solidFill>
+              </a:rPr>
+              <a:t> (</a:t>
+            </a:r>
+            <a:r>
+              <a:rPr lang="en-IN" sz="6400" dirty="0">
+                <a:solidFill>
+                  <a:schemeClr val="accent3"/>
+                </a:solidFill>
+              </a:rPr>
+              <a:t>&lt;expr&gt;</a:t>
+            </a:r>
+            <a:r>
+              <a:rPr lang="en-IN" sz="6400" dirty="0">
+                <a:solidFill>
+                  <a:schemeClr val="tx1"/>
+                </a:solidFill>
+              </a:rPr>
+              <a:t>, </a:t>
+            </a:r>
+            <a:r>
+              <a:rPr lang="en-IN" sz="6400" dirty="0">
+                <a:solidFill>
+                  <a:schemeClr val="accent3"/>
+                </a:solidFill>
+              </a:rPr>
+              <a:t>&lt;expr&gt;</a:t>
+            </a:r>
+            <a:r>
+              <a:rPr lang="en-IN" sz="6400" dirty="0">
+                <a:solidFill>
+                  <a:schemeClr val="tx1"/>
+                </a:solidFill>
+              </a:rPr>
+              <a:t>, </a:t>
+            </a:r>
+            <a:r>
+              <a:rPr lang="en-IN" sz="6400" dirty="0">
+                <a:solidFill>
+                  <a:schemeClr val="accent3"/>
+                </a:solidFill>
+              </a:rPr>
+              <a:t>&lt;expr&gt;</a:t>
+            </a:r>
+            <a:r>
+              <a:rPr lang="en-IN" sz="6400" dirty="0">
+                <a:solidFill>
+                  <a:schemeClr val="tx1"/>
+                </a:solidFill>
+              </a:rPr>
+              <a:t>, … , </a:t>
+            </a:r>
+            <a:r>
+              <a:rPr lang="en-IN" sz="6400" dirty="0">
+                <a:solidFill>
+                  <a:schemeClr val="accent3"/>
+                </a:solidFill>
+              </a:rPr>
+              <a:t>&lt;expr&gt;</a:t>
+            </a:r>
+            <a:r>
+              <a:rPr lang="en-IN" sz="6400" dirty="0">
+                <a:solidFill>
+                  <a:schemeClr val="tx1"/>
+                </a:solidFill>
+              </a:rPr>
+              <a:t>,</a:t>
+            </a:r>
+            <a:endParaRPr lang="en-IN" sz="6400" dirty="0"/>
+          </a:p>
+        </p:txBody>
+      </p:sp>
+      <p:sp>
+        <p:nvSpPr>
+          <p:cNvPr id="4" name="Left Brace 3">
+            <a:extLst>
+              <a:ext uri="{FF2B5EF4-FFF2-40B4-BE49-F238E27FC236}">
+                <a16:creationId xmlns:a16="http://schemas.microsoft.com/office/drawing/2014/main" id="{57EBCE7C-F06C-1A86-C914-0B2D9D2077A3}"/>
+              </a:ext>
+            </a:extLst>
+          </p:cNvPr>
+          <p:cNvSpPr/>
+          <p:nvPr/>
+        </p:nvSpPr>
+        <p:spPr>
+          <a:xfrm rot="16200000" flipH="1">
+            <a:off x="9526197" y="-2523394"/>
+            <a:ext cx="1106607" cy="12703128"/>
+          </a:xfrm>
+          <a:prstGeom prst="leftBrace">
+            <a:avLst>
+              <a:gd name="adj1" fmla="val 101060"/>
+              <a:gd name="adj2" fmla="val 50000"/>
+            </a:avLst>
+          </a:prstGeom>
+          <a:ln w="28575">
+            <a:solidFill>
+              <a:schemeClr val="accent2"/>
+            </a:solidFill>
+          </a:ln>
+        </p:spPr>
+        <p:style>
+          <a:lnRef idx="2">
+            <a:schemeClr val="accent1"/>
+          </a:lnRef>
+          <a:fillRef idx="0">
+            <a:schemeClr val="accent1"/>
+          </a:fillRef>
+          <a:effectRef idx="1">
+            <a:schemeClr val="accent1"/>
+          </a:effectRef>
+          <a:fontRef idx="minor">
+            <a:schemeClr val="tx1"/>
+          </a:fontRef>
+        </p:style>
+        <p:txBody>
+          <a:bodyPr rtlCol="0" anchor="ctr"/>
+          <a:lstStyle/>
+          <a:p>
+            <a:pPr algn="ctr"/>
+            <a:endParaRPr lang="en-IN"/>
+          </a:p>
+        </p:txBody>
+      </p:sp>
+      <p:sp>
+        <p:nvSpPr>
+          <p:cNvPr id="6" name="TextBox 5">
+            <a:extLst>
+              <a:ext uri="{FF2B5EF4-FFF2-40B4-BE49-F238E27FC236}">
+                <a16:creationId xmlns:a16="http://schemas.microsoft.com/office/drawing/2014/main" id="{AD5BD8A5-CD2F-B4D1-42C9-9C14743F63A3}"/>
+              </a:ext>
+            </a:extLst>
+          </p:cNvPr>
+          <p:cNvSpPr txBox="1"/>
+          <p:nvPr/>
+        </p:nvSpPr>
+        <p:spPr>
+          <a:xfrm>
+            <a:off x="8982885" y="1978988"/>
+            <a:ext cx="2052550" cy="1077218"/>
+          </a:xfrm>
+          <a:prstGeom prst="rect">
+            <a:avLst/>
+          </a:prstGeom>
+          <a:noFill/>
+        </p:spPr>
+        <p:txBody>
+          <a:bodyPr wrap="none" rtlCol="0">
+            <a:spAutoFit/>
+          </a:bodyPr>
+          <a:lstStyle/>
+          <a:p>
+            <a:r>
+              <a:rPr lang="en-IN" sz="6400" dirty="0">
+                <a:latin typeface="+mj-lt"/>
+              </a:rPr>
+              <a:t>*</a:t>
+            </a:r>
+            <a:r>
+              <a:rPr lang="en-IN" sz="6400" dirty="0" err="1">
+                <a:latin typeface="+mj-lt"/>
+              </a:rPr>
+              <a:t>args</a:t>
+            </a:r>
+            <a:endParaRPr lang="en-IN" sz="6400" dirty="0">
+              <a:latin typeface="+mj-lt"/>
+            </a:endParaRPr>
+          </a:p>
+        </p:txBody>
+      </p:sp>
+      <p:sp>
+        <p:nvSpPr>
+          <p:cNvPr id="5" name="Content Placeholder 2">
+            <a:extLst>
+              <a:ext uri="{FF2B5EF4-FFF2-40B4-BE49-F238E27FC236}">
+                <a16:creationId xmlns:a16="http://schemas.microsoft.com/office/drawing/2014/main" id="{234FFE0E-5299-DE1C-D57F-9A9734AD3BFD}"/>
+              </a:ext>
+            </a:extLst>
+          </p:cNvPr>
+          <p:cNvSpPr txBox="1">
+            <a:spLocks/>
+          </p:cNvSpPr>
+          <p:nvPr/>
+        </p:nvSpPr>
+        <p:spPr>
+          <a:xfrm>
+            <a:off x="3571491" y="3224070"/>
+            <a:ext cx="9286380" cy="2900698"/>
+          </a:xfrm>
+          <a:prstGeom prst="rect">
+            <a:avLst/>
+          </a:prstGeom>
+        </p:spPr>
+        <p:txBody>
+          <a:bodyPr vert="horz" lIns="91440" tIns="45720" rIns="91440" bIns="45720" rtlCol="0" anchor="t">
+            <a:noAutofit/>
+          </a:bodyPr>
+          <a:lstStyle>
+            <a:lvl1pPr marL="342900" indent="-342900" algn="l" defTabSz="1371600" rtl="0" eaLnBrk="1" latinLnBrk="0" hangingPunct="1">
+              <a:lnSpc>
+                <a:spcPct val="90000"/>
+              </a:lnSpc>
+              <a:spcBef>
+                <a:spcPts val="1500"/>
+              </a:spcBef>
+              <a:buFont typeface="Arial" panose="020B0604020202020204" pitchFamily="34" charset="0"/>
+              <a:buChar char="•"/>
+              <a:defRPr sz="4200" b="0" i="0" kern="1200">
+                <a:solidFill>
+                  <a:schemeClr val="tx1"/>
+                </a:solidFill>
+                <a:latin typeface="+mn-lt"/>
+                <a:ea typeface="Noto Sans" panose="020B0502040504020204" pitchFamily="34" charset="0"/>
+                <a:cs typeface="Noto Sans" panose="020B0502040504020204" pitchFamily="34" charset="0"/>
+              </a:defRPr>
+            </a:lvl1pPr>
+            <a:lvl2pPr marL="1028700" indent="-342900" algn="l" defTabSz="1371600" rtl="0" eaLnBrk="1" latinLnBrk="0" hangingPunct="1">
+              <a:lnSpc>
+                <a:spcPct val="90000"/>
+              </a:lnSpc>
+              <a:spcBef>
+                <a:spcPts val="750"/>
+              </a:spcBef>
+              <a:buFont typeface="Arial" panose="020B0604020202020204" pitchFamily="34" charset="0"/>
+              <a:buChar char="•"/>
+              <a:defRPr sz="3600" b="0" i="0" kern="1200">
+                <a:solidFill>
+                  <a:schemeClr val="tx1"/>
+                </a:solidFill>
+                <a:latin typeface="+mn-lt"/>
+                <a:ea typeface="Noto Sans" panose="020B0502040504020204" pitchFamily="34" charset="0"/>
+                <a:cs typeface="Noto Sans" panose="020B0502040504020204" pitchFamily="34" charset="0"/>
+              </a:defRPr>
+            </a:lvl2pPr>
+            <a:lvl3pPr marL="1714500" indent="-342900" algn="l" defTabSz="1371600" rtl="0" eaLnBrk="1" latinLnBrk="0" hangingPunct="1">
+              <a:lnSpc>
+                <a:spcPct val="90000"/>
+              </a:lnSpc>
+              <a:spcBef>
+                <a:spcPts val="750"/>
+              </a:spcBef>
+              <a:buFont typeface="Arial" panose="020B0604020202020204" pitchFamily="34" charset="0"/>
+              <a:buChar char="•"/>
+              <a:defRPr sz="3000" b="0" i="0" kern="1200">
+                <a:solidFill>
+                  <a:schemeClr val="tx1"/>
+                </a:solidFill>
+                <a:latin typeface="+mn-lt"/>
+                <a:ea typeface="Noto Sans" panose="020B0502040504020204" pitchFamily="34" charset="0"/>
+                <a:cs typeface="Noto Sans" panose="020B0502040504020204" pitchFamily="34" charset="0"/>
+              </a:defRPr>
+            </a:lvl3pPr>
+            <a:lvl4pPr marL="2400300" indent="-342900" algn="l" defTabSz="1371600" rtl="0" eaLnBrk="1" latinLnBrk="0" hangingPunct="1">
+              <a:lnSpc>
+                <a:spcPct val="90000"/>
+              </a:lnSpc>
+              <a:spcBef>
+                <a:spcPts val="750"/>
+              </a:spcBef>
+              <a:buFont typeface="Arial" panose="020B0604020202020204" pitchFamily="34" charset="0"/>
+              <a:buChar char="•"/>
+              <a:defRPr sz="2700" b="0" i="0" kern="1200">
+                <a:solidFill>
+                  <a:schemeClr val="tx1"/>
+                </a:solidFill>
+                <a:latin typeface="+mn-lt"/>
+                <a:ea typeface="Noto Sans" panose="020B0502040504020204" pitchFamily="34" charset="0"/>
+                <a:cs typeface="Noto Sans" panose="020B0502040504020204" pitchFamily="34" charset="0"/>
+              </a:defRPr>
+            </a:lvl4pPr>
+            <a:lvl5pPr marL="3086100" indent="-342900" algn="l" defTabSz="1371600" rtl="0" eaLnBrk="1" latinLnBrk="0" hangingPunct="1">
+              <a:lnSpc>
+                <a:spcPct val="90000"/>
+              </a:lnSpc>
+              <a:spcBef>
+                <a:spcPts val="750"/>
+              </a:spcBef>
+              <a:buFont typeface="Arial" panose="020B0604020202020204" pitchFamily="34" charset="0"/>
+              <a:buChar char="•"/>
+              <a:defRPr sz="2700" b="0" i="0" kern="1200">
+                <a:solidFill>
+                  <a:schemeClr val="tx1"/>
+                </a:solidFill>
+                <a:latin typeface="+mn-lt"/>
+                <a:ea typeface="Noto Sans" panose="020B0502040504020204" pitchFamily="34" charset="0"/>
+                <a:cs typeface="Noto Sans" panose="020B0502040504020204" pitchFamily="34" charset="0"/>
+              </a:defRPr>
+            </a:lvl5pPr>
+            <a:lvl6pPr marL="3771900" indent="-342900" algn="l" defTabSz="1371600" rtl="0" eaLnBrk="1" latinLnBrk="0" hangingPunct="1">
+              <a:lnSpc>
+                <a:spcPct val="90000"/>
+              </a:lnSpc>
+              <a:spcBef>
+                <a:spcPts val="750"/>
+              </a:spcBef>
+              <a:buFont typeface="Arial" panose="020B0604020202020204" pitchFamily="34" charset="0"/>
+              <a:buChar char="•"/>
+              <a:defRPr sz="2700" kern="1200">
+                <a:solidFill>
+                  <a:schemeClr val="tx1"/>
+                </a:solidFill>
+                <a:latin typeface="+mn-lt"/>
+                <a:ea typeface="+mn-ea"/>
+                <a:cs typeface="+mn-cs"/>
+              </a:defRPr>
+            </a:lvl6pPr>
+            <a:lvl7pPr marL="4457700" indent="-342900" algn="l" defTabSz="1371600" rtl="0" eaLnBrk="1" latinLnBrk="0" hangingPunct="1">
+              <a:lnSpc>
+                <a:spcPct val="90000"/>
+              </a:lnSpc>
+              <a:spcBef>
+                <a:spcPts val="750"/>
+              </a:spcBef>
+              <a:buFont typeface="Arial" panose="020B0604020202020204" pitchFamily="34" charset="0"/>
+              <a:buChar char="•"/>
+              <a:defRPr sz="2700" kern="1200">
+                <a:solidFill>
+                  <a:schemeClr val="tx1"/>
+                </a:solidFill>
+                <a:latin typeface="+mn-lt"/>
+                <a:ea typeface="+mn-ea"/>
+                <a:cs typeface="+mn-cs"/>
+              </a:defRPr>
+            </a:lvl7pPr>
+            <a:lvl8pPr marL="5143500" indent="-342900" algn="l" defTabSz="1371600" rtl="0" eaLnBrk="1" latinLnBrk="0" hangingPunct="1">
+              <a:lnSpc>
+                <a:spcPct val="90000"/>
+              </a:lnSpc>
+              <a:spcBef>
+                <a:spcPts val="750"/>
+              </a:spcBef>
+              <a:buFont typeface="Arial" panose="020B0604020202020204" pitchFamily="34" charset="0"/>
+              <a:buChar char="•"/>
+              <a:defRPr sz="2700" kern="1200">
+                <a:solidFill>
+                  <a:schemeClr val="tx1"/>
+                </a:solidFill>
+                <a:latin typeface="+mn-lt"/>
+                <a:ea typeface="+mn-ea"/>
+                <a:cs typeface="+mn-cs"/>
+              </a:defRPr>
+            </a:lvl8pPr>
+            <a:lvl9pPr marL="5829300" indent="-342900" algn="l" defTabSz="1371600" rtl="0" eaLnBrk="1" latinLnBrk="0" hangingPunct="1">
+              <a:lnSpc>
+                <a:spcPct val="90000"/>
+              </a:lnSpc>
+              <a:spcBef>
+                <a:spcPts val="750"/>
+              </a:spcBef>
+              <a:buFont typeface="Arial" panose="020B0604020202020204" pitchFamily="34" charset="0"/>
+              <a:buChar char="•"/>
+              <a:defRPr sz="2700" kern="1200">
+                <a:solidFill>
+                  <a:schemeClr val="tx1"/>
+                </a:solidFill>
+                <a:latin typeface="+mn-lt"/>
+                <a:ea typeface="+mn-ea"/>
+                <a:cs typeface="+mn-cs"/>
+              </a:defRPr>
+            </a:lvl9pPr>
+          </a:lstStyle>
+          <a:p>
+            <a:pPr marL="0" indent="0">
+              <a:buFont typeface="Arial" panose="020B0604020202020204" pitchFamily="34" charset="0"/>
+              <a:buNone/>
+            </a:pPr>
+            <a:endParaRPr lang="en-IN" sz="6400" dirty="0">
+              <a:solidFill>
+                <a:schemeClr val="accent5"/>
+              </a:solidFill>
+            </a:endParaRPr>
+          </a:p>
+          <a:p>
+            <a:pPr marL="0" indent="0">
+              <a:buFont typeface="Arial" panose="020B0604020202020204" pitchFamily="34" charset="0"/>
+              <a:buNone/>
+            </a:pPr>
+            <a:endParaRPr lang="en-IN" sz="6400" dirty="0">
+              <a:solidFill>
+                <a:schemeClr val="accent5"/>
+              </a:solidFill>
+            </a:endParaRPr>
+          </a:p>
+          <a:p>
+            <a:pPr marL="0" indent="0">
+              <a:buFont typeface="Arial" panose="020B0604020202020204" pitchFamily="34" charset="0"/>
+              <a:buNone/>
+            </a:pPr>
+            <a:r>
+              <a:rPr lang="en-IN" sz="6400" dirty="0" err="1">
+                <a:solidFill>
+                  <a:schemeClr val="accent5">
+                    <a:lumMod val="60000"/>
+                    <a:lumOff val="40000"/>
+                  </a:schemeClr>
+                </a:solidFill>
+              </a:rPr>
+              <a:t>sep</a:t>
+            </a:r>
+            <a:r>
+              <a:rPr lang="en-IN" sz="6400" dirty="0">
+                <a:solidFill>
+                  <a:schemeClr val="accent3"/>
+                </a:solidFill>
+              </a:rPr>
+              <a:t>=</a:t>
+            </a:r>
+            <a:r>
+              <a:rPr lang="en-IN" sz="6400" dirty="0"/>
+              <a:t>‘ ’,</a:t>
+            </a:r>
+            <a:r>
+              <a:rPr lang="en-IN" sz="6400" dirty="0">
+                <a:solidFill>
+                  <a:schemeClr val="accent3"/>
+                </a:solidFill>
+              </a:rPr>
+              <a:t> </a:t>
+            </a:r>
+            <a:r>
+              <a:rPr lang="en-IN" sz="6400" dirty="0">
+                <a:solidFill>
+                  <a:schemeClr val="accent5">
+                    <a:lumMod val="60000"/>
+                    <a:lumOff val="40000"/>
+                  </a:schemeClr>
+                </a:solidFill>
+              </a:rPr>
+              <a:t>end</a:t>
+            </a:r>
+            <a:r>
+              <a:rPr lang="en-IN" sz="6400" dirty="0">
+                <a:solidFill>
+                  <a:schemeClr val="accent3"/>
+                </a:solidFill>
+              </a:rPr>
+              <a:t>= </a:t>
+            </a:r>
+            <a:r>
+              <a:rPr lang="en-IN" sz="6400" dirty="0"/>
+              <a:t>‘\n’, </a:t>
+            </a:r>
+          </a:p>
+          <a:p>
+            <a:pPr marL="0" indent="0">
+              <a:buFont typeface="Arial" panose="020B0604020202020204" pitchFamily="34" charset="0"/>
+              <a:buNone/>
+            </a:pPr>
+            <a:r>
+              <a:rPr lang="en-IN" sz="6400" dirty="0">
+                <a:solidFill>
+                  <a:schemeClr val="accent5">
+                    <a:lumMod val="60000"/>
+                    <a:lumOff val="40000"/>
+                  </a:schemeClr>
+                </a:solidFill>
+              </a:rPr>
+              <a:t>file</a:t>
+            </a:r>
+            <a:r>
+              <a:rPr lang="en-IN" sz="6400" dirty="0">
+                <a:solidFill>
+                  <a:schemeClr val="accent3"/>
+                </a:solidFill>
+              </a:rPr>
+              <a:t>=None, </a:t>
+            </a:r>
+            <a:r>
+              <a:rPr lang="en-IN" sz="6400" dirty="0">
+                <a:solidFill>
+                  <a:schemeClr val="accent5">
+                    <a:lumMod val="60000"/>
+                    <a:lumOff val="40000"/>
+                  </a:schemeClr>
+                </a:solidFill>
+              </a:rPr>
+              <a:t>flush</a:t>
+            </a:r>
+            <a:r>
+              <a:rPr lang="en-IN" sz="6400" dirty="0">
+                <a:solidFill>
+                  <a:schemeClr val="accent3"/>
+                </a:solidFill>
+              </a:rPr>
+              <a:t>=False</a:t>
+            </a:r>
+            <a:r>
+              <a:rPr lang="en-IN" sz="6400" dirty="0"/>
+              <a:t>)</a:t>
+            </a:r>
+          </a:p>
+        </p:txBody>
+      </p:sp>
+    </p:spTree>
+    <p:extLst>
+      <p:ext uri="{BB962C8B-B14F-4D97-AF65-F5344CB8AC3E}">
+        <p14:creationId xmlns:p14="http://schemas.microsoft.com/office/powerpoint/2010/main" val="2845302678"/>
+      </p:ext>
+    </p:extLst>
+  </p:cSld>
+  <p:clrMapOvr>
+    <a:masterClrMapping/>
+  </p:clrMapOvr>
+  <mc:AlternateContent xmlns:mc="http://schemas.openxmlformats.org/markup-compatibility/2006" xmlns:p159="http://schemas.microsoft.com/office/powerpoint/2015/09/main">
+    <mc:Choice Requires="p159">
+      <p:transition xmlns:p14="http://schemas.microsoft.com/office/powerpoint/2010/main" spd="slow" p14:dur="2000">
+        <p159:morph option="byObject"/>
+      </p:transition>
+    </mc:Choice>
+    <mc:Fallback xmlns="">
+      <p:transition spd="slow">
+        <p:fade/>
+      </p:transition>
+    </mc:Fallback>
+  </mc:AlternateContent>
+</p:sld>
+</file>
+
+<file path=ppt/slides/slide11.xml><?xml version="1.0" encoding="utf-8"?>
+<p:sld xmlns:a="http://schemas.openxmlformats.org/drawingml/2006/main" xmlns:r="http://schemas.openxmlformats.org/officeDocument/2006/relationships" xmlns:p="http://schemas.openxmlformats.org/presentationml/2006/main">
+  <p:cSld>
+    <p:spTree>
+      <p:nvGrpSpPr>
+        <p:cNvPr id="1" name=""/>
+        <p:cNvGrpSpPr/>
+        <p:nvPr/>
+      </p:nvGrpSpPr>
+      <p:grpSpPr>
+        <a:xfrm>
+          <a:off x="0" y="0"/>
+          <a:ext cx="0" cy="0"/>
+          <a:chOff x="0" y="0"/>
+          <a:chExt cx="0" cy="0"/>
+        </a:xfrm>
+      </p:grpSpPr>
+      <p:sp>
+        <p:nvSpPr>
+          <p:cNvPr id="2" name="Title 1">
+            <a:extLst>
+              <a:ext uri="{FF2B5EF4-FFF2-40B4-BE49-F238E27FC236}">
+                <a16:creationId xmlns:a16="http://schemas.microsoft.com/office/drawing/2014/main" id="{623C98FB-8251-BEF8-2145-65A867794268}"/>
+              </a:ext>
+            </a:extLst>
+          </p:cNvPr>
+          <p:cNvSpPr>
+            <a:spLocks noGrp="1"/>
+          </p:cNvSpPr>
+          <p:nvPr>
+            <p:ph type="title"/>
+          </p:nvPr>
+        </p:nvSpPr>
+        <p:spPr/>
+        <p:txBody>
+          <a:bodyPr>
+            <a:normAutofit fontScale="90000"/>
+          </a:bodyPr>
+          <a:lstStyle/>
+          <a:p>
+            <a:r>
+              <a:rPr lang="en-IN" sz="7300" dirty="0">
+                <a:solidFill>
+                  <a:srgbClr val="0009C4"/>
+                </a:solidFill>
+              </a:rPr>
+              <a:t>print – Unicode Escape Sequence </a:t>
+            </a:r>
+            <a:br>
+              <a:rPr lang="en-IN" dirty="0">
+                <a:solidFill>
+                  <a:srgbClr val="0009C4"/>
+                </a:solidFill>
+              </a:rPr>
+            </a:br>
+            <a:r>
+              <a:rPr lang="en-IN" sz="3600" dirty="0">
+                <a:solidFill>
+                  <a:schemeClr val="tx1"/>
+                </a:solidFill>
+              </a:rPr>
+              <a:t>(Emoji &amp; Special Symbol Printing)</a:t>
+            </a:r>
+          </a:p>
+        </p:txBody>
+      </p:sp>
+      <p:sp>
+        <p:nvSpPr>
+          <p:cNvPr id="3" name="Content Placeholder 2">
+            <a:extLst>
+              <a:ext uri="{FF2B5EF4-FFF2-40B4-BE49-F238E27FC236}">
+                <a16:creationId xmlns:a16="http://schemas.microsoft.com/office/drawing/2014/main" id="{49191764-3E97-A9C9-3313-2A6E834DE32E}"/>
+              </a:ext>
+            </a:extLst>
+          </p:cNvPr>
+          <p:cNvSpPr>
+            <a:spLocks noGrp="1"/>
+          </p:cNvSpPr>
+          <p:nvPr>
+            <p:ph idx="1"/>
+          </p:nvPr>
+        </p:nvSpPr>
+        <p:spPr/>
+        <p:txBody>
+          <a:bodyPr>
+            <a:normAutofit/>
+          </a:bodyPr>
+          <a:lstStyle/>
+          <a:p>
+            <a:r>
+              <a:rPr lang="en-IN" dirty="0">
+                <a:solidFill>
+                  <a:schemeClr val="tx1"/>
+                </a:solidFill>
+              </a:rPr>
+              <a:t>Allows you to represent special characters using their UNICODE code points</a:t>
+            </a:r>
+          </a:p>
+          <a:p>
+            <a:r>
+              <a:rPr lang="en-IN" dirty="0">
+                <a:solidFill>
+                  <a:schemeClr val="tx1"/>
+                </a:solidFill>
+              </a:rPr>
+              <a:t>Escape characters </a:t>
+            </a:r>
+            <a:r>
+              <a:rPr lang="en-IN" dirty="0">
+                <a:solidFill>
+                  <a:srgbClr val="0009C4"/>
+                </a:solidFill>
+                <a:sym typeface="Wingdings" panose="05000000000000000000" pitchFamily="2" charset="2"/>
+              </a:rPr>
+              <a:t></a:t>
+            </a:r>
+            <a:r>
+              <a:rPr lang="en-IN" dirty="0">
+                <a:solidFill>
+                  <a:srgbClr val="0009C4"/>
+                </a:solidFill>
+              </a:rPr>
+              <a:t> \u, \U, \N</a:t>
+            </a:r>
+          </a:p>
+          <a:p>
+            <a:endParaRPr lang="en-IN" dirty="0">
+              <a:solidFill>
+                <a:srgbClr val="0009C4"/>
+              </a:solidFill>
+            </a:endParaRPr>
+          </a:p>
+          <a:p>
+            <a:endParaRPr lang="en-IN" dirty="0">
+              <a:solidFill>
+                <a:srgbClr val="0009C4"/>
+              </a:solidFill>
+            </a:endParaRPr>
+          </a:p>
+          <a:p>
+            <a:endParaRPr lang="en-IN" dirty="0">
+              <a:solidFill>
+                <a:srgbClr val="0009C4"/>
+              </a:solidFill>
+            </a:endParaRPr>
+          </a:p>
+          <a:p>
+            <a:endParaRPr lang="en-IN" dirty="0">
+              <a:solidFill>
+                <a:srgbClr val="0009C4"/>
+              </a:solidFill>
+            </a:endParaRPr>
+          </a:p>
+          <a:p>
+            <a:endParaRPr lang="en-IN" dirty="0">
+              <a:solidFill>
+                <a:srgbClr val="0009C4"/>
+              </a:solidFill>
+            </a:endParaRPr>
+          </a:p>
+          <a:p>
+            <a:pPr marL="0" indent="0">
+              <a:buNone/>
+            </a:pPr>
+            <a:endParaRPr lang="en-IN" sz="2800" dirty="0">
+              <a:solidFill>
+                <a:srgbClr val="0009C4"/>
+              </a:solidFill>
+            </a:endParaRPr>
+          </a:p>
+          <a:p>
+            <a:pPr marL="0" indent="0">
+              <a:buNone/>
+            </a:pPr>
+            <a:r>
+              <a:rPr lang="en-IN" sz="2800" dirty="0">
+                <a:solidFill>
+                  <a:schemeClr val="tx1"/>
+                </a:solidFill>
+              </a:rPr>
+              <a:t>Reference</a:t>
+            </a:r>
+            <a:r>
+              <a:rPr lang="en-IN" sz="2800" dirty="0">
+                <a:solidFill>
+                  <a:srgbClr val="0009C4"/>
+                </a:solidFill>
+              </a:rPr>
+              <a:t>: https://unicode.org/emoji/charts/full-emoji-list.html</a:t>
+            </a:r>
+          </a:p>
+        </p:txBody>
+      </p:sp>
+      <p:graphicFrame>
+        <p:nvGraphicFramePr>
+          <p:cNvPr id="7" name="Table 6">
+            <a:extLst>
+              <a:ext uri="{FF2B5EF4-FFF2-40B4-BE49-F238E27FC236}">
+                <a16:creationId xmlns:a16="http://schemas.microsoft.com/office/drawing/2014/main" id="{B9118664-25CE-B0CA-F55F-504A9D0A7388}"/>
+              </a:ext>
+            </a:extLst>
+          </p:cNvPr>
+          <p:cNvGraphicFramePr>
+            <a:graphicFrameLocks noGrp="1"/>
+          </p:cNvGraphicFramePr>
+          <p:nvPr>
+            <p:extLst>
+              <p:ext uri="{D42A27DB-BD31-4B8C-83A1-F6EECF244321}">
+                <p14:modId xmlns:p14="http://schemas.microsoft.com/office/powerpoint/2010/main" val="2297633985"/>
+              </p:ext>
+            </p:extLst>
+          </p:nvPr>
+        </p:nvGraphicFramePr>
+        <p:xfrm>
+          <a:off x="1257300" y="5247958"/>
+          <a:ext cx="16090519" cy="2316480"/>
+        </p:xfrm>
+        <a:graphic>
+          <a:graphicData uri="http://schemas.openxmlformats.org/drawingml/2006/table">
+            <a:tbl>
+              <a:tblPr>
+                <a:tableStyleId>{5940675A-B579-460E-94D1-54222C63F5DA}</a:tableStyleId>
+              </a:tblPr>
+              <a:tblGrid>
+                <a:gridCol w="3943350">
+                  <a:extLst>
+                    <a:ext uri="{9D8B030D-6E8A-4147-A177-3AD203B41FA5}">
+                      <a16:colId xmlns:a16="http://schemas.microsoft.com/office/drawing/2014/main" val="4275626049"/>
+                    </a:ext>
+                  </a:extLst>
+                </a:gridCol>
+                <a:gridCol w="3439414">
+                  <a:extLst>
+                    <a:ext uri="{9D8B030D-6E8A-4147-A177-3AD203B41FA5}">
+                      <a16:colId xmlns:a16="http://schemas.microsoft.com/office/drawing/2014/main" val="2811429537"/>
+                    </a:ext>
+                  </a:extLst>
+                </a:gridCol>
+                <a:gridCol w="4764405">
+                  <a:extLst>
+                    <a:ext uri="{9D8B030D-6E8A-4147-A177-3AD203B41FA5}">
+                      <a16:colId xmlns:a16="http://schemas.microsoft.com/office/drawing/2014/main" val="11557222"/>
+                    </a:ext>
+                  </a:extLst>
+                </a:gridCol>
+                <a:gridCol w="3943350">
+                  <a:extLst>
+                    <a:ext uri="{9D8B030D-6E8A-4147-A177-3AD203B41FA5}">
+                      <a16:colId xmlns:a16="http://schemas.microsoft.com/office/drawing/2014/main" val="3407812607"/>
+                    </a:ext>
+                  </a:extLst>
+                </a:gridCol>
+              </a:tblGrid>
+              <a:tr h="0">
+                <a:tc>
+                  <a:txBody>
+                    <a:bodyPr/>
+                    <a:lstStyle/>
+                    <a:p>
+                      <a:pPr algn="ctr"/>
+                      <a:r>
+                        <a:rPr lang="en-IN" sz="3200" b="1">
+                          <a:solidFill>
+                            <a:schemeClr val="tx1"/>
+                          </a:solidFill>
+                        </a:rPr>
+                        <a:t>Escape Sequence</a:t>
+                      </a:r>
+                    </a:p>
+                  </a:txBody>
+                  <a:tcPr anchor="ctr">
+                    <a:lnL w="12700" cap="flat" cmpd="sng" algn="ctr">
+                      <a:solidFill>
+                        <a:schemeClr val="bg1">
+                          <a:lumMod val="50000"/>
+                        </a:schemeClr>
+                      </a:solidFill>
+                      <a:prstDash val="solid"/>
+                      <a:round/>
+                      <a:headEnd type="none" w="med" len="med"/>
+                      <a:tailEnd type="none" w="med" len="med"/>
+                    </a:lnL>
+                    <a:lnR w="12700" cap="flat" cmpd="sng" algn="ctr">
+                      <a:solidFill>
+                        <a:schemeClr val="bg1">
+                          <a:lumMod val="50000"/>
+                        </a:schemeClr>
+                      </a:solidFill>
+                      <a:prstDash val="solid"/>
+                      <a:round/>
+                      <a:headEnd type="none" w="med" len="med"/>
+                      <a:tailEnd type="none" w="med" len="med"/>
+                    </a:lnR>
+                    <a:lnT w="12700" cap="flat" cmpd="sng" algn="ctr">
+                      <a:solidFill>
+                        <a:schemeClr val="bg1">
+                          <a:lumMod val="50000"/>
+                        </a:schemeClr>
+                      </a:solidFill>
+                      <a:prstDash val="solid"/>
+                      <a:round/>
+                      <a:headEnd type="none" w="med" len="med"/>
+                      <a:tailEnd type="none" w="med" len="med"/>
+                    </a:lnT>
+                    <a:lnB w="12700" cap="flat" cmpd="sng" algn="ctr">
+                      <a:solidFill>
+                        <a:schemeClr val="bg1">
+                          <a:lumMod val="50000"/>
+                        </a:schemeClr>
+                      </a:solidFill>
+                      <a:prstDash val="solid"/>
+                      <a:round/>
+                      <a:headEnd type="none" w="med" len="med"/>
+                      <a:tailEnd type="none" w="med" len="med"/>
+                    </a:lnB>
+                    <a:solidFill>
+                      <a:srgbClr val="00FFFF"/>
+                    </a:solidFill>
+                  </a:tcPr>
+                </a:tc>
+                <a:tc>
+                  <a:txBody>
+                    <a:bodyPr/>
+                    <a:lstStyle/>
+                    <a:p>
+                      <a:pPr algn="ctr"/>
+                      <a:r>
+                        <a:rPr lang="en-IN" sz="3200" b="1">
+                          <a:solidFill>
+                            <a:schemeClr val="tx1"/>
+                          </a:solidFill>
+                        </a:rPr>
+                        <a:t>Description</a:t>
+                      </a:r>
+                    </a:p>
+                  </a:txBody>
+                  <a:tcPr anchor="ctr">
+                    <a:lnL w="12700" cap="flat" cmpd="sng" algn="ctr">
+                      <a:solidFill>
+                        <a:schemeClr val="bg1">
+                          <a:lumMod val="50000"/>
+                        </a:schemeClr>
+                      </a:solidFill>
+                      <a:prstDash val="solid"/>
+                      <a:round/>
+                      <a:headEnd type="none" w="med" len="med"/>
+                      <a:tailEnd type="none" w="med" len="med"/>
+                    </a:lnL>
+                    <a:lnR w="12700" cap="flat" cmpd="sng" algn="ctr">
+                      <a:solidFill>
+                        <a:schemeClr val="bg1">
+                          <a:lumMod val="50000"/>
+                        </a:schemeClr>
+                      </a:solidFill>
+                      <a:prstDash val="solid"/>
+                      <a:round/>
+                      <a:headEnd type="none" w="med" len="med"/>
+                      <a:tailEnd type="none" w="med" len="med"/>
+                    </a:lnR>
+                    <a:lnT w="12700" cap="flat" cmpd="sng" algn="ctr">
+                      <a:solidFill>
+                        <a:schemeClr val="bg1">
+                          <a:lumMod val="50000"/>
+                        </a:schemeClr>
+                      </a:solidFill>
+                      <a:prstDash val="solid"/>
+                      <a:round/>
+                      <a:headEnd type="none" w="med" len="med"/>
+                      <a:tailEnd type="none" w="med" len="med"/>
+                    </a:lnT>
+                    <a:lnB w="12700" cap="flat" cmpd="sng" algn="ctr">
+                      <a:solidFill>
+                        <a:schemeClr val="bg1">
+                          <a:lumMod val="50000"/>
+                        </a:schemeClr>
+                      </a:solidFill>
+                      <a:prstDash val="solid"/>
+                      <a:round/>
+                      <a:headEnd type="none" w="med" len="med"/>
+                      <a:tailEnd type="none" w="med" len="med"/>
+                    </a:lnB>
+                    <a:solidFill>
+                      <a:srgbClr val="00FFFF"/>
+                    </a:solidFill>
+                  </a:tcPr>
+                </a:tc>
+                <a:tc>
+                  <a:txBody>
+                    <a:bodyPr/>
+                    <a:lstStyle/>
+                    <a:p>
+                      <a:pPr algn="ctr"/>
+                      <a:r>
+                        <a:rPr lang="en-IN" sz="3200" b="1" dirty="0">
+                          <a:solidFill>
+                            <a:schemeClr val="tx1"/>
+                          </a:solidFill>
+                        </a:rPr>
+                        <a:t>Example</a:t>
+                      </a:r>
+                    </a:p>
+                  </a:txBody>
+                  <a:tcPr anchor="ctr">
+                    <a:lnL w="12700" cap="flat" cmpd="sng" algn="ctr">
+                      <a:solidFill>
+                        <a:schemeClr val="bg1">
+                          <a:lumMod val="50000"/>
+                        </a:schemeClr>
+                      </a:solidFill>
+                      <a:prstDash val="solid"/>
+                      <a:round/>
+                      <a:headEnd type="none" w="med" len="med"/>
+                      <a:tailEnd type="none" w="med" len="med"/>
+                    </a:lnL>
+                    <a:lnR w="12700" cap="flat" cmpd="sng" algn="ctr">
+                      <a:solidFill>
+                        <a:schemeClr val="bg1">
+                          <a:lumMod val="50000"/>
+                        </a:schemeClr>
+                      </a:solidFill>
+                      <a:prstDash val="solid"/>
+                      <a:round/>
+                      <a:headEnd type="none" w="med" len="med"/>
+                      <a:tailEnd type="none" w="med" len="med"/>
+                    </a:lnR>
+                    <a:lnT w="12700" cap="flat" cmpd="sng" algn="ctr">
+                      <a:solidFill>
+                        <a:schemeClr val="bg1">
+                          <a:lumMod val="50000"/>
+                        </a:schemeClr>
+                      </a:solidFill>
+                      <a:prstDash val="solid"/>
+                      <a:round/>
+                      <a:headEnd type="none" w="med" len="med"/>
+                      <a:tailEnd type="none" w="med" len="med"/>
+                    </a:lnT>
+                    <a:lnB w="12700" cap="flat" cmpd="sng" algn="ctr">
+                      <a:solidFill>
+                        <a:schemeClr val="bg1">
+                          <a:lumMod val="50000"/>
+                        </a:schemeClr>
+                      </a:solidFill>
+                      <a:prstDash val="solid"/>
+                      <a:round/>
+                      <a:headEnd type="none" w="med" len="med"/>
+                      <a:tailEnd type="none" w="med" len="med"/>
+                    </a:lnB>
+                    <a:solidFill>
+                      <a:srgbClr val="00FFFF"/>
+                    </a:solidFill>
+                  </a:tcPr>
+                </a:tc>
+                <a:tc>
+                  <a:txBody>
+                    <a:bodyPr/>
+                    <a:lstStyle/>
+                    <a:p>
+                      <a:pPr algn="ctr"/>
+                      <a:r>
+                        <a:rPr lang="en-IN" sz="3200" b="1" dirty="0">
+                          <a:solidFill>
+                            <a:schemeClr val="tx1"/>
+                          </a:solidFill>
+                        </a:rPr>
+                        <a:t>Output</a:t>
+                      </a:r>
+                    </a:p>
+                  </a:txBody>
+                  <a:tcPr anchor="ctr">
+                    <a:lnL w="12700" cap="flat" cmpd="sng" algn="ctr">
+                      <a:solidFill>
+                        <a:schemeClr val="bg1">
+                          <a:lumMod val="50000"/>
+                        </a:schemeClr>
+                      </a:solidFill>
+                      <a:prstDash val="solid"/>
+                      <a:round/>
+                      <a:headEnd type="none" w="med" len="med"/>
+                      <a:tailEnd type="none" w="med" len="med"/>
+                    </a:lnL>
+                    <a:lnR w="12700" cap="flat" cmpd="sng" algn="ctr">
+                      <a:solidFill>
+                        <a:schemeClr val="bg1">
+                          <a:lumMod val="50000"/>
+                        </a:schemeClr>
+                      </a:solidFill>
+                      <a:prstDash val="solid"/>
+                      <a:round/>
+                      <a:headEnd type="none" w="med" len="med"/>
+                      <a:tailEnd type="none" w="med" len="med"/>
+                    </a:lnR>
+                    <a:lnT w="12700" cap="flat" cmpd="sng" algn="ctr">
+                      <a:solidFill>
+                        <a:schemeClr val="bg1">
+                          <a:lumMod val="50000"/>
+                        </a:schemeClr>
+                      </a:solidFill>
+                      <a:prstDash val="solid"/>
+                      <a:round/>
+                      <a:headEnd type="none" w="med" len="med"/>
+                      <a:tailEnd type="none" w="med" len="med"/>
+                    </a:lnT>
+                    <a:lnB w="12700" cap="flat" cmpd="sng" algn="ctr">
+                      <a:solidFill>
+                        <a:schemeClr val="bg1">
+                          <a:lumMod val="50000"/>
+                        </a:schemeClr>
+                      </a:solidFill>
+                      <a:prstDash val="solid"/>
+                      <a:round/>
+                      <a:headEnd type="none" w="med" len="med"/>
+                      <a:tailEnd type="none" w="med" len="med"/>
+                    </a:lnB>
+                    <a:solidFill>
+                      <a:srgbClr val="00FFFF"/>
+                    </a:solidFill>
+                  </a:tcPr>
+                </a:tc>
+                <a:extLst>
+                  <a:ext uri="{0D108BD9-81ED-4DB2-BD59-A6C34878D82A}">
+                    <a16:rowId xmlns:a16="http://schemas.microsoft.com/office/drawing/2014/main" val="13053074"/>
+                  </a:ext>
+                </a:extLst>
+              </a:tr>
+              <a:tr h="0">
+                <a:tc>
+                  <a:txBody>
+                    <a:bodyPr/>
+                    <a:lstStyle/>
+                    <a:p>
+                      <a:r>
+                        <a:rPr lang="en-IN" sz="3200" dirty="0">
+                          <a:solidFill>
+                            <a:schemeClr val="accent2"/>
+                          </a:solidFill>
+                        </a:rPr>
+                        <a:t>\</a:t>
+                      </a:r>
+                      <a:r>
+                        <a:rPr lang="en-IN" sz="3200" dirty="0" err="1">
+                          <a:solidFill>
+                            <a:schemeClr val="accent2"/>
+                          </a:solidFill>
+                        </a:rPr>
+                        <a:t>u</a:t>
+                      </a:r>
+                      <a:r>
+                        <a:rPr lang="en-IN" sz="3200" dirty="0" err="1"/>
+                        <a:t>XXXX</a:t>
+                      </a:r>
+                      <a:endParaRPr lang="en-IN" sz="3200" dirty="0"/>
+                    </a:p>
+                  </a:txBody>
+                  <a:tcPr anchor="ctr">
+                    <a:lnL w="12700" cap="flat" cmpd="sng" algn="ctr">
+                      <a:solidFill>
+                        <a:schemeClr val="bg1">
+                          <a:lumMod val="50000"/>
+                        </a:schemeClr>
+                      </a:solidFill>
+                      <a:prstDash val="solid"/>
+                      <a:round/>
+                      <a:headEnd type="none" w="med" len="med"/>
+                      <a:tailEnd type="none" w="med" len="med"/>
+                    </a:lnL>
+                    <a:lnR w="12700" cap="flat" cmpd="sng" algn="ctr">
+                      <a:solidFill>
+                        <a:schemeClr val="bg1">
+                          <a:lumMod val="50000"/>
+                        </a:schemeClr>
+                      </a:solidFill>
+                      <a:prstDash val="solid"/>
+                      <a:round/>
+                      <a:headEnd type="none" w="med" len="med"/>
+                      <a:tailEnd type="none" w="med" len="med"/>
+                    </a:lnR>
+                    <a:lnT w="12700" cap="flat" cmpd="sng" algn="ctr">
+                      <a:solidFill>
+                        <a:schemeClr val="bg1">
+                          <a:lumMod val="50000"/>
+                        </a:schemeClr>
+                      </a:solidFill>
+                      <a:prstDash val="solid"/>
+                      <a:round/>
+                      <a:headEnd type="none" w="med" len="med"/>
+                      <a:tailEnd type="none" w="med" len="med"/>
+                    </a:lnT>
+                    <a:lnB w="12700" cap="flat" cmpd="sng" algn="ctr">
+                      <a:solidFill>
+                        <a:schemeClr val="bg1">
+                          <a:lumMod val="50000"/>
+                        </a:schemeClr>
+                      </a:solidFill>
+                      <a:prstDash val="solid"/>
+                      <a:round/>
+                      <a:headEnd type="none" w="med" len="med"/>
+                      <a:tailEnd type="none" w="med" len="med"/>
+                    </a:lnB>
+                  </a:tcPr>
+                </a:tc>
+                <a:tc>
+                  <a:txBody>
+                    <a:bodyPr/>
+                    <a:lstStyle/>
+                    <a:p>
+                      <a:r>
+                        <a:rPr lang="en-IN" sz="3200"/>
+                        <a:t>4-digit Unicode</a:t>
+                      </a:r>
+                    </a:p>
+                  </a:txBody>
+                  <a:tcPr anchor="ctr">
+                    <a:lnL w="12700" cap="flat" cmpd="sng" algn="ctr">
+                      <a:solidFill>
+                        <a:schemeClr val="bg1">
+                          <a:lumMod val="50000"/>
+                        </a:schemeClr>
+                      </a:solidFill>
+                      <a:prstDash val="solid"/>
+                      <a:round/>
+                      <a:headEnd type="none" w="med" len="med"/>
+                      <a:tailEnd type="none" w="med" len="med"/>
+                    </a:lnL>
+                    <a:lnR w="12700" cap="flat" cmpd="sng" algn="ctr">
+                      <a:solidFill>
+                        <a:schemeClr val="bg1">
+                          <a:lumMod val="50000"/>
+                        </a:schemeClr>
+                      </a:solidFill>
+                      <a:prstDash val="solid"/>
+                      <a:round/>
+                      <a:headEnd type="none" w="med" len="med"/>
+                      <a:tailEnd type="none" w="med" len="med"/>
+                    </a:lnR>
+                    <a:lnT w="12700" cap="flat" cmpd="sng" algn="ctr">
+                      <a:solidFill>
+                        <a:schemeClr val="bg1">
+                          <a:lumMod val="50000"/>
+                        </a:schemeClr>
+                      </a:solidFill>
+                      <a:prstDash val="solid"/>
+                      <a:round/>
+                      <a:headEnd type="none" w="med" len="med"/>
+                      <a:tailEnd type="none" w="med" len="med"/>
+                    </a:lnT>
+                    <a:lnB w="12700" cap="flat" cmpd="sng" algn="ctr">
+                      <a:solidFill>
+                        <a:schemeClr val="bg1">
+                          <a:lumMod val="50000"/>
+                        </a:schemeClr>
+                      </a:solidFill>
+                      <a:prstDash val="solid"/>
+                      <a:round/>
+                      <a:headEnd type="none" w="med" len="med"/>
+                      <a:tailEnd type="none" w="med" len="med"/>
+                    </a:lnB>
+                  </a:tcPr>
+                </a:tc>
+                <a:tc>
+                  <a:txBody>
+                    <a:bodyPr/>
+                    <a:lstStyle/>
+                    <a:p>
+                      <a:r>
+                        <a:rPr lang="en-IN" sz="3200" dirty="0">
+                          <a:solidFill>
+                            <a:srgbClr val="0009C4"/>
+                          </a:solidFill>
+                        </a:rPr>
+                        <a:t>print</a:t>
+                      </a:r>
+                      <a:r>
+                        <a:rPr lang="en-IN" sz="3200" dirty="0"/>
+                        <a:t>(</a:t>
+                      </a:r>
+                      <a:r>
+                        <a:rPr lang="en-IN" sz="3200" dirty="0">
+                          <a:solidFill>
+                            <a:schemeClr val="accent6">
+                              <a:lumMod val="75000"/>
+                            </a:schemeClr>
+                          </a:solidFill>
+                        </a:rPr>
+                        <a:t>"\u2764"</a:t>
+                      </a:r>
+                      <a:r>
+                        <a:rPr lang="en-IN" sz="3200" dirty="0"/>
+                        <a:t>)</a:t>
+                      </a:r>
+                    </a:p>
+                  </a:txBody>
+                  <a:tcPr anchor="ctr">
+                    <a:lnL w="12700" cap="flat" cmpd="sng" algn="ctr">
+                      <a:solidFill>
+                        <a:schemeClr val="bg1">
+                          <a:lumMod val="50000"/>
+                        </a:schemeClr>
+                      </a:solidFill>
+                      <a:prstDash val="solid"/>
+                      <a:round/>
+                      <a:headEnd type="none" w="med" len="med"/>
+                      <a:tailEnd type="none" w="med" len="med"/>
+                    </a:lnL>
+                    <a:lnR w="12700" cap="flat" cmpd="sng" algn="ctr">
+                      <a:solidFill>
+                        <a:schemeClr val="bg1">
+                          <a:lumMod val="50000"/>
+                        </a:schemeClr>
+                      </a:solidFill>
+                      <a:prstDash val="solid"/>
+                      <a:round/>
+                      <a:headEnd type="none" w="med" len="med"/>
+                      <a:tailEnd type="none" w="med" len="med"/>
+                    </a:lnR>
+                    <a:lnT w="12700" cap="flat" cmpd="sng" algn="ctr">
+                      <a:solidFill>
+                        <a:schemeClr val="bg1">
+                          <a:lumMod val="50000"/>
+                        </a:schemeClr>
+                      </a:solidFill>
+                      <a:prstDash val="solid"/>
+                      <a:round/>
+                      <a:headEnd type="none" w="med" len="med"/>
+                      <a:tailEnd type="none" w="med" len="med"/>
+                    </a:lnT>
+                    <a:lnB w="12700" cap="flat" cmpd="sng" algn="ctr">
+                      <a:solidFill>
+                        <a:schemeClr val="bg1">
+                          <a:lumMod val="50000"/>
+                        </a:schemeClr>
+                      </a:solidFill>
+                      <a:prstDash val="solid"/>
+                      <a:round/>
+                      <a:headEnd type="none" w="med" len="med"/>
+                      <a:tailEnd type="none" w="med" len="med"/>
+                    </a:lnB>
+                  </a:tcPr>
+                </a:tc>
+                <a:tc>
+                  <a:txBody>
+                    <a:bodyPr/>
+                    <a:lstStyle/>
+                    <a:p>
+                      <a:r>
+                        <a:rPr lang="en-IN" sz="3200" dirty="0"/>
+                        <a:t>❤️</a:t>
+                      </a:r>
+                    </a:p>
+                  </a:txBody>
+                  <a:tcPr anchor="ctr">
+                    <a:lnL w="12700" cap="flat" cmpd="sng" algn="ctr">
+                      <a:solidFill>
+                        <a:schemeClr val="bg1">
+                          <a:lumMod val="50000"/>
+                        </a:schemeClr>
+                      </a:solidFill>
+                      <a:prstDash val="solid"/>
+                      <a:round/>
+                      <a:headEnd type="none" w="med" len="med"/>
+                      <a:tailEnd type="none" w="med" len="med"/>
+                    </a:lnL>
+                    <a:lnR w="12700" cap="flat" cmpd="sng" algn="ctr">
+                      <a:solidFill>
+                        <a:schemeClr val="bg1">
+                          <a:lumMod val="50000"/>
+                        </a:schemeClr>
+                      </a:solidFill>
+                      <a:prstDash val="solid"/>
+                      <a:round/>
+                      <a:headEnd type="none" w="med" len="med"/>
+                      <a:tailEnd type="none" w="med" len="med"/>
+                    </a:lnR>
+                    <a:lnT w="12700" cap="flat" cmpd="sng" algn="ctr">
+                      <a:solidFill>
+                        <a:schemeClr val="bg1">
+                          <a:lumMod val="50000"/>
+                        </a:schemeClr>
+                      </a:solidFill>
+                      <a:prstDash val="solid"/>
+                      <a:round/>
+                      <a:headEnd type="none" w="med" len="med"/>
+                      <a:tailEnd type="none" w="med" len="med"/>
+                    </a:lnT>
+                    <a:lnB w="12700" cap="flat" cmpd="sng" algn="ctr">
+                      <a:solidFill>
+                        <a:schemeClr val="bg1">
+                          <a:lumMod val="50000"/>
+                        </a:schemeClr>
+                      </a:solidFill>
+                      <a:prstDash val="solid"/>
+                      <a:round/>
+                      <a:headEnd type="none" w="med" len="med"/>
+                      <a:tailEnd type="none" w="med" len="med"/>
+                    </a:lnB>
+                  </a:tcPr>
+                </a:tc>
+                <a:extLst>
+                  <a:ext uri="{0D108BD9-81ED-4DB2-BD59-A6C34878D82A}">
+                    <a16:rowId xmlns:a16="http://schemas.microsoft.com/office/drawing/2014/main" val="3147530512"/>
+                  </a:ext>
+                </a:extLst>
+              </a:tr>
+              <a:tr h="0">
+                <a:tc>
+                  <a:txBody>
+                    <a:bodyPr/>
+                    <a:lstStyle/>
+                    <a:p>
+                      <a:r>
+                        <a:rPr lang="en-IN" sz="3200" dirty="0">
+                          <a:solidFill>
+                            <a:schemeClr val="accent2"/>
+                          </a:solidFill>
+                        </a:rPr>
+                        <a:t>\U</a:t>
+                      </a:r>
+                      <a:r>
+                        <a:rPr lang="en-IN" sz="3200" dirty="0"/>
+                        <a:t>XXXXXXXX</a:t>
+                      </a:r>
+                    </a:p>
+                  </a:txBody>
+                  <a:tcPr anchor="ctr">
+                    <a:lnL w="12700" cap="flat" cmpd="sng" algn="ctr">
+                      <a:solidFill>
+                        <a:schemeClr val="bg1">
+                          <a:lumMod val="50000"/>
+                        </a:schemeClr>
+                      </a:solidFill>
+                      <a:prstDash val="solid"/>
+                      <a:round/>
+                      <a:headEnd type="none" w="med" len="med"/>
+                      <a:tailEnd type="none" w="med" len="med"/>
+                    </a:lnL>
+                    <a:lnR w="12700" cap="flat" cmpd="sng" algn="ctr">
+                      <a:solidFill>
+                        <a:schemeClr val="bg1">
+                          <a:lumMod val="50000"/>
+                        </a:schemeClr>
+                      </a:solidFill>
+                      <a:prstDash val="solid"/>
+                      <a:round/>
+                      <a:headEnd type="none" w="med" len="med"/>
+                      <a:tailEnd type="none" w="med" len="med"/>
+                    </a:lnR>
+                    <a:lnT w="12700" cap="flat" cmpd="sng" algn="ctr">
+                      <a:solidFill>
+                        <a:schemeClr val="bg1">
+                          <a:lumMod val="50000"/>
+                        </a:schemeClr>
+                      </a:solidFill>
+                      <a:prstDash val="solid"/>
+                      <a:round/>
+                      <a:headEnd type="none" w="med" len="med"/>
+                      <a:tailEnd type="none" w="med" len="med"/>
+                    </a:lnT>
+                    <a:lnB w="12700" cap="flat" cmpd="sng" algn="ctr">
+                      <a:solidFill>
+                        <a:schemeClr val="bg1">
+                          <a:lumMod val="50000"/>
+                        </a:schemeClr>
+                      </a:solidFill>
+                      <a:prstDash val="solid"/>
+                      <a:round/>
+                      <a:headEnd type="none" w="med" len="med"/>
+                      <a:tailEnd type="none" w="med" len="med"/>
+                    </a:lnB>
+                  </a:tcPr>
+                </a:tc>
+                <a:tc>
+                  <a:txBody>
+                    <a:bodyPr/>
+                    <a:lstStyle/>
+                    <a:p>
+                      <a:r>
+                        <a:rPr lang="en-IN" sz="3200"/>
+                        <a:t>8-digit Unicode</a:t>
+                      </a:r>
+                    </a:p>
+                  </a:txBody>
+                  <a:tcPr anchor="ctr">
+                    <a:lnL w="12700" cap="flat" cmpd="sng" algn="ctr">
+                      <a:solidFill>
+                        <a:schemeClr val="bg1">
+                          <a:lumMod val="50000"/>
+                        </a:schemeClr>
+                      </a:solidFill>
+                      <a:prstDash val="solid"/>
+                      <a:round/>
+                      <a:headEnd type="none" w="med" len="med"/>
+                      <a:tailEnd type="none" w="med" len="med"/>
+                    </a:lnL>
+                    <a:lnR w="12700" cap="flat" cmpd="sng" algn="ctr">
+                      <a:solidFill>
+                        <a:schemeClr val="bg1">
+                          <a:lumMod val="50000"/>
+                        </a:schemeClr>
+                      </a:solidFill>
+                      <a:prstDash val="solid"/>
+                      <a:round/>
+                      <a:headEnd type="none" w="med" len="med"/>
+                      <a:tailEnd type="none" w="med" len="med"/>
+                    </a:lnR>
+                    <a:lnT w="12700" cap="flat" cmpd="sng" algn="ctr">
+                      <a:solidFill>
+                        <a:schemeClr val="bg1">
+                          <a:lumMod val="50000"/>
+                        </a:schemeClr>
+                      </a:solidFill>
+                      <a:prstDash val="solid"/>
+                      <a:round/>
+                      <a:headEnd type="none" w="med" len="med"/>
+                      <a:tailEnd type="none" w="med" len="med"/>
+                    </a:lnT>
+                    <a:lnB w="12700" cap="flat" cmpd="sng" algn="ctr">
+                      <a:solidFill>
+                        <a:schemeClr val="bg1">
+                          <a:lumMod val="50000"/>
+                        </a:schemeClr>
+                      </a:solidFill>
+                      <a:prstDash val="solid"/>
+                      <a:round/>
+                      <a:headEnd type="none" w="med" len="med"/>
+                      <a:tailEnd type="none" w="med" len="med"/>
+                    </a:lnB>
+                  </a:tcPr>
+                </a:tc>
+                <a:tc>
+                  <a:txBody>
+                    <a:bodyPr/>
+                    <a:lstStyle/>
+                    <a:p>
+                      <a:r>
+                        <a:rPr lang="en-IN" sz="3200" dirty="0">
+                          <a:solidFill>
+                            <a:srgbClr val="0009C4"/>
+                          </a:solidFill>
+                        </a:rPr>
+                        <a:t>print</a:t>
+                      </a:r>
+                      <a:r>
+                        <a:rPr lang="en-IN" sz="3200" dirty="0"/>
+                        <a:t>(</a:t>
+                      </a:r>
+                      <a:r>
+                        <a:rPr lang="en-IN" sz="3200" dirty="0">
+                          <a:solidFill>
+                            <a:schemeClr val="accent6">
+                              <a:lumMod val="75000"/>
+                            </a:schemeClr>
+                          </a:solidFill>
+                        </a:rPr>
+                        <a:t>"\U0001F600"</a:t>
+                      </a:r>
+                      <a:r>
+                        <a:rPr lang="en-IN" sz="3200" dirty="0"/>
+                        <a:t>)</a:t>
+                      </a:r>
+                    </a:p>
+                  </a:txBody>
+                  <a:tcPr anchor="ctr">
+                    <a:lnL w="12700" cap="flat" cmpd="sng" algn="ctr">
+                      <a:solidFill>
+                        <a:schemeClr val="bg1">
+                          <a:lumMod val="50000"/>
+                        </a:schemeClr>
+                      </a:solidFill>
+                      <a:prstDash val="solid"/>
+                      <a:round/>
+                      <a:headEnd type="none" w="med" len="med"/>
+                      <a:tailEnd type="none" w="med" len="med"/>
+                    </a:lnL>
+                    <a:lnR w="12700" cap="flat" cmpd="sng" algn="ctr">
+                      <a:solidFill>
+                        <a:schemeClr val="bg1">
+                          <a:lumMod val="50000"/>
+                        </a:schemeClr>
+                      </a:solidFill>
+                      <a:prstDash val="solid"/>
+                      <a:round/>
+                      <a:headEnd type="none" w="med" len="med"/>
+                      <a:tailEnd type="none" w="med" len="med"/>
+                    </a:lnR>
+                    <a:lnT w="12700" cap="flat" cmpd="sng" algn="ctr">
+                      <a:solidFill>
+                        <a:schemeClr val="bg1">
+                          <a:lumMod val="50000"/>
+                        </a:schemeClr>
+                      </a:solidFill>
+                      <a:prstDash val="solid"/>
+                      <a:round/>
+                      <a:headEnd type="none" w="med" len="med"/>
+                      <a:tailEnd type="none" w="med" len="med"/>
+                    </a:lnT>
+                    <a:lnB w="12700" cap="flat" cmpd="sng" algn="ctr">
+                      <a:solidFill>
+                        <a:schemeClr val="bg1">
+                          <a:lumMod val="50000"/>
+                        </a:schemeClr>
+                      </a:solidFill>
+                      <a:prstDash val="solid"/>
+                      <a:round/>
+                      <a:headEnd type="none" w="med" len="med"/>
+                      <a:tailEnd type="none" w="med" len="med"/>
+                    </a:lnB>
+                  </a:tcPr>
+                </a:tc>
+                <a:tc>
+                  <a:txBody>
+                    <a:bodyPr/>
+                    <a:lstStyle/>
+                    <a:p>
+                      <a:r>
+                        <a:rPr lang="en-IN" sz="3200" dirty="0"/>
+                        <a:t>😀</a:t>
+                      </a:r>
+                    </a:p>
+                  </a:txBody>
+                  <a:tcPr anchor="ctr">
+                    <a:lnL w="12700" cap="flat" cmpd="sng" algn="ctr">
+                      <a:solidFill>
+                        <a:schemeClr val="bg1">
+                          <a:lumMod val="50000"/>
+                        </a:schemeClr>
+                      </a:solidFill>
+                      <a:prstDash val="solid"/>
+                      <a:round/>
+                      <a:headEnd type="none" w="med" len="med"/>
+                      <a:tailEnd type="none" w="med" len="med"/>
+                    </a:lnL>
+                    <a:lnR w="12700" cap="flat" cmpd="sng" algn="ctr">
+                      <a:solidFill>
+                        <a:schemeClr val="bg1">
+                          <a:lumMod val="50000"/>
+                        </a:schemeClr>
+                      </a:solidFill>
+                      <a:prstDash val="solid"/>
+                      <a:round/>
+                      <a:headEnd type="none" w="med" len="med"/>
+                      <a:tailEnd type="none" w="med" len="med"/>
+                    </a:lnR>
+                    <a:lnT w="12700" cap="flat" cmpd="sng" algn="ctr">
+                      <a:solidFill>
+                        <a:schemeClr val="bg1">
+                          <a:lumMod val="50000"/>
+                        </a:schemeClr>
+                      </a:solidFill>
+                      <a:prstDash val="solid"/>
+                      <a:round/>
+                      <a:headEnd type="none" w="med" len="med"/>
+                      <a:tailEnd type="none" w="med" len="med"/>
+                    </a:lnT>
+                    <a:lnB w="12700" cap="flat" cmpd="sng" algn="ctr">
+                      <a:solidFill>
+                        <a:schemeClr val="bg1">
+                          <a:lumMod val="50000"/>
+                        </a:schemeClr>
+                      </a:solidFill>
+                      <a:prstDash val="solid"/>
+                      <a:round/>
+                      <a:headEnd type="none" w="med" len="med"/>
+                      <a:tailEnd type="none" w="med" len="med"/>
+                    </a:lnB>
+                  </a:tcPr>
+                </a:tc>
+                <a:extLst>
+                  <a:ext uri="{0D108BD9-81ED-4DB2-BD59-A6C34878D82A}">
+                    <a16:rowId xmlns:a16="http://schemas.microsoft.com/office/drawing/2014/main" val="2375689701"/>
+                  </a:ext>
+                </a:extLst>
+              </a:tr>
+              <a:tr h="0">
+                <a:tc>
+                  <a:txBody>
+                    <a:bodyPr/>
+                    <a:lstStyle/>
+                    <a:p>
+                      <a:r>
+                        <a:rPr lang="en-IN" sz="3200" dirty="0">
+                          <a:solidFill>
+                            <a:schemeClr val="accent2"/>
+                          </a:solidFill>
+                        </a:rPr>
+                        <a:t>\N</a:t>
+                      </a:r>
+                      <a:r>
+                        <a:rPr lang="en-IN" sz="3200" dirty="0"/>
+                        <a:t>{name}</a:t>
+                      </a:r>
+                    </a:p>
+                  </a:txBody>
+                  <a:tcPr anchor="ctr">
+                    <a:lnL w="12700" cap="flat" cmpd="sng" algn="ctr">
+                      <a:solidFill>
+                        <a:schemeClr val="bg1">
+                          <a:lumMod val="50000"/>
+                        </a:schemeClr>
+                      </a:solidFill>
+                      <a:prstDash val="solid"/>
+                      <a:round/>
+                      <a:headEnd type="none" w="med" len="med"/>
+                      <a:tailEnd type="none" w="med" len="med"/>
+                    </a:lnL>
+                    <a:lnR w="12700" cap="flat" cmpd="sng" algn="ctr">
+                      <a:solidFill>
+                        <a:schemeClr val="bg1">
+                          <a:lumMod val="50000"/>
+                        </a:schemeClr>
+                      </a:solidFill>
+                      <a:prstDash val="solid"/>
+                      <a:round/>
+                      <a:headEnd type="none" w="med" len="med"/>
+                      <a:tailEnd type="none" w="med" len="med"/>
+                    </a:lnR>
+                    <a:lnT w="12700" cap="flat" cmpd="sng" algn="ctr">
+                      <a:solidFill>
+                        <a:schemeClr val="bg1">
+                          <a:lumMod val="50000"/>
+                        </a:schemeClr>
+                      </a:solidFill>
+                      <a:prstDash val="solid"/>
+                      <a:round/>
+                      <a:headEnd type="none" w="med" len="med"/>
+                      <a:tailEnd type="none" w="med" len="med"/>
+                    </a:lnT>
+                    <a:lnB w="12700" cap="flat" cmpd="sng" algn="ctr">
+                      <a:solidFill>
+                        <a:schemeClr val="bg1">
+                          <a:lumMod val="50000"/>
+                        </a:schemeClr>
+                      </a:solidFill>
+                      <a:prstDash val="solid"/>
+                      <a:round/>
+                      <a:headEnd type="none" w="med" len="med"/>
+                      <a:tailEnd type="none" w="med" len="med"/>
+                    </a:lnB>
+                  </a:tcPr>
+                </a:tc>
+                <a:tc>
+                  <a:txBody>
+                    <a:bodyPr/>
+                    <a:lstStyle/>
+                    <a:p>
+                      <a:r>
+                        <a:rPr lang="en-IN" sz="3200" dirty="0"/>
+                        <a:t>Name of Unicode</a:t>
+                      </a:r>
+                    </a:p>
+                  </a:txBody>
+                  <a:tcPr anchor="ctr">
+                    <a:lnL w="12700" cap="flat" cmpd="sng" algn="ctr">
+                      <a:solidFill>
+                        <a:schemeClr val="bg1">
+                          <a:lumMod val="50000"/>
+                        </a:schemeClr>
+                      </a:solidFill>
+                      <a:prstDash val="solid"/>
+                      <a:round/>
+                      <a:headEnd type="none" w="med" len="med"/>
+                      <a:tailEnd type="none" w="med" len="med"/>
+                    </a:lnL>
+                    <a:lnR w="12700" cap="flat" cmpd="sng" algn="ctr">
+                      <a:solidFill>
+                        <a:schemeClr val="bg1">
+                          <a:lumMod val="50000"/>
+                        </a:schemeClr>
+                      </a:solidFill>
+                      <a:prstDash val="solid"/>
+                      <a:round/>
+                      <a:headEnd type="none" w="med" len="med"/>
+                      <a:tailEnd type="none" w="med" len="med"/>
+                    </a:lnR>
+                    <a:lnT w="12700" cap="flat" cmpd="sng" algn="ctr">
+                      <a:solidFill>
+                        <a:schemeClr val="bg1">
+                          <a:lumMod val="50000"/>
+                        </a:schemeClr>
+                      </a:solidFill>
+                      <a:prstDash val="solid"/>
+                      <a:round/>
+                      <a:headEnd type="none" w="med" len="med"/>
+                      <a:tailEnd type="none" w="med" len="med"/>
+                    </a:lnT>
+                    <a:lnB w="12700" cap="flat" cmpd="sng" algn="ctr">
+                      <a:solidFill>
+                        <a:schemeClr val="bg1">
+                          <a:lumMod val="50000"/>
+                        </a:schemeClr>
+                      </a:solidFill>
+                      <a:prstDash val="solid"/>
+                      <a:round/>
+                      <a:headEnd type="none" w="med" len="med"/>
+                      <a:tailEnd type="none" w="med" len="med"/>
+                    </a:lnB>
+                  </a:tcPr>
+                </a:tc>
+                <a:tc>
+                  <a:txBody>
+                    <a:bodyPr/>
+                    <a:lstStyle/>
+                    <a:p>
+                      <a:r>
+                        <a:rPr lang="en-IN" sz="3200" dirty="0">
+                          <a:solidFill>
+                            <a:srgbClr val="0009C4"/>
+                          </a:solidFill>
+                        </a:rPr>
+                        <a:t>print</a:t>
+                      </a:r>
+                      <a:r>
+                        <a:rPr lang="en-IN" sz="3200" dirty="0"/>
+                        <a:t>(</a:t>
+                      </a:r>
+                      <a:r>
+                        <a:rPr lang="en-IN" sz="3200" dirty="0">
+                          <a:solidFill>
+                            <a:schemeClr val="accent6">
+                              <a:lumMod val="75000"/>
+                            </a:schemeClr>
+                          </a:solidFill>
+                        </a:rPr>
+                        <a:t>“\N{grinning face}”</a:t>
+                      </a:r>
+                      <a:r>
+                        <a:rPr lang="en-IN" sz="3200" dirty="0"/>
+                        <a:t>)</a:t>
+                      </a:r>
+                    </a:p>
+                  </a:txBody>
+                  <a:tcPr anchor="ctr">
+                    <a:lnL w="12700" cap="flat" cmpd="sng" algn="ctr">
+                      <a:solidFill>
+                        <a:schemeClr val="bg1">
+                          <a:lumMod val="50000"/>
+                        </a:schemeClr>
+                      </a:solidFill>
+                      <a:prstDash val="solid"/>
+                      <a:round/>
+                      <a:headEnd type="none" w="med" len="med"/>
+                      <a:tailEnd type="none" w="med" len="med"/>
+                    </a:lnL>
+                    <a:lnR w="12700" cap="flat" cmpd="sng" algn="ctr">
+                      <a:solidFill>
+                        <a:schemeClr val="bg1">
+                          <a:lumMod val="50000"/>
+                        </a:schemeClr>
+                      </a:solidFill>
+                      <a:prstDash val="solid"/>
+                      <a:round/>
+                      <a:headEnd type="none" w="med" len="med"/>
+                      <a:tailEnd type="none" w="med" len="med"/>
+                    </a:lnR>
+                    <a:lnT w="12700" cap="flat" cmpd="sng" algn="ctr">
+                      <a:solidFill>
+                        <a:schemeClr val="bg1">
+                          <a:lumMod val="50000"/>
+                        </a:schemeClr>
+                      </a:solidFill>
+                      <a:prstDash val="solid"/>
+                      <a:round/>
+                      <a:headEnd type="none" w="med" len="med"/>
+                      <a:tailEnd type="none" w="med" len="med"/>
+                    </a:lnT>
+                    <a:lnB w="12700" cap="flat" cmpd="sng" algn="ctr">
+                      <a:solidFill>
+                        <a:schemeClr val="bg1">
+                          <a:lumMod val="50000"/>
+                        </a:schemeClr>
+                      </a:solidFill>
+                      <a:prstDash val="solid"/>
+                      <a:round/>
+                      <a:headEnd type="none" w="med" len="med"/>
+                      <a:tailEnd type="none" w="med" len="med"/>
+                    </a:lnB>
+                  </a:tcPr>
+                </a:tc>
+                <a:tc>
+                  <a:txBody>
+                    <a:bodyPr/>
+                    <a:lstStyle/>
+                    <a:p>
+                      <a:r>
+                        <a:rPr lang="en-IN" sz="3200" dirty="0"/>
+                        <a:t>😀</a:t>
+                      </a:r>
+                    </a:p>
+                  </a:txBody>
+                  <a:tcPr anchor="ctr">
+                    <a:lnL w="12700" cap="flat" cmpd="sng" algn="ctr">
+                      <a:solidFill>
+                        <a:schemeClr val="bg1">
+                          <a:lumMod val="50000"/>
+                        </a:schemeClr>
+                      </a:solidFill>
+                      <a:prstDash val="solid"/>
+                      <a:round/>
+                      <a:headEnd type="none" w="med" len="med"/>
+                      <a:tailEnd type="none" w="med" len="med"/>
+                    </a:lnL>
+                    <a:lnR w="12700" cap="flat" cmpd="sng" algn="ctr">
+                      <a:solidFill>
+                        <a:schemeClr val="bg1">
+                          <a:lumMod val="50000"/>
+                        </a:schemeClr>
+                      </a:solidFill>
+                      <a:prstDash val="solid"/>
+                      <a:round/>
+                      <a:headEnd type="none" w="med" len="med"/>
+                      <a:tailEnd type="none" w="med" len="med"/>
+                    </a:lnR>
+                    <a:lnT w="12700" cap="flat" cmpd="sng" algn="ctr">
+                      <a:solidFill>
+                        <a:schemeClr val="bg1">
+                          <a:lumMod val="50000"/>
+                        </a:schemeClr>
+                      </a:solidFill>
+                      <a:prstDash val="solid"/>
+                      <a:round/>
+                      <a:headEnd type="none" w="med" len="med"/>
+                      <a:tailEnd type="none" w="med" len="med"/>
+                    </a:lnT>
+                    <a:lnB w="12700" cap="flat" cmpd="sng" algn="ctr">
+                      <a:solidFill>
+                        <a:schemeClr val="bg1">
+                          <a:lumMod val="50000"/>
+                        </a:schemeClr>
+                      </a:solidFill>
+                      <a:prstDash val="solid"/>
+                      <a:round/>
+                      <a:headEnd type="none" w="med" len="med"/>
+                      <a:tailEnd type="none" w="med" len="med"/>
+                    </a:lnB>
+                  </a:tcPr>
+                </a:tc>
+                <a:extLst>
+                  <a:ext uri="{0D108BD9-81ED-4DB2-BD59-A6C34878D82A}">
+                    <a16:rowId xmlns:a16="http://schemas.microsoft.com/office/drawing/2014/main" val="3707889013"/>
+                  </a:ext>
+                </a:extLst>
+              </a:tr>
+            </a:tbl>
+          </a:graphicData>
+        </a:graphic>
+      </p:graphicFrame>
+    </p:spTree>
+    <p:extLst>
+      <p:ext uri="{BB962C8B-B14F-4D97-AF65-F5344CB8AC3E}">
+        <p14:creationId xmlns:p14="http://schemas.microsoft.com/office/powerpoint/2010/main" val="2445945991"/>
+      </p:ext>
+    </p:extLst>
+  </p:cSld>
+  <p:clrMapOvr>
+    <a:masterClrMapping/>
+  </p:clrMapOvr>
+</p:sld>
+</file>
+
+<file path=ppt/slides/slide12.xml><?xml version="1.0" encoding="utf-8"?>
+<p:sld xmlns:a="http://schemas.openxmlformats.org/drawingml/2006/main" xmlns:r="http://schemas.openxmlformats.org/officeDocument/2006/relationships" xmlns:p="http://schemas.openxmlformats.org/presentationml/2006/main">
+  <p:cSld>
+    <p:spTree>
+      <p:nvGrpSpPr>
+        <p:cNvPr id="1" name="">
+          <a:extLst>
+            <a:ext uri="{FF2B5EF4-FFF2-40B4-BE49-F238E27FC236}">
+              <a16:creationId xmlns:a16="http://schemas.microsoft.com/office/drawing/2014/main" id="{07AFB4DC-765E-8A3C-660C-98EFA9973B97}"/>
+            </a:ext>
+          </a:extLst>
+        </p:cNvPr>
+        <p:cNvGrpSpPr/>
+        <p:nvPr/>
+      </p:nvGrpSpPr>
+      <p:grpSpPr>
+        <a:xfrm>
+          <a:off x="0" y="0"/>
+          <a:ext cx="0" cy="0"/>
+          <a:chOff x="0" y="0"/>
+          <a:chExt cx="0" cy="0"/>
+        </a:xfrm>
+      </p:grpSpPr>
+      <p:sp>
+        <p:nvSpPr>
+          <p:cNvPr id="2" name="Title 1">
+            <a:extLst>
+              <a:ext uri="{FF2B5EF4-FFF2-40B4-BE49-F238E27FC236}">
+                <a16:creationId xmlns:a16="http://schemas.microsoft.com/office/drawing/2014/main" id="{63A9F97F-2635-A024-22D2-F57ADD771CDD}"/>
+              </a:ext>
+            </a:extLst>
+          </p:cNvPr>
+          <p:cNvSpPr>
+            <a:spLocks noGrp="1"/>
+          </p:cNvSpPr>
+          <p:nvPr>
+            <p:ph type="title"/>
+          </p:nvPr>
+        </p:nvSpPr>
+        <p:spPr/>
+        <p:txBody>
+          <a:bodyPr/>
+          <a:lstStyle/>
+          <a:p>
+            <a:r>
+              <a:rPr lang="en-IN" dirty="0">
+                <a:solidFill>
+                  <a:srgbClr val="0009C4"/>
+                </a:solidFill>
+              </a:rPr>
+              <a:t>print – Hexadecimal Escape (\x)</a:t>
+            </a:r>
+          </a:p>
+        </p:txBody>
+      </p:sp>
+      <p:sp>
+        <p:nvSpPr>
+          <p:cNvPr id="3" name="Content Placeholder 2">
+            <a:extLst>
+              <a:ext uri="{FF2B5EF4-FFF2-40B4-BE49-F238E27FC236}">
+                <a16:creationId xmlns:a16="http://schemas.microsoft.com/office/drawing/2014/main" id="{38D8D954-B2BF-15B4-B746-018098F7F684}"/>
+              </a:ext>
+            </a:extLst>
+          </p:cNvPr>
+          <p:cNvSpPr>
+            <a:spLocks noGrp="1"/>
+          </p:cNvSpPr>
+          <p:nvPr>
+            <p:ph idx="1"/>
+          </p:nvPr>
+        </p:nvSpPr>
+        <p:spPr/>
+        <p:txBody>
+          <a:bodyPr/>
+          <a:lstStyle/>
+          <a:p>
+            <a:r>
+              <a:rPr lang="en-IN" dirty="0"/>
+              <a:t>Allows encoding characters in hexadecimal format (2-digit hex codes).</a:t>
+            </a:r>
+          </a:p>
+        </p:txBody>
+      </p:sp>
+      <p:graphicFrame>
+        <p:nvGraphicFramePr>
+          <p:cNvPr id="7" name="Table 6">
+            <a:extLst>
+              <a:ext uri="{FF2B5EF4-FFF2-40B4-BE49-F238E27FC236}">
+                <a16:creationId xmlns:a16="http://schemas.microsoft.com/office/drawing/2014/main" id="{0C16F990-EEB7-2C6B-62E0-7FC2B9B3D173}"/>
+              </a:ext>
+            </a:extLst>
+          </p:cNvPr>
+          <p:cNvGraphicFramePr>
+            <a:graphicFrameLocks noGrp="1"/>
+          </p:cNvGraphicFramePr>
+          <p:nvPr>
+            <p:extLst>
+              <p:ext uri="{D42A27DB-BD31-4B8C-83A1-F6EECF244321}">
+                <p14:modId xmlns:p14="http://schemas.microsoft.com/office/powerpoint/2010/main" val="1911284714"/>
+              </p:ext>
+            </p:extLst>
+          </p:nvPr>
+        </p:nvGraphicFramePr>
+        <p:xfrm>
+          <a:off x="1257300" y="5247958"/>
+          <a:ext cx="15773400" cy="1158240"/>
+        </p:xfrm>
+        <a:graphic>
+          <a:graphicData uri="http://schemas.openxmlformats.org/drawingml/2006/table">
+            <a:tbl>
+              <a:tblPr>
+                <a:tableStyleId>{5940675A-B579-460E-94D1-54222C63F5DA}</a:tableStyleId>
+              </a:tblPr>
+              <a:tblGrid>
+                <a:gridCol w="3943350">
+                  <a:extLst>
+                    <a:ext uri="{9D8B030D-6E8A-4147-A177-3AD203B41FA5}">
+                      <a16:colId xmlns:a16="http://schemas.microsoft.com/office/drawing/2014/main" val="4275626049"/>
+                    </a:ext>
+                  </a:extLst>
+                </a:gridCol>
+                <a:gridCol w="3943350">
+                  <a:extLst>
+                    <a:ext uri="{9D8B030D-6E8A-4147-A177-3AD203B41FA5}">
+                      <a16:colId xmlns:a16="http://schemas.microsoft.com/office/drawing/2014/main" val="2811429537"/>
+                    </a:ext>
+                  </a:extLst>
+                </a:gridCol>
+                <a:gridCol w="3943350">
+                  <a:extLst>
+                    <a:ext uri="{9D8B030D-6E8A-4147-A177-3AD203B41FA5}">
+                      <a16:colId xmlns:a16="http://schemas.microsoft.com/office/drawing/2014/main" val="11557222"/>
+                    </a:ext>
+                  </a:extLst>
+                </a:gridCol>
+                <a:gridCol w="3943350">
+                  <a:extLst>
+                    <a:ext uri="{9D8B030D-6E8A-4147-A177-3AD203B41FA5}">
+                      <a16:colId xmlns:a16="http://schemas.microsoft.com/office/drawing/2014/main" val="3407812607"/>
+                    </a:ext>
+                  </a:extLst>
+                </a:gridCol>
+              </a:tblGrid>
+              <a:tr h="0">
+                <a:tc>
+                  <a:txBody>
+                    <a:bodyPr/>
+                    <a:lstStyle/>
+                    <a:p>
+                      <a:pPr algn="ctr"/>
+                      <a:r>
+                        <a:rPr lang="en-IN" sz="3200" b="1" dirty="0">
+                          <a:solidFill>
+                            <a:schemeClr val="tx1"/>
+                          </a:solidFill>
+                        </a:rPr>
+                        <a:t>Escape Sequence</a:t>
+                      </a:r>
+                    </a:p>
+                  </a:txBody>
+                  <a:tcPr anchor="ctr">
+                    <a:lnL w="12700" cap="flat" cmpd="sng" algn="ctr">
+                      <a:solidFill>
+                        <a:schemeClr val="bg1">
+                          <a:lumMod val="50000"/>
+                        </a:schemeClr>
+                      </a:solidFill>
+                      <a:prstDash val="solid"/>
+                      <a:round/>
+                      <a:headEnd type="none" w="med" len="med"/>
+                      <a:tailEnd type="none" w="med" len="med"/>
+                    </a:lnL>
+                    <a:lnR w="12700" cap="flat" cmpd="sng" algn="ctr">
+                      <a:solidFill>
+                        <a:schemeClr val="bg1">
+                          <a:lumMod val="50000"/>
+                        </a:schemeClr>
+                      </a:solidFill>
+                      <a:prstDash val="solid"/>
+                      <a:round/>
+                      <a:headEnd type="none" w="med" len="med"/>
+                      <a:tailEnd type="none" w="med" len="med"/>
+                    </a:lnR>
+                    <a:lnT w="12700" cap="flat" cmpd="sng" algn="ctr">
+                      <a:solidFill>
+                        <a:schemeClr val="bg1">
+                          <a:lumMod val="50000"/>
+                        </a:schemeClr>
+                      </a:solidFill>
+                      <a:prstDash val="solid"/>
+                      <a:round/>
+                      <a:headEnd type="none" w="med" len="med"/>
+                      <a:tailEnd type="none" w="med" len="med"/>
+                    </a:lnT>
+                    <a:lnB w="12700" cap="flat" cmpd="sng" algn="ctr">
+                      <a:solidFill>
+                        <a:schemeClr val="bg1">
+                          <a:lumMod val="50000"/>
+                        </a:schemeClr>
+                      </a:solidFill>
+                      <a:prstDash val="solid"/>
+                      <a:round/>
+                      <a:headEnd type="none" w="med" len="med"/>
+                      <a:tailEnd type="none" w="med" len="med"/>
+                    </a:lnB>
+                    <a:solidFill>
+                      <a:srgbClr val="00FFFF"/>
+                    </a:solidFill>
+                  </a:tcPr>
+                </a:tc>
+                <a:tc>
+                  <a:txBody>
+                    <a:bodyPr/>
+                    <a:lstStyle/>
+                    <a:p>
+                      <a:pPr algn="ctr"/>
+                      <a:r>
+                        <a:rPr lang="en-IN" sz="3200" b="1">
+                          <a:solidFill>
+                            <a:schemeClr val="tx1"/>
+                          </a:solidFill>
+                        </a:rPr>
+                        <a:t>Description</a:t>
+                      </a:r>
+                    </a:p>
+                  </a:txBody>
+                  <a:tcPr anchor="ctr">
+                    <a:lnL w="12700" cap="flat" cmpd="sng" algn="ctr">
+                      <a:solidFill>
+                        <a:schemeClr val="bg1">
+                          <a:lumMod val="50000"/>
+                        </a:schemeClr>
+                      </a:solidFill>
+                      <a:prstDash val="solid"/>
+                      <a:round/>
+                      <a:headEnd type="none" w="med" len="med"/>
+                      <a:tailEnd type="none" w="med" len="med"/>
+                    </a:lnL>
+                    <a:lnR w="12700" cap="flat" cmpd="sng" algn="ctr">
+                      <a:solidFill>
+                        <a:schemeClr val="bg1">
+                          <a:lumMod val="50000"/>
+                        </a:schemeClr>
+                      </a:solidFill>
+                      <a:prstDash val="solid"/>
+                      <a:round/>
+                      <a:headEnd type="none" w="med" len="med"/>
+                      <a:tailEnd type="none" w="med" len="med"/>
+                    </a:lnR>
+                    <a:lnT w="12700" cap="flat" cmpd="sng" algn="ctr">
+                      <a:solidFill>
+                        <a:schemeClr val="bg1">
+                          <a:lumMod val="50000"/>
+                        </a:schemeClr>
+                      </a:solidFill>
+                      <a:prstDash val="solid"/>
+                      <a:round/>
+                      <a:headEnd type="none" w="med" len="med"/>
+                      <a:tailEnd type="none" w="med" len="med"/>
+                    </a:lnT>
+                    <a:lnB w="12700" cap="flat" cmpd="sng" algn="ctr">
+                      <a:solidFill>
+                        <a:schemeClr val="bg1">
+                          <a:lumMod val="50000"/>
+                        </a:schemeClr>
+                      </a:solidFill>
+                      <a:prstDash val="solid"/>
+                      <a:round/>
+                      <a:headEnd type="none" w="med" len="med"/>
+                      <a:tailEnd type="none" w="med" len="med"/>
+                    </a:lnB>
+                    <a:solidFill>
+                      <a:srgbClr val="00FFFF"/>
+                    </a:solidFill>
+                  </a:tcPr>
+                </a:tc>
+                <a:tc>
+                  <a:txBody>
+                    <a:bodyPr/>
+                    <a:lstStyle/>
+                    <a:p>
+                      <a:pPr algn="ctr"/>
+                      <a:r>
+                        <a:rPr lang="en-IN" sz="3200" b="1" dirty="0">
+                          <a:solidFill>
+                            <a:schemeClr val="tx1"/>
+                          </a:solidFill>
+                        </a:rPr>
+                        <a:t>Example</a:t>
+                      </a:r>
+                    </a:p>
+                  </a:txBody>
+                  <a:tcPr anchor="ctr">
+                    <a:lnL w="12700" cap="flat" cmpd="sng" algn="ctr">
+                      <a:solidFill>
+                        <a:schemeClr val="bg1">
+                          <a:lumMod val="50000"/>
+                        </a:schemeClr>
+                      </a:solidFill>
+                      <a:prstDash val="solid"/>
+                      <a:round/>
+                      <a:headEnd type="none" w="med" len="med"/>
+                      <a:tailEnd type="none" w="med" len="med"/>
+                    </a:lnL>
+                    <a:lnR w="12700" cap="flat" cmpd="sng" algn="ctr">
+                      <a:solidFill>
+                        <a:schemeClr val="bg1">
+                          <a:lumMod val="50000"/>
+                        </a:schemeClr>
+                      </a:solidFill>
+                      <a:prstDash val="solid"/>
+                      <a:round/>
+                      <a:headEnd type="none" w="med" len="med"/>
+                      <a:tailEnd type="none" w="med" len="med"/>
+                    </a:lnR>
+                    <a:lnT w="12700" cap="flat" cmpd="sng" algn="ctr">
+                      <a:solidFill>
+                        <a:schemeClr val="bg1">
+                          <a:lumMod val="50000"/>
+                        </a:schemeClr>
+                      </a:solidFill>
+                      <a:prstDash val="solid"/>
+                      <a:round/>
+                      <a:headEnd type="none" w="med" len="med"/>
+                      <a:tailEnd type="none" w="med" len="med"/>
+                    </a:lnT>
+                    <a:lnB w="12700" cap="flat" cmpd="sng" algn="ctr">
+                      <a:solidFill>
+                        <a:schemeClr val="bg1">
+                          <a:lumMod val="50000"/>
+                        </a:schemeClr>
+                      </a:solidFill>
+                      <a:prstDash val="solid"/>
+                      <a:round/>
+                      <a:headEnd type="none" w="med" len="med"/>
+                      <a:tailEnd type="none" w="med" len="med"/>
+                    </a:lnB>
+                    <a:solidFill>
+                      <a:srgbClr val="00FFFF"/>
+                    </a:solidFill>
+                  </a:tcPr>
+                </a:tc>
+                <a:tc>
+                  <a:txBody>
+                    <a:bodyPr/>
+                    <a:lstStyle/>
+                    <a:p>
+                      <a:pPr algn="ctr"/>
+                      <a:r>
+                        <a:rPr lang="en-IN" sz="3200" b="1" dirty="0">
+                          <a:solidFill>
+                            <a:schemeClr val="tx1"/>
+                          </a:solidFill>
+                        </a:rPr>
+                        <a:t>Output</a:t>
+                      </a:r>
+                    </a:p>
+                  </a:txBody>
+                  <a:tcPr anchor="ctr">
+                    <a:lnL w="12700" cap="flat" cmpd="sng" algn="ctr">
+                      <a:solidFill>
+                        <a:schemeClr val="bg1">
+                          <a:lumMod val="50000"/>
+                        </a:schemeClr>
+                      </a:solidFill>
+                      <a:prstDash val="solid"/>
+                      <a:round/>
+                      <a:headEnd type="none" w="med" len="med"/>
+                      <a:tailEnd type="none" w="med" len="med"/>
+                    </a:lnL>
+                    <a:lnR w="12700" cap="flat" cmpd="sng" algn="ctr">
+                      <a:solidFill>
+                        <a:schemeClr val="bg1">
+                          <a:lumMod val="50000"/>
+                        </a:schemeClr>
+                      </a:solidFill>
+                      <a:prstDash val="solid"/>
+                      <a:round/>
+                      <a:headEnd type="none" w="med" len="med"/>
+                      <a:tailEnd type="none" w="med" len="med"/>
+                    </a:lnR>
+                    <a:lnT w="12700" cap="flat" cmpd="sng" algn="ctr">
+                      <a:solidFill>
+                        <a:schemeClr val="bg1">
+                          <a:lumMod val="50000"/>
+                        </a:schemeClr>
+                      </a:solidFill>
+                      <a:prstDash val="solid"/>
+                      <a:round/>
+                      <a:headEnd type="none" w="med" len="med"/>
+                      <a:tailEnd type="none" w="med" len="med"/>
+                    </a:lnT>
+                    <a:lnB w="12700" cap="flat" cmpd="sng" algn="ctr">
+                      <a:solidFill>
+                        <a:schemeClr val="bg1">
+                          <a:lumMod val="50000"/>
+                        </a:schemeClr>
+                      </a:solidFill>
+                      <a:prstDash val="solid"/>
+                      <a:round/>
+                      <a:headEnd type="none" w="med" len="med"/>
+                      <a:tailEnd type="none" w="med" len="med"/>
+                    </a:lnB>
+                    <a:solidFill>
+                      <a:srgbClr val="00FFFF"/>
+                    </a:solidFill>
+                  </a:tcPr>
+                </a:tc>
+                <a:extLst>
+                  <a:ext uri="{0D108BD9-81ED-4DB2-BD59-A6C34878D82A}">
+                    <a16:rowId xmlns:a16="http://schemas.microsoft.com/office/drawing/2014/main" val="13053074"/>
+                  </a:ext>
+                </a:extLst>
+              </a:tr>
+              <a:tr h="0">
+                <a:tc>
+                  <a:txBody>
+                    <a:bodyPr/>
+                    <a:lstStyle/>
+                    <a:p>
+                      <a:r>
+                        <a:rPr lang="en-IN" sz="3200" b="0" dirty="0">
+                          <a:solidFill>
+                            <a:schemeClr val="accent2"/>
+                          </a:solidFill>
+                        </a:rPr>
+                        <a:t>\</a:t>
+                      </a:r>
+                      <a:r>
+                        <a:rPr lang="en-IN" sz="3200" b="0" dirty="0" err="1">
+                          <a:solidFill>
+                            <a:schemeClr val="accent2"/>
+                          </a:solidFill>
+                        </a:rPr>
+                        <a:t>x</a:t>
+                      </a:r>
+                      <a:r>
+                        <a:rPr lang="en-IN" sz="3200" dirty="0" err="1"/>
+                        <a:t>XX</a:t>
+                      </a:r>
+                      <a:endParaRPr lang="en-IN" sz="3200" dirty="0"/>
+                    </a:p>
+                  </a:txBody>
+                  <a:tcPr anchor="ctr">
+                    <a:lnL w="12700" cap="flat" cmpd="sng" algn="ctr">
+                      <a:solidFill>
+                        <a:schemeClr val="bg1">
+                          <a:lumMod val="50000"/>
+                        </a:schemeClr>
+                      </a:solidFill>
+                      <a:prstDash val="solid"/>
+                      <a:round/>
+                      <a:headEnd type="none" w="med" len="med"/>
+                      <a:tailEnd type="none" w="med" len="med"/>
+                    </a:lnL>
+                    <a:lnR w="12700" cap="flat" cmpd="sng" algn="ctr">
+                      <a:solidFill>
+                        <a:schemeClr val="bg1">
+                          <a:lumMod val="50000"/>
+                        </a:schemeClr>
+                      </a:solidFill>
+                      <a:prstDash val="solid"/>
+                      <a:round/>
+                      <a:headEnd type="none" w="med" len="med"/>
+                      <a:tailEnd type="none" w="med" len="med"/>
+                    </a:lnR>
+                    <a:lnT w="12700" cap="flat" cmpd="sng" algn="ctr">
+                      <a:solidFill>
+                        <a:schemeClr val="bg1">
+                          <a:lumMod val="50000"/>
+                        </a:schemeClr>
+                      </a:solidFill>
+                      <a:prstDash val="solid"/>
+                      <a:round/>
+                      <a:headEnd type="none" w="med" len="med"/>
+                      <a:tailEnd type="none" w="med" len="med"/>
+                    </a:lnT>
+                    <a:lnB w="12700" cap="flat" cmpd="sng" algn="ctr">
+                      <a:solidFill>
+                        <a:schemeClr val="bg1">
+                          <a:lumMod val="50000"/>
+                        </a:schemeClr>
+                      </a:solidFill>
+                      <a:prstDash val="solid"/>
+                      <a:round/>
+                      <a:headEnd type="none" w="med" len="med"/>
+                      <a:tailEnd type="none" w="med" len="med"/>
+                    </a:lnB>
+                  </a:tcPr>
+                </a:tc>
+                <a:tc>
+                  <a:txBody>
+                    <a:bodyPr/>
+                    <a:lstStyle/>
+                    <a:p>
+                      <a:r>
+                        <a:rPr lang="en-IN" sz="3200" dirty="0"/>
+                        <a:t>Hex representation</a:t>
+                      </a:r>
+                    </a:p>
+                  </a:txBody>
+                  <a:tcPr anchor="ctr">
+                    <a:lnL w="12700" cap="flat" cmpd="sng" algn="ctr">
+                      <a:solidFill>
+                        <a:schemeClr val="bg1">
+                          <a:lumMod val="50000"/>
+                        </a:schemeClr>
+                      </a:solidFill>
+                      <a:prstDash val="solid"/>
+                      <a:round/>
+                      <a:headEnd type="none" w="med" len="med"/>
+                      <a:tailEnd type="none" w="med" len="med"/>
+                    </a:lnL>
+                    <a:lnR w="12700" cap="flat" cmpd="sng" algn="ctr">
+                      <a:solidFill>
+                        <a:schemeClr val="bg1">
+                          <a:lumMod val="50000"/>
+                        </a:schemeClr>
+                      </a:solidFill>
+                      <a:prstDash val="solid"/>
+                      <a:round/>
+                      <a:headEnd type="none" w="med" len="med"/>
+                      <a:tailEnd type="none" w="med" len="med"/>
+                    </a:lnR>
+                    <a:lnT w="12700" cap="flat" cmpd="sng" algn="ctr">
+                      <a:solidFill>
+                        <a:schemeClr val="bg1">
+                          <a:lumMod val="50000"/>
+                        </a:schemeClr>
+                      </a:solidFill>
+                      <a:prstDash val="solid"/>
+                      <a:round/>
+                      <a:headEnd type="none" w="med" len="med"/>
+                      <a:tailEnd type="none" w="med" len="med"/>
+                    </a:lnT>
+                    <a:lnB w="12700" cap="flat" cmpd="sng" algn="ctr">
+                      <a:solidFill>
+                        <a:schemeClr val="bg1">
+                          <a:lumMod val="50000"/>
+                        </a:schemeClr>
+                      </a:solidFill>
+                      <a:prstDash val="solid"/>
+                      <a:round/>
+                      <a:headEnd type="none" w="med" len="med"/>
+                      <a:tailEnd type="none" w="med" len="med"/>
+                    </a:lnB>
+                  </a:tcPr>
+                </a:tc>
+                <a:tc>
+                  <a:txBody>
+                    <a:bodyPr/>
+                    <a:lstStyle/>
+                    <a:p>
+                      <a:r>
+                        <a:rPr lang="en-IN" sz="3200" dirty="0">
+                          <a:solidFill>
+                            <a:srgbClr val="0009C4"/>
+                          </a:solidFill>
+                        </a:rPr>
+                        <a:t>print</a:t>
+                      </a:r>
+                      <a:r>
+                        <a:rPr lang="en-IN" sz="3200" dirty="0"/>
+                        <a:t>(</a:t>
+                      </a:r>
+                      <a:r>
+                        <a:rPr lang="en-IN" sz="3200" dirty="0">
+                          <a:solidFill>
+                            <a:schemeClr val="accent6">
+                              <a:lumMod val="75000"/>
+                            </a:schemeClr>
+                          </a:solidFill>
+                        </a:rPr>
+                        <a:t>“\x41\42\43”</a:t>
+                      </a:r>
+                      <a:r>
+                        <a:rPr lang="en-IN" sz="3200" dirty="0"/>
+                        <a:t>)</a:t>
+                      </a:r>
+                    </a:p>
+                  </a:txBody>
+                  <a:tcPr anchor="ctr">
+                    <a:lnL w="12700" cap="flat" cmpd="sng" algn="ctr">
+                      <a:solidFill>
+                        <a:schemeClr val="bg1">
+                          <a:lumMod val="50000"/>
+                        </a:schemeClr>
+                      </a:solidFill>
+                      <a:prstDash val="solid"/>
+                      <a:round/>
+                      <a:headEnd type="none" w="med" len="med"/>
+                      <a:tailEnd type="none" w="med" len="med"/>
+                    </a:lnL>
+                    <a:lnR w="12700" cap="flat" cmpd="sng" algn="ctr">
+                      <a:solidFill>
+                        <a:schemeClr val="bg1">
+                          <a:lumMod val="50000"/>
+                        </a:schemeClr>
+                      </a:solidFill>
+                      <a:prstDash val="solid"/>
+                      <a:round/>
+                      <a:headEnd type="none" w="med" len="med"/>
+                      <a:tailEnd type="none" w="med" len="med"/>
+                    </a:lnR>
+                    <a:lnT w="12700" cap="flat" cmpd="sng" algn="ctr">
+                      <a:solidFill>
+                        <a:schemeClr val="bg1">
+                          <a:lumMod val="50000"/>
+                        </a:schemeClr>
+                      </a:solidFill>
+                      <a:prstDash val="solid"/>
+                      <a:round/>
+                      <a:headEnd type="none" w="med" len="med"/>
+                      <a:tailEnd type="none" w="med" len="med"/>
+                    </a:lnT>
+                    <a:lnB w="12700" cap="flat" cmpd="sng" algn="ctr">
+                      <a:solidFill>
+                        <a:schemeClr val="bg1">
+                          <a:lumMod val="50000"/>
+                        </a:schemeClr>
+                      </a:solidFill>
+                      <a:prstDash val="solid"/>
+                      <a:round/>
+                      <a:headEnd type="none" w="med" len="med"/>
+                      <a:tailEnd type="none" w="med" len="med"/>
+                    </a:lnB>
+                  </a:tcPr>
+                </a:tc>
+                <a:tc>
+                  <a:txBody>
+                    <a:bodyPr/>
+                    <a:lstStyle/>
+                    <a:p>
+                      <a:r>
+                        <a:rPr lang="en-IN" sz="3200" dirty="0"/>
+                        <a:t>ABC</a:t>
+                      </a:r>
+                    </a:p>
+                  </a:txBody>
+                  <a:tcPr anchor="ctr">
+                    <a:lnL w="12700" cap="flat" cmpd="sng" algn="ctr">
+                      <a:solidFill>
+                        <a:schemeClr val="bg1">
+                          <a:lumMod val="50000"/>
+                        </a:schemeClr>
+                      </a:solidFill>
+                      <a:prstDash val="solid"/>
+                      <a:round/>
+                      <a:headEnd type="none" w="med" len="med"/>
+                      <a:tailEnd type="none" w="med" len="med"/>
+                    </a:lnL>
+                    <a:lnR w="12700" cap="flat" cmpd="sng" algn="ctr">
+                      <a:solidFill>
+                        <a:schemeClr val="bg1">
+                          <a:lumMod val="50000"/>
+                        </a:schemeClr>
+                      </a:solidFill>
+                      <a:prstDash val="solid"/>
+                      <a:round/>
+                      <a:headEnd type="none" w="med" len="med"/>
+                      <a:tailEnd type="none" w="med" len="med"/>
+                    </a:lnR>
+                    <a:lnT w="12700" cap="flat" cmpd="sng" algn="ctr">
+                      <a:solidFill>
+                        <a:schemeClr val="bg1">
+                          <a:lumMod val="50000"/>
+                        </a:schemeClr>
+                      </a:solidFill>
+                      <a:prstDash val="solid"/>
+                      <a:round/>
+                      <a:headEnd type="none" w="med" len="med"/>
+                      <a:tailEnd type="none" w="med" len="med"/>
+                    </a:lnT>
+                    <a:lnB w="12700" cap="flat" cmpd="sng" algn="ctr">
+                      <a:solidFill>
+                        <a:schemeClr val="bg1">
+                          <a:lumMod val="50000"/>
+                        </a:schemeClr>
+                      </a:solidFill>
+                      <a:prstDash val="solid"/>
+                      <a:round/>
+                      <a:headEnd type="none" w="med" len="med"/>
+                      <a:tailEnd type="none" w="med" len="med"/>
+                    </a:lnB>
+                  </a:tcPr>
+                </a:tc>
+                <a:extLst>
+                  <a:ext uri="{0D108BD9-81ED-4DB2-BD59-A6C34878D82A}">
+                    <a16:rowId xmlns:a16="http://schemas.microsoft.com/office/drawing/2014/main" val="3147530512"/>
+                  </a:ext>
+                </a:extLst>
+              </a:tr>
+            </a:tbl>
+          </a:graphicData>
+        </a:graphic>
+      </p:graphicFrame>
+    </p:spTree>
+    <p:extLst>
+      <p:ext uri="{BB962C8B-B14F-4D97-AF65-F5344CB8AC3E}">
+        <p14:creationId xmlns:p14="http://schemas.microsoft.com/office/powerpoint/2010/main" val="2854654347"/>
+      </p:ext>
+    </p:extLst>
+  </p:cSld>
+  <p:clrMapOvr>
+    <a:masterClrMapping/>
+  </p:clrMapOvr>
+</p:sld>
+</file>
+
+<file path=ppt/slides/slide13.xml><?xml version="1.0" encoding="utf-8"?>
+<p:sld xmlns:a="http://schemas.openxmlformats.org/drawingml/2006/main" xmlns:r="http://schemas.openxmlformats.org/officeDocument/2006/relationships" xmlns:p="http://schemas.openxmlformats.org/presentationml/2006/main">
+  <p:cSld>
+    <p:spTree>
+      <p:nvGrpSpPr>
+        <p:cNvPr id="1" name="">
+          <a:extLst>
+            <a:ext uri="{FF2B5EF4-FFF2-40B4-BE49-F238E27FC236}">
+              <a16:creationId xmlns:a16="http://schemas.microsoft.com/office/drawing/2014/main" id="{3B202C24-E2CC-EEA5-56FB-F7834284D29E}"/>
+            </a:ext>
+          </a:extLst>
+        </p:cNvPr>
+        <p:cNvGrpSpPr/>
+        <p:nvPr/>
+      </p:nvGrpSpPr>
+      <p:grpSpPr>
+        <a:xfrm>
+          <a:off x="0" y="0"/>
+          <a:ext cx="0" cy="0"/>
+          <a:chOff x="0" y="0"/>
+          <a:chExt cx="0" cy="0"/>
+        </a:xfrm>
+      </p:grpSpPr>
+      <p:sp>
+        <p:nvSpPr>
+          <p:cNvPr id="2" name="Title 1">
+            <a:extLst>
+              <a:ext uri="{FF2B5EF4-FFF2-40B4-BE49-F238E27FC236}">
+                <a16:creationId xmlns:a16="http://schemas.microsoft.com/office/drawing/2014/main" id="{5A46C412-37C7-74A3-8BEB-52BF85A900BC}"/>
+              </a:ext>
+            </a:extLst>
+          </p:cNvPr>
+          <p:cNvSpPr>
+            <a:spLocks noGrp="1"/>
+          </p:cNvSpPr>
+          <p:nvPr>
+            <p:ph type="title"/>
+          </p:nvPr>
+        </p:nvSpPr>
+        <p:spPr/>
+        <p:txBody>
+          <a:bodyPr/>
+          <a:lstStyle/>
+          <a:p>
+            <a:r>
+              <a:rPr lang="en-IN" dirty="0">
+                <a:solidFill>
+                  <a:srgbClr val="0009C4"/>
+                </a:solidFill>
+              </a:rPr>
+              <a:t>print – Octal Escape(\</a:t>
+            </a:r>
+            <a:r>
+              <a:rPr lang="en-IN" dirty="0" err="1">
+                <a:solidFill>
+                  <a:srgbClr val="0009C4"/>
+                </a:solidFill>
+              </a:rPr>
+              <a:t>ooo</a:t>
+            </a:r>
+            <a:r>
+              <a:rPr lang="en-IN" dirty="0">
+                <a:solidFill>
+                  <a:srgbClr val="0009C4"/>
+                </a:solidFill>
+              </a:rPr>
+              <a:t>)</a:t>
+            </a:r>
+          </a:p>
+        </p:txBody>
+      </p:sp>
+      <p:sp>
+        <p:nvSpPr>
+          <p:cNvPr id="3" name="Content Placeholder 2">
+            <a:extLst>
+              <a:ext uri="{FF2B5EF4-FFF2-40B4-BE49-F238E27FC236}">
+                <a16:creationId xmlns:a16="http://schemas.microsoft.com/office/drawing/2014/main" id="{7C568743-59C7-257E-748D-525E8EC0C858}"/>
+              </a:ext>
+            </a:extLst>
+          </p:cNvPr>
+          <p:cNvSpPr>
+            <a:spLocks noGrp="1"/>
+          </p:cNvSpPr>
+          <p:nvPr>
+            <p:ph idx="1"/>
+          </p:nvPr>
+        </p:nvSpPr>
+        <p:spPr/>
+        <p:txBody>
+          <a:bodyPr/>
+          <a:lstStyle/>
+          <a:p>
+            <a:r>
+              <a:rPr lang="en-IN" dirty="0"/>
+              <a:t>Allows encoding characters using octal values (3-digit octal codes).</a:t>
+            </a:r>
+          </a:p>
+        </p:txBody>
+      </p:sp>
+      <p:graphicFrame>
+        <p:nvGraphicFramePr>
+          <p:cNvPr id="7" name="Table 6">
+            <a:extLst>
+              <a:ext uri="{FF2B5EF4-FFF2-40B4-BE49-F238E27FC236}">
+                <a16:creationId xmlns:a16="http://schemas.microsoft.com/office/drawing/2014/main" id="{4DE4AA02-6ECE-9542-9692-E3C16B28F07F}"/>
+              </a:ext>
+            </a:extLst>
+          </p:cNvPr>
+          <p:cNvGraphicFramePr>
+            <a:graphicFrameLocks noGrp="1"/>
+          </p:cNvGraphicFramePr>
+          <p:nvPr>
+            <p:extLst>
+              <p:ext uri="{D42A27DB-BD31-4B8C-83A1-F6EECF244321}">
+                <p14:modId xmlns:p14="http://schemas.microsoft.com/office/powerpoint/2010/main" val="3292742321"/>
+              </p:ext>
+            </p:extLst>
+          </p:nvPr>
+        </p:nvGraphicFramePr>
+        <p:xfrm>
+          <a:off x="1257300" y="5247958"/>
+          <a:ext cx="15773400" cy="1158240"/>
+        </p:xfrm>
+        <a:graphic>
+          <a:graphicData uri="http://schemas.openxmlformats.org/drawingml/2006/table">
+            <a:tbl>
+              <a:tblPr>
+                <a:tableStyleId>{5940675A-B579-460E-94D1-54222C63F5DA}</a:tableStyleId>
+              </a:tblPr>
+              <a:tblGrid>
+                <a:gridCol w="3943350">
+                  <a:extLst>
+                    <a:ext uri="{9D8B030D-6E8A-4147-A177-3AD203B41FA5}">
+                      <a16:colId xmlns:a16="http://schemas.microsoft.com/office/drawing/2014/main" val="4275626049"/>
+                    </a:ext>
+                  </a:extLst>
+                </a:gridCol>
+                <a:gridCol w="3943350">
+                  <a:extLst>
+                    <a:ext uri="{9D8B030D-6E8A-4147-A177-3AD203B41FA5}">
+                      <a16:colId xmlns:a16="http://schemas.microsoft.com/office/drawing/2014/main" val="2811429537"/>
+                    </a:ext>
+                  </a:extLst>
+                </a:gridCol>
+                <a:gridCol w="4248443">
+                  <a:extLst>
+                    <a:ext uri="{9D8B030D-6E8A-4147-A177-3AD203B41FA5}">
+                      <a16:colId xmlns:a16="http://schemas.microsoft.com/office/drawing/2014/main" val="11557222"/>
+                    </a:ext>
+                  </a:extLst>
+                </a:gridCol>
+                <a:gridCol w="3638257">
+                  <a:extLst>
+                    <a:ext uri="{9D8B030D-6E8A-4147-A177-3AD203B41FA5}">
+                      <a16:colId xmlns:a16="http://schemas.microsoft.com/office/drawing/2014/main" val="3407812607"/>
+                    </a:ext>
+                  </a:extLst>
+                </a:gridCol>
+              </a:tblGrid>
+              <a:tr h="0">
+                <a:tc>
+                  <a:txBody>
+                    <a:bodyPr/>
+                    <a:lstStyle/>
+                    <a:p>
+                      <a:pPr algn="ctr"/>
+                      <a:r>
+                        <a:rPr lang="en-IN" sz="3200" b="1" dirty="0">
+                          <a:solidFill>
+                            <a:schemeClr val="tx1"/>
+                          </a:solidFill>
+                        </a:rPr>
+                        <a:t>Escape Sequence</a:t>
+                      </a:r>
+                    </a:p>
+                  </a:txBody>
+                  <a:tcPr anchor="ctr">
+                    <a:lnL w="12700" cap="flat" cmpd="sng" algn="ctr">
+                      <a:solidFill>
+                        <a:schemeClr val="bg1">
+                          <a:lumMod val="50000"/>
+                        </a:schemeClr>
+                      </a:solidFill>
+                      <a:prstDash val="solid"/>
+                      <a:round/>
+                      <a:headEnd type="none" w="med" len="med"/>
+                      <a:tailEnd type="none" w="med" len="med"/>
+                    </a:lnL>
+                    <a:lnR w="12700" cap="flat" cmpd="sng" algn="ctr">
+                      <a:solidFill>
+                        <a:schemeClr val="bg1">
+                          <a:lumMod val="50000"/>
+                        </a:schemeClr>
+                      </a:solidFill>
+                      <a:prstDash val="solid"/>
+                      <a:round/>
+                      <a:headEnd type="none" w="med" len="med"/>
+                      <a:tailEnd type="none" w="med" len="med"/>
+                    </a:lnR>
+                    <a:lnT w="12700" cap="flat" cmpd="sng" algn="ctr">
+                      <a:solidFill>
+                        <a:schemeClr val="bg1">
+                          <a:lumMod val="50000"/>
+                        </a:schemeClr>
+                      </a:solidFill>
+                      <a:prstDash val="solid"/>
+                      <a:round/>
+                      <a:headEnd type="none" w="med" len="med"/>
+                      <a:tailEnd type="none" w="med" len="med"/>
+                    </a:lnT>
+                    <a:lnB w="12700" cap="flat" cmpd="sng" algn="ctr">
+                      <a:solidFill>
+                        <a:schemeClr val="bg1">
+                          <a:lumMod val="50000"/>
+                        </a:schemeClr>
+                      </a:solidFill>
+                      <a:prstDash val="solid"/>
+                      <a:round/>
+                      <a:headEnd type="none" w="med" len="med"/>
+                      <a:tailEnd type="none" w="med" len="med"/>
+                    </a:lnB>
+                    <a:solidFill>
+                      <a:srgbClr val="00FFFF"/>
+                    </a:solidFill>
+                  </a:tcPr>
+                </a:tc>
+                <a:tc>
+                  <a:txBody>
+                    <a:bodyPr/>
+                    <a:lstStyle/>
+                    <a:p>
+                      <a:pPr algn="ctr"/>
+                      <a:r>
+                        <a:rPr lang="en-IN" sz="3200" b="1">
+                          <a:solidFill>
+                            <a:schemeClr val="tx1"/>
+                          </a:solidFill>
+                        </a:rPr>
+                        <a:t>Description</a:t>
+                      </a:r>
+                    </a:p>
+                  </a:txBody>
+                  <a:tcPr anchor="ctr">
+                    <a:lnL w="12700" cap="flat" cmpd="sng" algn="ctr">
+                      <a:solidFill>
+                        <a:schemeClr val="bg1">
+                          <a:lumMod val="50000"/>
+                        </a:schemeClr>
+                      </a:solidFill>
+                      <a:prstDash val="solid"/>
+                      <a:round/>
+                      <a:headEnd type="none" w="med" len="med"/>
+                      <a:tailEnd type="none" w="med" len="med"/>
+                    </a:lnL>
+                    <a:lnR w="12700" cap="flat" cmpd="sng" algn="ctr">
+                      <a:solidFill>
+                        <a:schemeClr val="bg1">
+                          <a:lumMod val="50000"/>
+                        </a:schemeClr>
+                      </a:solidFill>
+                      <a:prstDash val="solid"/>
+                      <a:round/>
+                      <a:headEnd type="none" w="med" len="med"/>
+                      <a:tailEnd type="none" w="med" len="med"/>
+                    </a:lnR>
+                    <a:lnT w="12700" cap="flat" cmpd="sng" algn="ctr">
+                      <a:solidFill>
+                        <a:schemeClr val="bg1">
+                          <a:lumMod val="50000"/>
+                        </a:schemeClr>
+                      </a:solidFill>
+                      <a:prstDash val="solid"/>
+                      <a:round/>
+                      <a:headEnd type="none" w="med" len="med"/>
+                      <a:tailEnd type="none" w="med" len="med"/>
+                    </a:lnT>
+                    <a:lnB w="12700" cap="flat" cmpd="sng" algn="ctr">
+                      <a:solidFill>
+                        <a:schemeClr val="bg1">
+                          <a:lumMod val="50000"/>
+                        </a:schemeClr>
+                      </a:solidFill>
+                      <a:prstDash val="solid"/>
+                      <a:round/>
+                      <a:headEnd type="none" w="med" len="med"/>
+                      <a:tailEnd type="none" w="med" len="med"/>
+                    </a:lnB>
+                    <a:solidFill>
+                      <a:srgbClr val="00FFFF"/>
+                    </a:solidFill>
+                  </a:tcPr>
+                </a:tc>
+                <a:tc>
+                  <a:txBody>
+                    <a:bodyPr/>
+                    <a:lstStyle/>
+                    <a:p>
+                      <a:pPr algn="ctr"/>
+                      <a:r>
+                        <a:rPr lang="en-IN" sz="3200" b="1" dirty="0">
+                          <a:solidFill>
+                            <a:schemeClr val="tx1"/>
+                          </a:solidFill>
+                        </a:rPr>
+                        <a:t>Example</a:t>
+                      </a:r>
+                    </a:p>
+                  </a:txBody>
+                  <a:tcPr anchor="ctr">
+                    <a:lnL w="12700" cap="flat" cmpd="sng" algn="ctr">
+                      <a:solidFill>
+                        <a:schemeClr val="bg1">
+                          <a:lumMod val="50000"/>
+                        </a:schemeClr>
+                      </a:solidFill>
+                      <a:prstDash val="solid"/>
+                      <a:round/>
+                      <a:headEnd type="none" w="med" len="med"/>
+                      <a:tailEnd type="none" w="med" len="med"/>
+                    </a:lnL>
+                    <a:lnR w="12700" cap="flat" cmpd="sng" algn="ctr">
+                      <a:solidFill>
+                        <a:schemeClr val="bg1">
+                          <a:lumMod val="50000"/>
+                        </a:schemeClr>
+                      </a:solidFill>
+                      <a:prstDash val="solid"/>
+                      <a:round/>
+                      <a:headEnd type="none" w="med" len="med"/>
+                      <a:tailEnd type="none" w="med" len="med"/>
+                    </a:lnR>
+                    <a:lnT w="12700" cap="flat" cmpd="sng" algn="ctr">
+                      <a:solidFill>
+                        <a:schemeClr val="bg1">
+                          <a:lumMod val="50000"/>
+                        </a:schemeClr>
+                      </a:solidFill>
+                      <a:prstDash val="solid"/>
+                      <a:round/>
+                      <a:headEnd type="none" w="med" len="med"/>
+                      <a:tailEnd type="none" w="med" len="med"/>
+                    </a:lnT>
+                    <a:lnB w="12700" cap="flat" cmpd="sng" algn="ctr">
+                      <a:solidFill>
+                        <a:schemeClr val="bg1">
+                          <a:lumMod val="50000"/>
+                        </a:schemeClr>
+                      </a:solidFill>
+                      <a:prstDash val="solid"/>
+                      <a:round/>
+                      <a:headEnd type="none" w="med" len="med"/>
+                      <a:tailEnd type="none" w="med" len="med"/>
+                    </a:lnB>
+                    <a:solidFill>
+                      <a:srgbClr val="00FFFF"/>
+                    </a:solidFill>
+                  </a:tcPr>
+                </a:tc>
+                <a:tc>
+                  <a:txBody>
+                    <a:bodyPr/>
+                    <a:lstStyle/>
+                    <a:p>
+                      <a:pPr algn="ctr"/>
+                      <a:r>
+                        <a:rPr lang="en-IN" sz="3200" b="1" dirty="0">
+                          <a:solidFill>
+                            <a:schemeClr val="tx1"/>
+                          </a:solidFill>
+                        </a:rPr>
+                        <a:t>Output</a:t>
+                      </a:r>
+                    </a:p>
+                  </a:txBody>
+                  <a:tcPr anchor="ctr">
+                    <a:lnL w="12700" cap="flat" cmpd="sng" algn="ctr">
+                      <a:solidFill>
+                        <a:schemeClr val="bg1">
+                          <a:lumMod val="50000"/>
+                        </a:schemeClr>
+                      </a:solidFill>
+                      <a:prstDash val="solid"/>
+                      <a:round/>
+                      <a:headEnd type="none" w="med" len="med"/>
+                      <a:tailEnd type="none" w="med" len="med"/>
+                    </a:lnL>
+                    <a:lnR w="12700" cap="flat" cmpd="sng" algn="ctr">
+                      <a:solidFill>
+                        <a:schemeClr val="bg1">
+                          <a:lumMod val="50000"/>
+                        </a:schemeClr>
+                      </a:solidFill>
+                      <a:prstDash val="solid"/>
+                      <a:round/>
+                      <a:headEnd type="none" w="med" len="med"/>
+                      <a:tailEnd type="none" w="med" len="med"/>
+                    </a:lnR>
+                    <a:lnT w="12700" cap="flat" cmpd="sng" algn="ctr">
+                      <a:solidFill>
+                        <a:schemeClr val="bg1">
+                          <a:lumMod val="50000"/>
+                        </a:schemeClr>
+                      </a:solidFill>
+                      <a:prstDash val="solid"/>
+                      <a:round/>
+                      <a:headEnd type="none" w="med" len="med"/>
+                      <a:tailEnd type="none" w="med" len="med"/>
+                    </a:lnT>
+                    <a:lnB w="12700" cap="flat" cmpd="sng" algn="ctr">
+                      <a:solidFill>
+                        <a:schemeClr val="bg1">
+                          <a:lumMod val="50000"/>
+                        </a:schemeClr>
+                      </a:solidFill>
+                      <a:prstDash val="solid"/>
+                      <a:round/>
+                      <a:headEnd type="none" w="med" len="med"/>
+                      <a:tailEnd type="none" w="med" len="med"/>
+                    </a:lnB>
+                    <a:solidFill>
+                      <a:srgbClr val="00FFFF"/>
+                    </a:solidFill>
+                  </a:tcPr>
+                </a:tc>
+                <a:extLst>
+                  <a:ext uri="{0D108BD9-81ED-4DB2-BD59-A6C34878D82A}">
+                    <a16:rowId xmlns:a16="http://schemas.microsoft.com/office/drawing/2014/main" val="13053074"/>
+                  </a:ext>
+                </a:extLst>
+              </a:tr>
+              <a:tr h="0">
+                <a:tc>
+                  <a:txBody>
+                    <a:bodyPr/>
+                    <a:lstStyle/>
+                    <a:p>
+                      <a:r>
+                        <a:rPr lang="en-IN" sz="3200" b="0" dirty="0">
+                          <a:solidFill>
+                            <a:schemeClr val="accent2"/>
+                          </a:solidFill>
+                        </a:rPr>
+                        <a:t>\</a:t>
+                      </a:r>
+                      <a:r>
+                        <a:rPr lang="en-IN" sz="3200" b="0" dirty="0" err="1">
+                          <a:solidFill>
+                            <a:schemeClr val="accent2"/>
+                          </a:solidFill>
+                        </a:rPr>
+                        <a:t>ooo</a:t>
+                      </a:r>
+                      <a:endParaRPr lang="en-IN" sz="3200" b="0" dirty="0"/>
+                    </a:p>
+                  </a:txBody>
+                  <a:tcPr anchor="ctr">
+                    <a:lnL w="12700" cap="flat" cmpd="sng" algn="ctr">
+                      <a:solidFill>
+                        <a:schemeClr val="bg1">
+                          <a:lumMod val="50000"/>
+                        </a:schemeClr>
+                      </a:solidFill>
+                      <a:prstDash val="solid"/>
+                      <a:round/>
+                      <a:headEnd type="none" w="med" len="med"/>
+                      <a:tailEnd type="none" w="med" len="med"/>
+                    </a:lnL>
+                    <a:lnR w="12700" cap="flat" cmpd="sng" algn="ctr">
+                      <a:solidFill>
+                        <a:schemeClr val="bg1">
+                          <a:lumMod val="50000"/>
+                        </a:schemeClr>
+                      </a:solidFill>
+                      <a:prstDash val="solid"/>
+                      <a:round/>
+                      <a:headEnd type="none" w="med" len="med"/>
+                      <a:tailEnd type="none" w="med" len="med"/>
+                    </a:lnR>
+                    <a:lnT w="12700" cap="flat" cmpd="sng" algn="ctr">
+                      <a:solidFill>
+                        <a:schemeClr val="bg1">
+                          <a:lumMod val="50000"/>
+                        </a:schemeClr>
+                      </a:solidFill>
+                      <a:prstDash val="solid"/>
+                      <a:round/>
+                      <a:headEnd type="none" w="med" len="med"/>
+                      <a:tailEnd type="none" w="med" len="med"/>
+                    </a:lnT>
+                    <a:lnB w="12700" cap="flat" cmpd="sng" algn="ctr">
+                      <a:solidFill>
+                        <a:schemeClr val="bg1">
+                          <a:lumMod val="50000"/>
+                        </a:schemeClr>
+                      </a:solidFill>
+                      <a:prstDash val="solid"/>
+                      <a:round/>
+                      <a:headEnd type="none" w="med" len="med"/>
+                      <a:tailEnd type="none" w="med" len="med"/>
+                    </a:lnB>
+                  </a:tcPr>
+                </a:tc>
+                <a:tc>
+                  <a:txBody>
+                    <a:bodyPr/>
+                    <a:lstStyle/>
+                    <a:p>
+                      <a:r>
+                        <a:rPr lang="en-IN" sz="3200" dirty="0"/>
+                        <a:t>Octal representation</a:t>
+                      </a:r>
+                    </a:p>
+                  </a:txBody>
+                  <a:tcPr anchor="ctr">
+                    <a:lnL w="12700" cap="flat" cmpd="sng" algn="ctr">
+                      <a:solidFill>
+                        <a:schemeClr val="bg1">
+                          <a:lumMod val="50000"/>
+                        </a:schemeClr>
+                      </a:solidFill>
+                      <a:prstDash val="solid"/>
+                      <a:round/>
+                      <a:headEnd type="none" w="med" len="med"/>
+                      <a:tailEnd type="none" w="med" len="med"/>
+                    </a:lnL>
+                    <a:lnR w="12700" cap="flat" cmpd="sng" algn="ctr">
+                      <a:solidFill>
+                        <a:schemeClr val="bg1">
+                          <a:lumMod val="50000"/>
+                        </a:schemeClr>
+                      </a:solidFill>
+                      <a:prstDash val="solid"/>
+                      <a:round/>
+                      <a:headEnd type="none" w="med" len="med"/>
+                      <a:tailEnd type="none" w="med" len="med"/>
+                    </a:lnR>
+                    <a:lnT w="12700" cap="flat" cmpd="sng" algn="ctr">
+                      <a:solidFill>
+                        <a:schemeClr val="bg1">
+                          <a:lumMod val="50000"/>
+                        </a:schemeClr>
+                      </a:solidFill>
+                      <a:prstDash val="solid"/>
+                      <a:round/>
+                      <a:headEnd type="none" w="med" len="med"/>
+                      <a:tailEnd type="none" w="med" len="med"/>
+                    </a:lnT>
+                    <a:lnB w="12700" cap="flat" cmpd="sng" algn="ctr">
+                      <a:solidFill>
+                        <a:schemeClr val="bg1">
+                          <a:lumMod val="50000"/>
+                        </a:schemeClr>
+                      </a:solidFill>
+                      <a:prstDash val="solid"/>
+                      <a:round/>
+                      <a:headEnd type="none" w="med" len="med"/>
+                      <a:tailEnd type="none" w="med" len="med"/>
+                    </a:lnB>
+                  </a:tcPr>
+                </a:tc>
+                <a:tc>
+                  <a:txBody>
+                    <a:bodyPr/>
+                    <a:lstStyle/>
+                    <a:p>
+                      <a:r>
+                        <a:rPr lang="en-IN" sz="3200" dirty="0">
+                          <a:solidFill>
+                            <a:schemeClr val="accent5">
+                              <a:lumMod val="75000"/>
+                            </a:schemeClr>
+                          </a:solidFill>
+                        </a:rPr>
+                        <a:t>print</a:t>
+                      </a:r>
+                      <a:r>
+                        <a:rPr lang="en-IN" sz="3200" dirty="0"/>
+                        <a:t>(</a:t>
+                      </a:r>
+                      <a:r>
+                        <a:rPr lang="en-IN" sz="3200" dirty="0">
+                          <a:solidFill>
+                            <a:schemeClr val="accent6">
+                              <a:lumMod val="75000"/>
+                            </a:schemeClr>
+                          </a:solidFill>
+                        </a:rPr>
+                        <a:t>“\101\102\103”</a:t>
+                      </a:r>
+                      <a:r>
+                        <a:rPr lang="en-IN" sz="3200" dirty="0"/>
+                        <a:t>)</a:t>
+                      </a:r>
+                    </a:p>
+                  </a:txBody>
+                  <a:tcPr anchor="ctr">
+                    <a:lnL w="12700" cap="flat" cmpd="sng" algn="ctr">
+                      <a:solidFill>
+                        <a:schemeClr val="bg1">
+                          <a:lumMod val="50000"/>
+                        </a:schemeClr>
+                      </a:solidFill>
+                      <a:prstDash val="solid"/>
+                      <a:round/>
+                      <a:headEnd type="none" w="med" len="med"/>
+                      <a:tailEnd type="none" w="med" len="med"/>
+                    </a:lnL>
+                    <a:lnR w="12700" cap="flat" cmpd="sng" algn="ctr">
+                      <a:solidFill>
+                        <a:schemeClr val="bg1">
+                          <a:lumMod val="50000"/>
+                        </a:schemeClr>
+                      </a:solidFill>
+                      <a:prstDash val="solid"/>
+                      <a:round/>
+                      <a:headEnd type="none" w="med" len="med"/>
+                      <a:tailEnd type="none" w="med" len="med"/>
+                    </a:lnR>
+                    <a:lnT w="12700" cap="flat" cmpd="sng" algn="ctr">
+                      <a:solidFill>
+                        <a:schemeClr val="bg1">
+                          <a:lumMod val="50000"/>
+                        </a:schemeClr>
+                      </a:solidFill>
+                      <a:prstDash val="solid"/>
+                      <a:round/>
+                      <a:headEnd type="none" w="med" len="med"/>
+                      <a:tailEnd type="none" w="med" len="med"/>
+                    </a:lnT>
+                    <a:lnB w="12700" cap="flat" cmpd="sng" algn="ctr">
+                      <a:solidFill>
+                        <a:schemeClr val="bg1">
+                          <a:lumMod val="50000"/>
+                        </a:schemeClr>
+                      </a:solidFill>
+                      <a:prstDash val="solid"/>
+                      <a:round/>
+                      <a:headEnd type="none" w="med" len="med"/>
+                      <a:tailEnd type="none" w="med" len="med"/>
+                    </a:lnB>
+                  </a:tcPr>
+                </a:tc>
+                <a:tc>
+                  <a:txBody>
+                    <a:bodyPr/>
+                    <a:lstStyle/>
+                    <a:p>
+                      <a:r>
+                        <a:rPr lang="en-IN" sz="3200" dirty="0"/>
+                        <a:t>ABC</a:t>
+                      </a:r>
+                    </a:p>
+                  </a:txBody>
+                  <a:tcPr anchor="ctr">
+                    <a:lnL w="12700" cap="flat" cmpd="sng" algn="ctr">
+                      <a:solidFill>
+                        <a:schemeClr val="bg1">
+                          <a:lumMod val="50000"/>
+                        </a:schemeClr>
+                      </a:solidFill>
+                      <a:prstDash val="solid"/>
+                      <a:round/>
+                      <a:headEnd type="none" w="med" len="med"/>
+                      <a:tailEnd type="none" w="med" len="med"/>
+                    </a:lnL>
+                    <a:lnR w="12700" cap="flat" cmpd="sng" algn="ctr">
+                      <a:solidFill>
+                        <a:schemeClr val="bg1">
+                          <a:lumMod val="50000"/>
+                        </a:schemeClr>
+                      </a:solidFill>
+                      <a:prstDash val="solid"/>
+                      <a:round/>
+                      <a:headEnd type="none" w="med" len="med"/>
+                      <a:tailEnd type="none" w="med" len="med"/>
+                    </a:lnR>
+                    <a:lnT w="12700" cap="flat" cmpd="sng" algn="ctr">
+                      <a:solidFill>
+                        <a:schemeClr val="bg1">
+                          <a:lumMod val="50000"/>
+                        </a:schemeClr>
+                      </a:solidFill>
+                      <a:prstDash val="solid"/>
+                      <a:round/>
+                      <a:headEnd type="none" w="med" len="med"/>
+                      <a:tailEnd type="none" w="med" len="med"/>
+                    </a:lnT>
+                    <a:lnB w="12700" cap="flat" cmpd="sng" algn="ctr">
+                      <a:solidFill>
+                        <a:schemeClr val="bg1">
+                          <a:lumMod val="50000"/>
+                        </a:schemeClr>
+                      </a:solidFill>
+                      <a:prstDash val="solid"/>
+                      <a:round/>
+                      <a:headEnd type="none" w="med" len="med"/>
+                      <a:tailEnd type="none" w="med" len="med"/>
+                    </a:lnB>
+                  </a:tcPr>
+                </a:tc>
+                <a:extLst>
+                  <a:ext uri="{0D108BD9-81ED-4DB2-BD59-A6C34878D82A}">
+                    <a16:rowId xmlns:a16="http://schemas.microsoft.com/office/drawing/2014/main" val="3147530512"/>
+                  </a:ext>
+                </a:extLst>
+              </a:tr>
+            </a:tbl>
+          </a:graphicData>
+        </a:graphic>
+      </p:graphicFrame>
+    </p:spTree>
+    <p:extLst>
+      <p:ext uri="{BB962C8B-B14F-4D97-AF65-F5344CB8AC3E}">
+        <p14:creationId xmlns:p14="http://schemas.microsoft.com/office/powerpoint/2010/main" val="424663783"/>
+      </p:ext>
+    </p:extLst>
+  </p:cSld>
+  <p:clrMapOvr>
+    <a:masterClrMapping/>
+  </p:clrMapOvr>
+</p:sld>
+</file>
+
+<file path=ppt/slides/slide14.xml><?xml version="1.0" encoding="utf-8"?>
+<p:sld xmlns:a="http://schemas.openxmlformats.org/drawingml/2006/main" xmlns:r="http://schemas.openxmlformats.org/officeDocument/2006/relationships" xmlns:p="http://schemas.openxmlformats.org/presentationml/2006/main">
+  <p:cSld>
+    <p:spTree>
+      <p:nvGrpSpPr>
+        <p:cNvPr id="1" name="">
+          <a:extLst>
+            <a:ext uri="{FF2B5EF4-FFF2-40B4-BE49-F238E27FC236}">
+              <a16:creationId xmlns:a16="http://schemas.microsoft.com/office/drawing/2014/main" id="{F11AA741-11EF-6E2F-190C-4C6F1352A27C}"/>
+            </a:ext>
+          </a:extLst>
+        </p:cNvPr>
+        <p:cNvGrpSpPr/>
+        <p:nvPr/>
+      </p:nvGrpSpPr>
+      <p:grpSpPr>
+        <a:xfrm>
+          <a:off x="0" y="0"/>
+          <a:ext cx="0" cy="0"/>
+          <a:chOff x="0" y="0"/>
+          <a:chExt cx="0" cy="0"/>
+        </a:xfrm>
+      </p:grpSpPr>
+      <p:sp>
+        <p:nvSpPr>
+          <p:cNvPr id="2" name="Title 1">
+            <a:extLst>
+              <a:ext uri="{FF2B5EF4-FFF2-40B4-BE49-F238E27FC236}">
+                <a16:creationId xmlns:a16="http://schemas.microsoft.com/office/drawing/2014/main" id="{7BC331E7-44B6-BB7D-E084-3D3E4E6B69DC}"/>
+              </a:ext>
+            </a:extLst>
+          </p:cNvPr>
+          <p:cNvSpPr>
+            <a:spLocks noGrp="1"/>
+          </p:cNvSpPr>
+          <p:nvPr>
+            <p:ph type="title"/>
+          </p:nvPr>
+        </p:nvSpPr>
+        <p:spPr/>
+        <p:txBody>
+          <a:bodyPr/>
+          <a:lstStyle/>
+          <a:p>
+            <a:r>
+              <a:rPr lang="en-IN" dirty="0">
+                <a:solidFill>
+                  <a:srgbClr val="0009C4"/>
+                </a:solidFill>
+              </a:rPr>
+              <a:t>print – ASCII character Representations</a:t>
+            </a:r>
+          </a:p>
+        </p:txBody>
+      </p:sp>
+      <p:sp>
+        <p:nvSpPr>
+          <p:cNvPr id="3" name="Content Placeholder 2">
+            <a:extLst>
+              <a:ext uri="{FF2B5EF4-FFF2-40B4-BE49-F238E27FC236}">
+                <a16:creationId xmlns:a16="http://schemas.microsoft.com/office/drawing/2014/main" id="{F3950F6F-D7D9-0F74-985B-A499118F982A}"/>
+              </a:ext>
+            </a:extLst>
+          </p:cNvPr>
+          <p:cNvSpPr>
+            <a:spLocks noGrp="1"/>
+          </p:cNvSpPr>
+          <p:nvPr>
+            <p:ph idx="1"/>
+          </p:nvPr>
+        </p:nvSpPr>
+        <p:spPr/>
+        <p:txBody>
+          <a:bodyPr/>
+          <a:lstStyle/>
+          <a:p>
+            <a:r>
+              <a:rPr lang="en-IN" dirty="0"/>
+              <a:t>Python provides chr() and </a:t>
+            </a:r>
+            <a:r>
+              <a:rPr lang="en-IN" dirty="0" err="1"/>
+              <a:t>ord</a:t>
+            </a:r>
+            <a:r>
+              <a:rPr lang="en-IN" dirty="0"/>
+              <a:t>() functions to work with ASCII characters.</a:t>
+            </a:r>
+          </a:p>
+        </p:txBody>
+      </p:sp>
+      <p:graphicFrame>
+        <p:nvGraphicFramePr>
+          <p:cNvPr id="4" name="Table 3">
+            <a:extLst>
+              <a:ext uri="{FF2B5EF4-FFF2-40B4-BE49-F238E27FC236}">
+                <a16:creationId xmlns:a16="http://schemas.microsoft.com/office/drawing/2014/main" id="{E2AADF2F-008D-1CCD-7509-5681505CE0F5}"/>
+              </a:ext>
+            </a:extLst>
+          </p:cNvPr>
+          <p:cNvGraphicFramePr>
+            <a:graphicFrameLocks noGrp="1"/>
+          </p:cNvGraphicFramePr>
+          <p:nvPr>
+            <p:extLst>
+              <p:ext uri="{D42A27DB-BD31-4B8C-83A1-F6EECF244321}">
+                <p14:modId xmlns:p14="http://schemas.microsoft.com/office/powerpoint/2010/main" val="1603114515"/>
+              </p:ext>
+            </p:extLst>
+          </p:nvPr>
+        </p:nvGraphicFramePr>
+        <p:xfrm>
+          <a:off x="1524586" y="4349787"/>
+          <a:ext cx="15903104" cy="2740328"/>
+        </p:xfrm>
+        <a:graphic>
+          <a:graphicData uri="http://schemas.openxmlformats.org/drawingml/2006/table">
+            <a:tbl>
+              <a:tblPr/>
+              <a:tblGrid>
+                <a:gridCol w="2057472">
+                  <a:extLst>
+                    <a:ext uri="{9D8B030D-6E8A-4147-A177-3AD203B41FA5}">
+                      <a16:colId xmlns:a16="http://schemas.microsoft.com/office/drawing/2014/main" val="3351556667"/>
+                    </a:ext>
+                  </a:extLst>
+                </a:gridCol>
+                <a:gridCol w="6910261">
+                  <a:extLst>
+                    <a:ext uri="{9D8B030D-6E8A-4147-A177-3AD203B41FA5}">
+                      <a16:colId xmlns:a16="http://schemas.microsoft.com/office/drawing/2014/main" val="2885332958"/>
+                    </a:ext>
+                  </a:extLst>
+                </a:gridCol>
+                <a:gridCol w="3995224">
+                  <a:extLst>
+                    <a:ext uri="{9D8B030D-6E8A-4147-A177-3AD203B41FA5}">
+                      <a16:colId xmlns:a16="http://schemas.microsoft.com/office/drawing/2014/main" val="1501591604"/>
+                    </a:ext>
+                  </a:extLst>
+                </a:gridCol>
+                <a:gridCol w="2940147">
+                  <a:extLst>
+                    <a:ext uri="{9D8B030D-6E8A-4147-A177-3AD203B41FA5}">
+                      <a16:colId xmlns:a16="http://schemas.microsoft.com/office/drawing/2014/main" val="1808116249"/>
+                    </a:ext>
+                  </a:extLst>
+                </a:gridCol>
+              </a:tblGrid>
+              <a:tr h="585014">
+                <a:tc>
+                  <a:txBody>
+                    <a:bodyPr/>
+                    <a:lstStyle/>
+                    <a:p>
+                      <a:pPr algn="ctr"/>
+                      <a:r>
+                        <a:rPr lang="en-IN" sz="3200">
+                          <a:solidFill>
+                            <a:schemeClr val="tx1"/>
+                          </a:solidFill>
+                        </a:rPr>
+                        <a:t>Function</a:t>
+                      </a:r>
+                    </a:p>
+                  </a:txBody>
+                  <a:tcPr anchor="ctr">
+                    <a:lnL w="12700" cap="flat" cmpd="sng" algn="ctr">
+                      <a:solidFill>
+                        <a:schemeClr val="bg1">
+                          <a:lumMod val="50000"/>
+                        </a:schemeClr>
+                      </a:solidFill>
+                      <a:prstDash val="solid"/>
+                      <a:round/>
+                      <a:headEnd type="none" w="med" len="med"/>
+                      <a:tailEnd type="none" w="med" len="med"/>
+                    </a:lnL>
+                    <a:lnR w="12700" cap="flat" cmpd="sng" algn="ctr">
+                      <a:solidFill>
+                        <a:schemeClr val="bg1">
+                          <a:lumMod val="50000"/>
+                        </a:schemeClr>
+                      </a:solidFill>
+                      <a:prstDash val="solid"/>
+                      <a:round/>
+                      <a:headEnd type="none" w="med" len="med"/>
+                      <a:tailEnd type="none" w="med" len="med"/>
+                    </a:lnR>
+                    <a:lnT w="12700" cap="flat" cmpd="sng" algn="ctr">
+                      <a:solidFill>
+                        <a:schemeClr val="bg1">
+                          <a:lumMod val="50000"/>
+                        </a:schemeClr>
+                      </a:solidFill>
+                      <a:prstDash val="solid"/>
+                      <a:round/>
+                      <a:headEnd type="none" w="med" len="med"/>
+                      <a:tailEnd type="none" w="med" len="med"/>
+                    </a:lnT>
+                    <a:lnB w="12700" cap="flat" cmpd="sng" algn="ctr">
+                      <a:solidFill>
+                        <a:schemeClr val="bg1">
+                          <a:lumMod val="50000"/>
+                        </a:schemeClr>
+                      </a:solidFill>
+                      <a:prstDash val="solid"/>
+                      <a:round/>
+                      <a:headEnd type="none" w="med" len="med"/>
+                      <a:tailEnd type="none" w="med" len="med"/>
+                    </a:lnB>
+                    <a:solidFill>
+                      <a:srgbClr val="00FFFF"/>
+                    </a:solidFill>
+                  </a:tcPr>
+                </a:tc>
+                <a:tc>
+                  <a:txBody>
+                    <a:bodyPr/>
+                    <a:lstStyle/>
+                    <a:p>
+                      <a:pPr algn="ctr"/>
+                      <a:r>
+                        <a:rPr lang="en-IN" sz="3200" dirty="0">
+                          <a:solidFill>
+                            <a:schemeClr val="tx1"/>
+                          </a:solidFill>
+                        </a:rPr>
+                        <a:t>Description</a:t>
+                      </a:r>
+                    </a:p>
+                  </a:txBody>
+                  <a:tcPr anchor="ctr">
+                    <a:lnL w="12700" cap="flat" cmpd="sng" algn="ctr">
+                      <a:solidFill>
+                        <a:schemeClr val="bg1">
+                          <a:lumMod val="50000"/>
+                        </a:schemeClr>
+                      </a:solidFill>
+                      <a:prstDash val="solid"/>
+                      <a:round/>
+                      <a:headEnd type="none" w="med" len="med"/>
+                      <a:tailEnd type="none" w="med" len="med"/>
+                    </a:lnL>
+                    <a:lnR w="12700" cap="flat" cmpd="sng" algn="ctr">
+                      <a:solidFill>
+                        <a:schemeClr val="bg1">
+                          <a:lumMod val="50000"/>
+                        </a:schemeClr>
+                      </a:solidFill>
+                      <a:prstDash val="solid"/>
+                      <a:round/>
+                      <a:headEnd type="none" w="med" len="med"/>
+                      <a:tailEnd type="none" w="med" len="med"/>
+                    </a:lnR>
+                    <a:lnT w="12700" cap="flat" cmpd="sng" algn="ctr">
+                      <a:solidFill>
+                        <a:schemeClr val="bg1">
+                          <a:lumMod val="50000"/>
+                        </a:schemeClr>
+                      </a:solidFill>
+                      <a:prstDash val="solid"/>
+                      <a:round/>
+                      <a:headEnd type="none" w="med" len="med"/>
+                      <a:tailEnd type="none" w="med" len="med"/>
+                    </a:lnT>
+                    <a:lnB w="12700" cap="flat" cmpd="sng" algn="ctr">
+                      <a:solidFill>
+                        <a:schemeClr val="bg1">
+                          <a:lumMod val="50000"/>
+                        </a:schemeClr>
+                      </a:solidFill>
+                      <a:prstDash val="solid"/>
+                      <a:round/>
+                      <a:headEnd type="none" w="med" len="med"/>
+                      <a:tailEnd type="none" w="med" len="med"/>
+                    </a:lnB>
+                    <a:solidFill>
+                      <a:srgbClr val="00FFFF"/>
+                    </a:solidFill>
+                  </a:tcPr>
+                </a:tc>
+                <a:tc>
+                  <a:txBody>
+                    <a:bodyPr/>
+                    <a:lstStyle/>
+                    <a:p>
+                      <a:pPr algn="ctr"/>
+                      <a:r>
+                        <a:rPr lang="en-IN" sz="3200" dirty="0">
+                          <a:solidFill>
+                            <a:schemeClr val="tx1"/>
+                          </a:solidFill>
+                        </a:rPr>
+                        <a:t>Example</a:t>
+                      </a:r>
+                    </a:p>
+                  </a:txBody>
+                  <a:tcPr anchor="ctr">
+                    <a:lnL w="12700" cap="flat" cmpd="sng" algn="ctr">
+                      <a:solidFill>
+                        <a:schemeClr val="bg1">
+                          <a:lumMod val="50000"/>
+                        </a:schemeClr>
+                      </a:solidFill>
+                      <a:prstDash val="solid"/>
+                      <a:round/>
+                      <a:headEnd type="none" w="med" len="med"/>
+                      <a:tailEnd type="none" w="med" len="med"/>
+                    </a:lnL>
+                    <a:lnR w="12700" cap="flat" cmpd="sng" algn="ctr">
+                      <a:solidFill>
+                        <a:schemeClr val="bg1">
+                          <a:lumMod val="50000"/>
+                        </a:schemeClr>
+                      </a:solidFill>
+                      <a:prstDash val="solid"/>
+                      <a:round/>
+                      <a:headEnd type="none" w="med" len="med"/>
+                      <a:tailEnd type="none" w="med" len="med"/>
+                    </a:lnR>
+                    <a:lnT w="12700" cap="flat" cmpd="sng" algn="ctr">
+                      <a:solidFill>
+                        <a:schemeClr val="bg1">
+                          <a:lumMod val="50000"/>
+                        </a:schemeClr>
+                      </a:solidFill>
+                      <a:prstDash val="solid"/>
+                      <a:round/>
+                      <a:headEnd type="none" w="med" len="med"/>
+                      <a:tailEnd type="none" w="med" len="med"/>
+                    </a:lnT>
+                    <a:lnB w="12700" cap="flat" cmpd="sng" algn="ctr">
+                      <a:solidFill>
+                        <a:schemeClr val="bg1">
+                          <a:lumMod val="50000"/>
+                        </a:schemeClr>
+                      </a:solidFill>
+                      <a:prstDash val="solid"/>
+                      <a:round/>
+                      <a:headEnd type="none" w="med" len="med"/>
+                      <a:tailEnd type="none" w="med" len="med"/>
+                    </a:lnB>
+                    <a:solidFill>
+                      <a:srgbClr val="00FFFF"/>
+                    </a:solidFill>
+                  </a:tcPr>
+                </a:tc>
+                <a:tc>
+                  <a:txBody>
+                    <a:bodyPr/>
+                    <a:lstStyle/>
+                    <a:p>
+                      <a:pPr algn="ctr"/>
+                      <a:r>
+                        <a:rPr lang="en-IN" sz="3200" dirty="0">
+                          <a:solidFill>
+                            <a:schemeClr val="tx1"/>
+                          </a:solidFill>
+                        </a:rPr>
+                        <a:t>Output</a:t>
+                      </a:r>
+                    </a:p>
+                  </a:txBody>
+                  <a:tcPr anchor="ctr">
+                    <a:lnL w="12700" cap="flat" cmpd="sng" algn="ctr">
+                      <a:solidFill>
+                        <a:schemeClr val="bg1">
+                          <a:lumMod val="50000"/>
+                        </a:schemeClr>
+                      </a:solidFill>
+                      <a:prstDash val="solid"/>
+                      <a:round/>
+                      <a:headEnd type="none" w="med" len="med"/>
+                      <a:tailEnd type="none" w="med" len="med"/>
+                    </a:lnL>
+                    <a:lnR w="12700" cap="flat" cmpd="sng" algn="ctr">
+                      <a:solidFill>
+                        <a:schemeClr val="bg1">
+                          <a:lumMod val="50000"/>
+                        </a:schemeClr>
+                      </a:solidFill>
+                      <a:prstDash val="solid"/>
+                      <a:round/>
+                      <a:headEnd type="none" w="med" len="med"/>
+                      <a:tailEnd type="none" w="med" len="med"/>
+                    </a:lnR>
+                    <a:lnT w="12700" cap="flat" cmpd="sng" algn="ctr">
+                      <a:solidFill>
+                        <a:schemeClr val="bg1">
+                          <a:lumMod val="50000"/>
+                        </a:schemeClr>
+                      </a:solidFill>
+                      <a:prstDash val="solid"/>
+                      <a:round/>
+                      <a:headEnd type="none" w="med" len="med"/>
+                      <a:tailEnd type="none" w="med" len="med"/>
+                    </a:lnT>
+                    <a:lnB w="12700" cap="flat" cmpd="sng" algn="ctr">
+                      <a:solidFill>
+                        <a:schemeClr val="bg1">
+                          <a:lumMod val="50000"/>
+                        </a:schemeClr>
+                      </a:solidFill>
+                      <a:prstDash val="solid"/>
+                      <a:round/>
+                      <a:headEnd type="none" w="med" len="med"/>
+                      <a:tailEnd type="none" w="med" len="med"/>
+                    </a:lnB>
+                    <a:solidFill>
+                      <a:srgbClr val="00FFFF"/>
+                    </a:solidFill>
+                  </a:tcPr>
+                </a:tc>
+                <a:extLst>
+                  <a:ext uri="{0D108BD9-81ED-4DB2-BD59-A6C34878D82A}">
+                    <a16:rowId xmlns:a16="http://schemas.microsoft.com/office/drawing/2014/main" val="3352369099"/>
+                  </a:ext>
+                </a:extLst>
+              </a:tr>
+              <a:tr h="1077657">
+                <a:tc>
+                  <a:txBody>
+                    <a:bodyPr/>
+                    <a:lstStyle/>
+                    <a:p>
+                      <a:r>
+                        <a:rPr lang="en-IN" sz="3200" dirty="0">
+                          <a:solidFill>
+                            <a:schemeClr val="accent2"/>
+                          </a:solidFill>
+                        </a:rPr>
+                        <a:t>chr</a:t>
+                      </a:r>
+                      <a:r>
+                        <a:rPr lang="en-IN" sz="3200" dirty="0"/>
+                        <a:t>(n)</a:t>
+                      </a:r>
+                    </a:p>
+                  </a:txBody>
+                  <a:tcPr anchor="ctr">
+                    <a:lnL w="12700" cap="flat" cmpd="sng" algn="ctr">
+                      <a:solidFill>
+                        <a:schemeClr val="bg1">
+                          <a:lumMod val="50000"/>
+                        </a:schemeClr>
+                      </a:solidFill>
+                      <a:prstDash val="solid"/>
+                      <a:round/>
+                      <a:headEnd type="none" w="med" len="med"/>
+                      <a:tailEnd type="none" w="med" len="med"/>
+                    </a:lnL>
+                    <a:lnR w="12700" cap="flat" cmpd="sng" algn="ctr">
+                      <a:solidFill>
+                        <a:schemeClr val="bg1">
+                          <a:lumMod val="50000"/>
+                        </a:schemeClr>
+                      </a:solidFill>
+                      <a:prstDash val="solid"/>
+                      <a:round/>
+                      <a:headEnd type="none" w="med" len="med"/>
+                      <a:tailEnd type="none" w="med" len="med"/>
+                    </a:lnR>
+                    <a:lnT w="12700" cap="flat" cmpd="sng" algn="ctr">
+                      <a:solidFill>
+                        <a:schemeClr val="bg1">
+                          <a:lumMod val="50000"/>
+                        </a:schemeClr>
+                      </a:solidFill>
+                      <a:prstDash val="solid"/>
+                      <a:round/>
+                      <a:headEnd type="none" w="med" len="med"/>
+                      <a:tailEnd type="none" w="med" len="med"/>
+                    </a:lnT>
+                    <a:lnB w="12700" cap="flat" cmpd="sng" algn="ctr">
+                      <a:solidFill>
+                        <a:schemeClr val="bg1">
+                          <a:lumMod val="50000"/>
+                        </a:schemeClr>
+                      </a:solidFill>
+                      <a:prstDash val="solid"/>
+                      <a:round/>
+                      <a:headEnd type="none" w="med" len="med"/>
+                      <a:tailEnd type="none" w="med" len="med"/>
+                    </a:lnB>
+                    <a:noFill/>
+                  </a:tcPr>
+                </a:tc>
+                <a:tc>
+                  <a:txBody>
+                    <a:bodyPr/>
+                    <a:lstStyle/>
+                    <a:p>
+                      <a:r>
+                        <a:rPr lang="en-US" sz="3200"/>
+                        <a:t>Get character from ASCII/Unicode</a:t>
+                      </a:r>
+                    </a:p>
+                  </a:txBody>
+                  <a:tcPr anchor="ctr">
+                    <a:lnL w="12700" cap="flat" cmpd="sng" algn="ctr">
+                      <a:solidFill>
+                        <a:schemeClr val="bg1">
+                          <a:lumMod val="50000"/>
+                        </a:schemeClr>
+                      </a:solidFill>
+                      <a:prstDash val="solid"/>
+                      <a:round/>
+                      <a:headEnd type="none" w="med" len="med"/>
+                      <a:tailEnd type="none" w="med" len="med"/>
+                    </a:lnL>
+                    <a:lnR w="12700" cap="flat" cmpd="sng" algn="ctr">
+                      <a:solidFill>
+                        <a:schemeClr val="bg1">
+                          <a:lumMod val="50000"/>
+                        </a:schemeClr>
+                      </a:solidFill>
+                      <a:prstDash val="solid"/>
+                      <a:round/>
+                      <a:headEnd type="none" w="med" len="med"/>
+                      <a:tailEnd type="none" w="med" len="med"/>
+                    </a:lnR>
+                    <a:lnT w="12700" cap="flat" cmpd="sng" algn="ctr">
+                      <a:solidFill>
+                        <a:schemeClr val="bg1">
+                          <a:lumMod val="50000"/>
+                        </a:schemeClr>
+                      </a:solidFill>
+                      <a:prstDash val="solid"/>
+                      <a:round/>
+                      <a:headEnd type="none" w="med" len="med"/>
+                      <a:tailEnd type="none" w="med" len="med"/>
+                    </a:lnT>
+                    <a:lnB w="12700" cap="flat" cmpd="sng" algn="ctr">
+                      <a:solidFill>
+                        <a:schemeClr val="bg1">
+                          <a:lumMod val="50000"/>
+                        </a:schemeClr>
+                      </a:solidFill>
+                      <a:prstDash val="solid"/>
+                      <a:round/>
+                      <a:headEnd type="none" w="med" len="med"/>
+                      <a:tailEnd type="none" w="med" len="med"/>
+                    </a:lnB>
+                    <a:noFill/>
+                  </a:tcPr>
+                </a:tc>
+                <a:tc>
+                  <a:txBody>
+                    <a:bodyPr/>
+                    <a:lstStyle/>
+                    <a:p>
+                      <a:r>
+                        <a:rPr lang="en-IN" sz="3200" dirty="0">
+                          <a:solidFill>
+                            <a:srgbClr val="0009C4"/>
+                          </a:solidFill>
+                        </a:rPr>
+                        <a:t>print</a:t>
+                      </a:r>
+                      <a:r>
+                        <a:rPr lang="en-IN" sz="3200" dirty="0"/>
+                        <a:t>(</a:t>
+                      </a:r>
+                      <a:r>
+                        <a:rPr lang="en-IN" sz="3200" dirty="0">
+                          <a:solidFill>
+                            <a:schemeClr val="accent2"/>
+                          </a:solidFill>
+                        </a:rPr>
+                        <a:t>chr</a:t>
+                      </a:r>
+                      <a:r>
+                        <a:rPr lang="en-IN" sz="3200" dirty="0"/>
+                        <a:t>(</a:t>
+                      </a:r>
+                      <a:r>
+                        <a:rPr lang="en-IN" sz="3200" dirty="0">
+                          <a:solidFill>
+                            <a:schemeClr val="accent6">
+                              <a:lumMod val="75000"/>
+                            </a:schemeClr>
+                          </a:solidFill>
+                        </a:rPr>
+                        <a:t>65</a:t>
+                      </a:r>
+                      <a:r>
+                        <a:rPr lang="en-IN" sz="3200" dirty="0"/>
+                        <a:t>))</a:t>
+                      </a:r>
+                    </a:p>
+                  </a:txBody>
+                  <a:tcPr anchor="ctr">
+                    <a:lnL w="12700" cap="flat" cmpd="sng" algn="ctr">
+                      <a:solidFill>
+                        <a:schemeClr val="bg1">
+                          <a:lumMod val="50000"/>
+                        </a:schemeClr>
+                      </a:solidFill>
+                      <a:prstDash val="solid"/>
+                      <a:round/>
+                      <a:headEnd type="none" w="med" len="med"/>
+                      <a:tailEnd type="none" w="med" len="med"/>
+                    </a:lnL>
+                    <a:lnR w="12700" cap="flat" cmpd="sng" algn="ctr">
+                      <a:solidFill>
+                        <a:schemeClr val="bg1">
+                          <a:lumMod val="50000"/>
+                        </a:schemeClr>
+                      </a:solidFill>
+                      <a:prstDash val="solid"/>
+                      <a:round/>
+                      <a:headEnd type="none" w="med" len="med"/>
+                      <a:tailEnd type="none" w="med" len="med"/>
+                    </a:lnR>
+                    <a:lnT w="12700" cap="flat" cmpd="sng" algn="ctr">
+                      <a:solidFill>
+                        <a:schemeClr val="bg1">
+                          <a:lumMod val="50000"/>
+                        </a:schemeClr>
+                      </a:solidFill>
+                      <a:prstDash val="solid"/>
+                      <a:round/>
+                      <a:headEnd type="none" w="med" len="med"/>
+                      <a:tailEnd type="none" w="med" len="med"/>
+                    </a:lnT>
+                    <a:lnB w="12700" cap="flat" cmpd="sng" algn="ctr">
+                      <a:solidFill>
+                        <a:schemeClr val="bg1">
+                          <a:lumMod val="50000"/>
+                        </a:schemeClr>
+                      </a:solidFill>
+                      <a:prstDash val="solid"/>
+                      <a:round/>
+                      <a:headEnd type="none" w="med" len="med"/>
+                      <a:tailEnd type="none" w="med" len="med"/>
+                    </a:lnB>
+                    <a:noFill/>
+                  </a:tcPr>
+                </a:tc>
+                <a:tc>
+                  <a:txBody>
+                    <a:bodyPr/>
+                    <a:lstStyle/>
+                    <a:p>
+                      <a:r>
+                        <a:rPr lang="en-IN" sz="3200" dirty="0"/>
+                        <a:t>A</a:t>
+                      </a:r>
+                    </a:p>
+                  </a:txBody>
+                  <a:tcPr anchor="ctr">
+                    <a:lnL w="12700" cap="flat" cmpd="sng" algn="ctr">
+                      <a:solidFill>
+                        <a:schemeClr val="bg1">
+                          <a:lumMod val="50000"/>
+                        </a:schemeClr>
+                      </a:solidFill>
+                      <a:prstDash val="solid"/>
+                      <a:round/>
+                      <a:headEnd type="none" w="med" len="med"/>
+                      <a:tailEnd type="none" w="med" len="med"/>
+                    </a:lnL>
+                    <a:lnR w="12700" cap="flat" cmpd="sng" algn="ctr">
+                      <a:solidFill>
+                        <a:schemeClr val="bg1">
+                          <a:lumMod val="50000"/>
+                        </a:schemeClr>
+                      </a:solidFill>
+                      <a:prstDash val="solid"/>
+                      <a:round/>
+                      <a:headEnd type="none" w="med" len="med"/>
+                      <a:tailEnd type="none" w="med" len="med"/>
+                    </a:lnR>
+                    <a:lnT w="12700" cap="flat" cmpd="sng" algn="ctr">
+                      <a:solidFill>
+                        <a:schemeClr val="bg1">
+                          <a:lumMod val="50000"/>
+                        </a:schemeClr>
+                      </a:solidFill>
+                      <a:prstDash val="solid"/>
+                      <a:round/>
+                      <a:headEnd type="none" w="med" len="med"/>
+                      <a:tailEnd type="none" w="med" len="med"/>
+                    </a:lnT>
+                    <a:lnB w="12700" cap="flat" cmpd="sng" algn="ctr">
+                      <a:solidFill>
+                        <a:schemeClr val="bg1">
+                          <a:lumMod val="50000"/>
+                        </a:schemeClr>
+                      </a:solidFill>
+                      <a:prstDash val="solid"/>
+                      <a:round/>
+                      <a:headEnd type="none" w="med" len="med"/>
+                      <a:tailEnd type="none" w="med" len="med"/>
+                    </a:lnB>
+                    <a:noFill/>
+                  </a:tcPr>
+                </a:tc>
+                <a:extLst>
+                  <a:ext uri="{0D108BD9-81ED-4DB2-BD59-A6C34878D82A}">
+                    <a16:rowId xmlns:a16="http://schemas.microsoft.com/office/drawing/2014/main" val="590543719"/>
+                  </a:ext>
+                </a:extLst>
+              </a:tr>
+              <a:tr h="1077657">
+                <a:tc>
+                  <a:txBody>
+                    <a:bodyPr/>
+                    <a:lstStyle/>
+                    <a:p>
+                      <a:r>
+                        <a:rPr lang="en-IN" sz="3200" dirty="0" err="1">
+                          <a:solidFill>
+                            <a:schemeClr val="accent2"/>
+                          </a:solidFill>
+                        </a:rPr>
+                        <a:t>ord</a:t>
+                      </a:r>
+                      <a:r>
+                        <a:rPr lang="en-IN" sz="3200" dirty="0"/>
+                        <a:t>(c)</a:t>
+                      </a:r>
+                    </a:p>
+                  </a:txBody>
+                  <a:tcPr anchor="ctr">
+                    <a:lnL w="12700" cap="flat" cmpd="sng" algn="ctr">
+                      <a:solidFill>
+                        <a:schemeClr val="bg1">
+                          <a:lumMod val="50000"/>
+                        </a:schemeClr>
+                      </a:solidFill>
+                      <a:prstDash val="solid"/>
+                      <a:round/>
+                      <a:headEnd type="none" w="med" len="med"/>
+                      <a:tailEnd type="none" w="med" len="med"/>
+                    </a:lnL>
+                    <a:lnR w="12700" cap="flat" cmpd="sng" algn="ctr">
+                      <a:solidFill>
+                        <a:schemeClr val="bg1">
+                          <a:lumMod val="50000"/>
+                        </a:schemeClr>
+                      </a:solidFill>
+                      <a:prstDash val="solid"/>
+                      <a:round/>
+                      <a:headEnd type="none" w="med" len="med"/>
+                      <a:tailEnd type="none" w="med" len="med"/>
+                    </a:lnR>
+                    <a:lnT w="12700" cap="flat" cmpd="sng" algn="ctr">
+                      <a:solidFill>
+                        <a:schemeClr val="bg1">
+                          <a:lumMod val="50000"/>
+                        </a:schemeClr>
+                      </a:solidFill>
+                      <a:prstDash val="solid"/>
+                      <a:round/>
+                      <a:headEnd type="none" w="med" len="med"/>
+                      <a:tailEnd type="none" w="med" len="med"/>
+                    </a:lnT>
+                    <a:lnB w="12700" cap="flat" cmpd="sng" algn="ctr">
+                      <a:solidFill>
+                        <a:schemeClr val="bg1">
+                          <a:lumMod val="50000"/>
+                        </a:schemeClr>
+                      </a:solidFill>
+                      <a:prstDash val="solid"/>
+                      <a:round/>
+                      <a:headEnd type="none" w="med" len="med"/>
+                      <a:tailEnd type="none" w="med" len="med"/>
+                    </a:lnB>
+                    <a:noFill/>
+                  </a:tcPr>
+                </a:tc>
+                <a:tc>
+                  <a:txBody>
+                    <a:bodyPr/>
+                    <a:lstStyle/>
+                    <a:p>
+                      <a:r>
+                        <a:rPr lang="en-US" sz="3200"/>
+                        <a:t>Get ASCII/Unicode value of character</a:t>
+                      </a:r>
+                    </a:p>
+                  </a:txBody>
+                  <a:tcPr anchor="ctr">
+                    <a:lnL w="12700" cap="flat" cmpd="sng" algn="ctr">
+                      <a:solidFill>
+                        <a:schemeClr val="bg1">
+                          <a:lumMod val="50000"/>
+                        </a:schemeClr>
+                      </a:solidFill>
+                      <a:prstDash val="solid"/>
+                      <a:round/>
+                      <a:headEnd type="none" w="med" len="med"/>
+                      <a:tailEnd type="none" w="med" len="med"/>
+                    </a:lnL>
+                    <a:lnR w="12700" cap="flat" cmpd="sng" algn="ctr">
+                      <a:solidFill>
+                        <a:schemeClr val="bg1">
+                          <a:lumMod val="50000"/>
+                        </a:schemeClr>
+                      </a:solidFill>
+                      <a:prstDash val="solid"/>
+                      <a:round/>
+                      <a:headEnd type="none" w="med" len="med"/>
+                      <a:tailEnd type="none" w="med" len="med"/>
+                    </a:lnR>
+                    <a:lnT w="12700" cap="flat" cmpd="sng" algn="ctr">
+                      <a:solidFill>
+                        <a:schemeClr val="bg1">
+                          <a:lumMod val="50000"/>
+                        </a:schemeClr>
+                      </a:solidFill>
+                      <a:prstDash val="solid"/>
+                      <a:round/>
+                      <a:headEnd type="none" w="med" len="med"/>
+                      <a:tailEnd type="none" w="med" len="med"/>
+                    </a:lnT>
+                    <a:lnB w="12700" cap="flat" cmpd="sng" algn="ctr">
+                      <a:solidFill>
+                        <a:schemeClr val="bg1">
+                          <a:lumMod val="50000"/>
+                        </a:schemeClr>
+                      </a:solidFill>
+                      <a:prstDash val="solid"/>
+                      <a:round/>
+                      <a:headEnd type="none" w="med" len="med"/>
+                      <a:tailEnd type="none" w="med" len="med"/>
+                    </a:lnB>
+                    <a:noFill/>
+                  </a:tcPr>
+                </a:tc>
+                <a:tc>
+                  <a:txBody>
+                    <a:bodyPr/>
+                    <a:lstStyle/>
+                    <a:p>
+                      <a:r>
+                        <a:rPr lang="en-IN" sz="3200" dirty="0">
+                          <a:solidFill>
+                            <a:srgbClr val="0009C4"/>
+                          </a:solidFill>
+                        </a:rPr>
+                        <a:t>print</a:t>
+                      </a:r>
+                      <a:r>
+                        <a:rPr lang="en-IN" sz="3200" dirty="0"/>
+                        <a:t>(</a:t>
+                      </a:r>
+                      <a:r>
+                        <a:rPr lang="en-IN" sz="3200" dirty="0" err="1">
+                          <a:solidFill>
+                            <a:schemeClr val="accent2"/>
+                          </a:solidFill>
+                        </a:rPr>
+                        <a:t>ord</a:t>
+                      </a:r>
+                      <a:r>
+                        <a:rPr lang="en-IN" sz="3200" dirty="0"/>
+                        <a:t>(</a:t>
+                      </a:r>
+                      <a:r>
+                        <a:rPr lang="en-IN" sz="3200" dirty="0">
+                          <a:solidFill>
+                            <a:schemeClr val="accent6">
+                              <a:lumMod val="75000"/>
+                            </a:schemeClr>
+                          </a:solidFill>
+                        </a:rPr>
+                        <a:t>'A'</a:t>
+                      </a:r>
+                      <a:r>
+                        <a:rPr lang="en-IN" sz="3200" dirty="0"/>
+                        <a:t>))</a:t>
+                      </a:r>
+                    </a:p>
+                  </a:txBody>
+                  <a:tcPr anchor="ctr">
+                    <a:lnL w="12700" cap="flat" cmpd="sng" algn="ctr">
+                      <a:solidFill>
+                        <a:schemeClr val="bg1">
+                          <a:lumMod val="50000"/>
+                        </a:schemeClr>
+                      </a:solidFill>
+                      <a:prstDash val="solid"/>
+                      <a:round/>
+                      <a:headEnd type="none" w="med" len="med"/>
+                      <a:tailEnd type="none" w="med" len="med"/>
+                    </a:lnL>
+                    <a:lnR w="12700" cap="flat" cmpd="sng" algn="ctr">
+                      <a:solidFill>
+                        <a:schemeClr val="bg1">
+                          <a:lumMod val="50000"/>
+                        </a:schemeClr>
+                      </a:solidFill>
+                      <a:prstDash val="solid"/>
+                      <a:round/>
+                      <a:headEnd type="none" w="med" len="med"/>
+                      <a:tailEnd type="none" w="med" len="med"/>
+                    </a:lnR>
+                    <a:lnT w="12700" cap="flat" cmpd="sng" algn="ctr">
+                      <a:solidFill>
+                        <a:schemeClr val="bg1">
+                          <a:lumMod val="50000"/>
+                        </a:schemeClr>
+                      </a:solidFill>
+                      <a:prstDash val="solid"/>
+                      <a:round/>
+                      <a:headEnd type="none" w="med" len="med"/>
+                      <a:tailEnd type="none" w="med" len="med"/>
+                    </a:lnT>
+                    <a:lnB w="12700" cap="flat" cmpd="sng" algn="ctr">
+                      <a:solidFill>
+                        <a:schemeClr val="bg1">
+                          <a:lumMod val="50000"/>
+                        </a:schemeClr>
+                      </a:solidFill>
+                      <a:prstDash val="solid"/>
+                      <a:round/>
+                      <a:headEnd type="none" w="med" len="med"/>
+                      <a:tailEnd type="none" w="med" len="med"/>
+                    </a:lnB>
+                    <a:noFill/>
+                  </a:tcPr>
+                </a:tc>
+                <a:tc>
+                  <a:txBody>
+                    <a:bodyPr/>
+                    <a:lstStyle/>
+                    <a:p>
+                      <a:r>
+                        <a:rPr lang="en-IN" sz="3200" dirty="0"/>
+                        <a:t>65</a:t>
+                      </a:r>
+                    </a:p>
+                  </a:txBody>
+                  <a:tcPr anchor="ctr">
+                    <a:lnL w="12700" cap="flat" cmpd="sng" algn="ctr">
+                      <a:solidFill>
+                        <a:schemeClr val="bg1">
+                          <a:lumMod val="50000"/>
+                        </a:schemeClr>
+                      </a:solidFill>
+                      <a:prstDash val="solid"/>
+                      <a:round/>
+                      <a:headEnd type="none" w="med" len="med"/>
+                      <a:tailEnd type="none" w="med" len="med"/>
+                    </a:lnL>
+                    <a:lnR w="12700" cap="flat" cmpd="sng" algn="ctr">
+                      <a:solidFill>
+                        <a:schemeClr val="bg1">
+                          <a:lumMod val="50000"/>
+                        </a:schemeClr>
+                      </a:solidFill>
+                      <a:prstDash val="solid"/>
+                      <a:round/>
+                      <a:headEnd type="none" w="med" len="med"/>
+                      <a:tailEnd type="none" w="med" len="med"/>
+                    </a:lnR>
+                    <a:lnT w="12700" cap="flat" cmpd="sng" algn="ctr">
+                      <a:solidFill>
+                        <a:schemeClr val="bg1">
+                          <a:lumMod val="50000"/>
+                        </a:schemeClr>
+                      </a:solidFill>
+                      <a:prstDash val="solid"/>
+                      <a:round/>
+                      <a:headEnd type="none" w="med" len="med"/>
+                      <a:tailEnd type="none" w="med" len="med"/>
+                    </a:lnT>
+                    <a:lnB w="12700" cap="flat" cmpd="sng" algn="ctr">
+                      <a:solidFill>
+                        <a:schemeClr val="bg1">
+                          <a:lumMod val="50000"/>
+                        </a:schemeClr>
+                      </a:solidFill>
+                      <a:prstDash val="solid"/>
+                      <a:round/>
+                      <a:headEnd type="none" w="med" len="med"/>
+                      <a:tailEnd type="none" w="med" len="med"/>
+                    </a:lnB>
+                    <a:noFill/>
+                  </a:tcPr>
+                </a:tc>
+                <a:extLst>
+                  <a:ext uri="{0D108BD9-81ED-4DB2-BD59-A6C34878D82A}">
+                    <a16:rowId xmlns:a16="http://schemas.microsoft.com/office/drawing/2014/main" val="158320334"/>
+                  </a:ext>
+                </a:extLst>
+              </a:tr>
+            </a:tbl>
+          </a:graphicData>
+        </a:graphic>
+      </p:graphicFrame>
+    </p:spTree>
+    <p:extLst>
+      <p:ext uri="{BB962C8B-B14F-4D97-AF65-F5344CB8AC3E}">
+        <p14:creationId xmlns:p14="http://schemas.microsoft.com/office/powerpoint/2010/main" val="284440981"/>
+      </p:ext>
+    </p:extLst>
+  </p:cSld>
+  <p:clrMapOvr>
+    <a:masterClrMapping/>
+  </p:clrMapOvr>
+</p:sld>
+</file>
+
+<file path=ppt/slides/slide15.xml><?xml version="1.0" encoding="utf-8"?>
+<p:sld xmlns:a="http://schemas.openxmlformats.org/drawingml/2006/main" xmlns:r="http://schemas.openxmlformats.org/officeDocument/2006/relationships" xmlns:p="http://schemas.openxmlformats.org/presentationml/2006/main">
+  <p:cSld>
+    <p:spTree>
+      <p:nvGrpSpPr>
+        <p:cNvPr id="1" name="">
+          <a:extLst>
+            <a:ext uri="{FF2B5EF4-FFF2-40B4-BE49-F238E27FC236}">
+              <a16:creationId xmlns:a16="http://schemas.microsoft.com/office/drawing/2014/main" id="{E25FC829-066D-1288-9B02-EBFDD68B5F05}"/>
+            </a:ext>
+          </a:extLst>
+        </p:cNvPr>
+        <p:cNvGrpSpPr/>
+        <p:nvPr/>
+      </p:nvGrpSpPr>
+      <p:grpSpPr>
+        <a:xfrm>
+          <a:off x="0" y="0"/>
+          <a:ext cx="0" cy="0"/>
+          <a:chOff x="0" y="0"/>
+          <a:chExt cx="0" cy="0"/>
+        </a:xfrm>
+      </p:grpSpPr>
+      <p:sp>
+        <p:nvSpPr>
+          <p:cNvPr id="2" name="Title 1">
+            <a:extLst>
+              <a:ext uri="{FF2B5EF4-FFF2-40B4-BE49-F238E27FC236}">
+                <a16:creationId xmlns:a16="http://schemas.microsoft.com/office/drawing/2014/main" id="{0130D2C4-0E5E-EF31-A325-0B192E771136}"/>
+              </a:ext>
+            </a:extLst>
+          </p:cNvPr>
+          <p:cNvSpPr>
+            <a:spLocks noGrp="1"/>
+          </p:cNvSpPr>
+          <p:nvPr>
+            <p:ph type="title"/>
+          </p:nvPr>
+        </p:nvSpPr>
+        <p:spPr/>
+        <p:txBody>
+          <a:bodyPr/>
+          <a:lstStyle/>
+          <a:p>
+            <a:r>
+              <a:rPr lang="en-IN" dirty="0">
+                <a:solidFill>
+                  <a:srgbClr val="0009C4"/>
+                </a:solidFill>
+              </a:rPr>
+              <a:t>print – Raw String (r””)</a:t>
+            </a:r>
+          </a:p>
+        </p:txBody>
+      </p:sp>
+      <p:sp>
+        <p:nvSpPr>
+          <p:cNvPr id="3" name="Content Placeholder 2">
+            <a:extLst>
+              <a:ext uri="{FF2B5EF4-FFF2-40B4-BE49-F238E27FC236}">
+                <a16:creationId xmlns:a16="http://schemas.microsoft.com/office/drawing/2014/main" id="{4B4BED21-A197-5937-02E4-4B477487FFAA}"/>
+              </a:ext>
+            </a:extLst>
+          </p:cNvPr>
+          <p:cNvSpPr>
+            <a:spLocks noGrp="1"/>
+          </p:cNvSpPr>
+          <p:nvPr>
+            <p:ph idx="1"/>
+          </p:nvPr>
+        </p:nvSpPr>
+        <p:spPr/>
+        <p:txBody>
+          <a:bodyPr/>
+          <a:lstStyle/>
+          <a:p>
+            <a:r>
+              <a:rPr lang="en-IN" dirty="0"/>
+              <a:t>Raw strings ignore escape sequences and print them as normal text.</a:t>
+            </a:r>
+          </a:p>
+        </p:txBody>
+      </p:sp>
+      <p:sp>
+        <p:nvSpPr>
+          <p:cNvPr id="6" name="TextBox 5">
+            <a:extLst>
+              <a:ext uri="{FF2B5EF4-FFF2-40B4-BE49-F238E27FC236}">
+                <a16:creationId xmlns:a16="http://schemas.microsoft.com/office/drawing/2014/main" id="{BD185E19-7D42-D95F-4B17-A0E407336C6E}"/>
+              </a:ext>
+            </a:extLst>
+          </p:cNvPr>
+          <p:cNvSpPr txBox="1"/>
+          <p:nvPr/>
+        </p:nvSpPr>
+        <p:spPr>
+          <a:xfrm>
+            <a:off x="1871003" y="4728001"/>
+            <a:ext cx="15159697" cy="830997"/>
+          </a:xfrm>
+          <a:prstGeom prst="rect">
+            <a:avLst/>
+          </a:prstGeom>
+          <a:noFill/>
+        </p:spPr>
+        <p:txBody>
+          <a:bodyPr wrap="square">
+            <a:spAutoFit/>
+          </a:bodyPr>
+          <a:lstStyle/>
+          <a:p>
+            <a:pPr marL="0" indent="0" algn="ctr">
+              <a:buNone/>
+            </a:pPr>
+            <a:r>
+              <a:rPr lang="en-IN" sz="4800" dirty="0">
+                <a:solidFill>
+                  <a:srgbClr val="0009C4"/>
+                </a:solidFill>
+              </a:rPr>
+              <a:t>print</a:t>
+            </a:r>
+            <a:r>
+              <a:rPr lang="en-IN" sz="4800" dirty="0">
+                <a:solidFill>
+                  <a:schemeClr val="accent5"/>
+                </a:solidFill>
+              </a:rPr>
+              <a:t>(</a:t>
+            </a:r>
+            <a:r>
+              <a:rPr lang="en-IN" sz="4800" dirty="0" err="1">
+                <a:solidFill>
+                  <a:schemeClr val="accent6">
+                    <a:lumMod val="75000"/>
+                  </a:schemeClr>
+                </a:solidFill>
+              </a:rPr>
+              <a:t>r"C</a:t>
+            </a:r>
+            <a:r>
+              <a:rPr lang="en-IN" sz="4800" dirty="0">
+                <a:solidFill>
+                  <a:schemeClr val="accent6">
+                    <a:lumMod val="75000"/>
+                  </a:schemeClr>
+                </a:solidFill>
+              </a:rPr>
+              <a:t>:\Users\Name\Documents“</a:t>
+            </a:r>
+            <a:r>
+              <a:rPr lang="en-IN" sz="4800" dirty="0"/>
+              <a:t>)</a:t>
+            </a:r>
+          </a:p>
+        </p:txBody>
+      </p:sp>
+    </p:spTree>
+    <p:extLst>
+      <p:ext uri="{BB962C8B-B14F-4D97-AF65-F5344CB8AC3E}">
+        <p14:creationId xmlns:p14="http://schemas.microsoft.com/office/powerpoint/2010/main" val="1984566787"/>
+      </p:ext>
+    </p:extLst>
+  </p:cSld>
+  <p:clrMapOvr>
+    <a:masterClrMapping/>
+  </p:clrMapOvr>
 </p:sld>
 </file>
 
@@ -7556,13 +12952,13 @@
   <p:clrMapOvr>
     <a:masterClrMapping/>
   </p:clrMapOvr>
-  <mc:AlternateContent xmlns:mc="http://schemas.openxmlformats.org/markup-compatibility/2006">
-    <mc:Choice xmlns:p159="http://schemas.microsoft.com/office/powerpoint/2015/09/main" Requires="p159">
+  <mc:AlternateContent xmlns:mc="http://schemas.openxmlformats.org/markup-compatibility/2006" xmlns:p159="http://schemas.microsoft.com/office/powerpoint/2015/09/main">
+    <mc:Choice Requires="p159">
       <p:transition xmlns:p14="http://schemas.microsoft.com/office/powerpoint/2010/main" spd="slow" p14:dur="2000">
         <p159:morph option="byObject"/>
       </p:transition>
     </mc:Choice>
-    <mc:Fallback>
+    <mc:Fallback xmlns="">
       <p:transition spd="slow">
         <p:fade/>
       </p:transition>
@@ -7687,13 +13083,13 @@
   <p:clrMapOvr>
     <a:masterClrMapping/>
   </p:clrMapOvr>
-  <mc:AlternateContent xmlns:mc="http://schemas.openxmlformats.org/markup-compatibility/2006">
-    <mc:Choice xmlns:p159="http://schemas.microsoft.com/office/powerpoint/2015/09/main" Requires="p159">
+  <mc:AlternateContent xmlns:mc="http://schemas.openxmlformats.org/markup-compatibility/2006" xmlns:p159="http://schemas.microsoft.com/office/powerpoint/2015/09/main">
+    <mc:Choice Requires="p159">
       <p:transition xmlns:p14="http://schemas.microsoft.com/office/powerpoint/2010/main" spd="slow" p14:dur="2000">
         <p159:morph option="byObject"/>
       </p:transition>
     </mc:Choice>
-    <mc:Fallback>
+    <mc:Fallback xmlns="">
       <p:transition spd="slow">
         <p:fade/>
       </p:transition>
@@ -8504,18 +13900,3490 @@
   <p:clrMapOvr>
     <a:masterClrMapping/>
   </p:clrMapOvr>
-  <mc:AlternateContent xmlns:mc="http://schemas.openxmlformats.org/markup-compatibility/2006">
-    <mc:Choice xmlns:p159="http://schemas.microsoft.com/office/powerpoint/2015/09/main" Requires="p159">
+  <mc:AlternateContent xmlns:mc="http://schemas.openxmlformats.org/markup-compatibility/2006" xmlns:p159="http://schemas.microsoft.com/office/powerpoint/2015/09/main">
+    <mc:Choice Requires="p159">
       <p:transition xmlns:p14="http://schemas.microsoft.com/office/powerpoint/2010/main" spd="slow" p14:dur="2000">
         <p159:morph option="byObject"/>
       </p:transition>
     </mc:Choice>
-    <mc:Fallback>
+    <mc:Fallback xmlns="">
       <p:transition spd="slow">
         <p:fade/>
       </p:transition>
     </mc:Fallback>
   </mc:AlternateContent>
+</p:sld>
+</file>
+
+<file path=ppt/slides/slide5.xml><?xml version="1.0" encoding="utf-8"?>
+<p:sld xmlns:a="http://schemas.openxmlformats.org/drawingml/2006/main" xmlns:r="http://schemas.openxmlformats.org/officeDocument/2006/relationships" xmlns:p="http://schemas.openxmlformats.org/presentationml/2006/main">
+  <p:cSld>
+    <p:spTree>
+      <p:nvGrpSpPr>
+        <p:cNvPr id="1" name=""/>
+        <p:cNvGrpSpPr/>
+        <p:nvPr/>
+      </p:nvGrpSpPr>
+      <p:grpSpPr>
+        <a:xfrm>
+          <a:off x="0" y="0"/>
+          <a:ext cx="0" cy="0"/>
+          <a:chOff x="0" y="0"/>
+          <a:chExt cx="0" cy="0"/>
+        </a:xfrm>
+      </p:grpSpPr>
+      <p:sp>
+        <p:nvSpPr>
+          <p:cNvPr id="2" name="Title 1">
+            <a:extLst>
+              <a:ext uri="{FF2B5EF4-FFF2-40B4-BE49-F238E27FC236}">
+                <a16:creationId xmlns:a16="http://schemas.microsoft.com/office/drawing/2014/main" id="{B99D29DF-65CA-DA71-AEF8-3275E5A6DF2A}"/>
+              </a:ext>
+            </a:extLst>
+          </p:cNvPr>
+          <p:cNvSpPr>
+            <a:spLocks noGrp="1"/>
+          </p:cNvSpPr>
+          <p:nvPr>
+            <p:ph type="ctrTitle"/>
+          </p:nvPr>
+        </p:nvSpPr>
+        <p:spPr>
+          <a:xfrm>
+            <a:off x="2286000" y="3352800"/>
+            <a:ext cx="13716000" cy="3581400"/>
+          </a:xfrm>
+        </p:spPr>
+        <p:txBody>
+          <a:bodyPr anchor="ctr"/>
+          <a:lstStyle/>
+          <a:p>
+            <a:r>
+              <a:rPr lang="en-IN" dirty="0">
+                <a:latin typeface="Roboto" panose="02000000000000000000" pitchFamily="2" charset="0"/>
+                <a:ea typeface="Roboto" panose="02000000000000000000" pitchFamily="2" charset="0"/>
+              </a:rPr>
+              <a:t>print</a:t>
+            </a:r>
+          </a:p>
+        </p:txBody>
+      </p:sp>
+    </p:spTree>
+    <p:extLst>
+      <p:ext uri="{BB962C8B-B14F-4D97-AF65-F5344CB8AC3E}">
+        <p14:creationId xmlns:p14="http://schemas.microsoft.com/office/powerpoint/2010/main" val="1824332170"/>
+      </p:ext>
+    </p:extLst>
+  </p:cSld>
+  <p:clrMapOvr>
+    <a:masterClrMapping/>
+  </p:clrMapOvr>
+  <mc:AlternateContent xmlns:mc="http://schemas.openxmlformats.org/markup-compatibility/2006" xmlns:p159="http://schemas.microsoft.com/office/powerpoint/2015/09/main">
+    <mc:Choice Requires="p159">
+      <p:transition xmlns:p14="http://schemas.microsoft.com/office/powerpoint/2010/main" spd="slow" p14:dur="2000">
+        <p159:morph option="byObject"/>
+      </p:transition>
+    </mc:Choice>
+    <mc:Fallback xmlns="">
+      <p:transition spd="slow">
+        <p:fade/>
+      </p:transition>
+    </mc:Fallback>
+  </mc:AlternateContent>
+</p:sld>
+</file>
+
+<file path=ppt/slides/slide6.xml><?xml version="1.0" encoding="utf-8"?>
+<p:sld xmlns:a="http://schemas.openxmlformats.org/drawingml/2006/main" xmlns:r="http://schemas.openxmlformats.org/officeDocument/2006/relationships" xmlns:p="http://schemas.openxmlformats.org/presentationml/2006/main">
+  <p:cSld>
+    <p:spTree>
+      <p:nvGrpSpPr>
+        <p:cNvPr id="1" name="">
+          <a:extLst>
+            <a:ext uri="{FF2B5EF4-FFF2-40B4-BE49-F238E27FC236}">
+              <a16:creationId xmlns:a16="http://schemas.microsoft.com/office/drawing/2014/main" id="{ABDE1A4D-C780-3CF4-8AF7-4CB5C4CA38B6}"/>
+            </a:ext>
+          </a:extLst>
+        </p:cNvPr>
+        <p:cNvGrpSpPr/>
+        <p:nvPr/>
+      </p:nvGrpSpPr>
+      <p:grpSpPr>
+        <a:xfrm>
+          <a:off x="0" y="0"/>
+          <a:ext cx="0" cy="0"/>
+          <a:chOff x="0" y="0"/>
+          <a:chExt cx="0" cy="0"/>
+        </a:xfrm>
+      </p:grpSpPr>
+      <p:sp>
+        <p:nvSpPr>
+          <p:cNvPr id="2" name="Title 1">
+            <a:extLst>
+              <a:ext uri="{FF2B5EF4-FFF2-40B4-BE49-F238E27FC236}">
+                <a16:creationId xmlns:a16="http://schemas.microsoft.com/office/drawing/2014/main" id="{FD26E459-56F8-F44C-A182-C151C9910F0A}"/>
+              </a:ext>
+            </a:extLst>
+          </p:cNvPr>
+          <p:cNvSpPr>
+            <a:spLocks noGrp="1"/>
+          </p:cNvSpPr>
+          <p:nvPr>
+            <p:ph type="title"/>
+          </p:nvPr>
+        </p:nvSpPr>
+        <p:spPr/>
+        <p:txBody>
+          <a:bodyPr/>
+          <a:lstStyle/>
+          <a:p>
+            <a:r>
+              <a:rPr lang="en-IN" dirty="0"/>
+              <a:t>print</a:t>
+            </a:r>
+          </a:p>
+        </p:txBody>
+      </p:sp>
+      <p:sp>
+        <p:nvSpPr>
+          <p:cNvPr id="3" name="Content Placeholder 2">
+            <a:extLst>
+              <a:ext uri="{FF2B5EF4-FFF2-40B4-BE49-F238E27FC236}">
+                <a16:creationId xmlns:a16="http://schemas.microsoft.com/office/drawing/2014/main" id="{CC7873FB-C07B-6DCC-A802-69E682209051}"/>
+              </a:ext>
+            </a:extLst>
+          </p:cNvPr>
+          <p:cNvSpPr>
+            <a:spLocks noGrp="1"/>
+          </p:cNvSpPr>
+          <p:nvPr>
+            <p:ph idx="1"/>
+          </p:nvPr>
+        </p:nvSpPr>
+        <p:spPr/>
+        <p:txBody>
+          <a:bodyPr anchor="t">
+            <a:normAutofit/>
+          </a:bodyPr>
+          <a:lstStyle/>
+          <a:p>
+            <a:pPr marL="0" indent="0" algn="ctr">
+              <a:buNone/>
+            </a:pPr>
+            <a:endParaRPr lang="en-IN" sz="6400" dirty="0">
+              <a:solidFill>
+                <a:schemeClr val="accent5"/>
+              </a:solidFill>
+            </a:endParaRPr>
+          </a:p>
+          <a:p>
+            <a:pPr marL="0" indent="0" algn="ctr">
+              <a:buNone/>
+            </a:pPr>
+            <a:endParaRPr lang="en-IN" sz="6400" dirty="0">
+              <a:solidFill>
+                <a:schemeClr val="accent5"/>
+              </a:solidFill>
+            </a:endParaRPr>
+          </a:p>
+          <a:p>
+            <a:pPr marL="0" indent="0" algn="ctr">
+              <a:buNone/>
+            </a:pPr>
+            <a:r>
+              <a:rPr lang="en-IN" sz="6400" dirty="0">
+                <a:solidFill>
+                  <a:srgbClr val="0009C4"/>
+                </a:solidFill>
+              </a:rPr>
+              <a:t>print</a:t>
+            </a:r>
+            <a:r>
+              <a:rPr lang="en-IN" sz="6400" dirty="0">
+                <a:solidFill>
+                  <a:schemeClr val="tx1"/>
+                </a:solidFill>
+              </a:rPr>
+              <a:t>(</a:t>
+            </a:r>
+            <a:r>
+              <a:rPr lang="en-IN" sz="6400" dirty="0">
+                <a:solidFill>
+                  <a:schemeClr val="accent3"/>
+                </a:solidFill>
+              </a:rPr>
+              <a:t>&lt;expr&gt;</a:t>
+            </a:r>
+            <a:r>
+              <a:rPr lang="en-IN" sz="6400" dirty="0">
+                <a:solidFill>
+                  <a:schemeClr val="tx1"/>
+                </a:solidFill>
+              </a:rPr>
+              <a:t>)</a:t>
+            </a:r>
+          </a:p>
+        </p:txBody>
+      </p:sp>
+      <p:sp>
+        <p:nvSpPr>
+          <p:cNvPr id="4" name="TextBox 3">
+            <a:extLst>
+              <a:ext uri="{FF2B5EF4-FFF2-40B4-BE49-F238E27FC236}">
+                <a16:creationId xmlns:a16="http://schemas.microsoft.com/office/drawing/2014/main" id="{23BA7C73-A191-946B-572B-952C1ED8A45B}"/>
+              </a:ext>
+            </a:extLst>
+          </p:cNvPr>
+          <p:cNvSpPr txBox="1"/>
+          <p:nvPr/>
+        </p:nvSpPr>
+        <p:spPr>
+          <a:xfrm>
+            <a:off x="1856936" y="5706148"/>
+            <a:ext cx="4705134" cy="2062103"/>
+          </a:xfrm>
+          <a:prstGeom prst="rect">
+            <a:avLst/>
+          </a:prstGeom>
+          <a:noFill/>
+        </p:spPr>
+        <p:txBody>
+          <a:bodyPr wrap="none" rtlCol="0">
+            <a:spAutoFit/>
+          </a:bodyPr>
+          <a:lstStyle/>
+          <a:p>
+            <a:r>
+              <a:rPr lang="en-IN" sz="3200" dirty="0">
+                <a:latin typeface="Consolas" panose="020B0609020204030204" pitchFamily="49" charset="0"/>
+              </a:rPr>
+              <a:t>Example: </a:t>
+            </a:r>
+          </a:p>
+          <a:p>
+            <a:endParaRPr lang="en-IN" sz="3200" dirty="0">
+              <a:latin typeface="Consolas" panose="020B0609020204030204" pitchFamily="49" charset="0"/>
+            </a:endParaRPr>
+          </a:p>
+          <a:p>
+            <a:r>
+              <a:rPr lang="en-IN" sz="3200" dirty="0">
+                <a:solidFill>
+                  <a:srgbClr val="0009C4"/>
+                </a:solidFill>
+                <a:latin typeface="Consolas" panose="020B0609020204030204" pitchFamily="49" charset="0"/>
+              </a:rPr>
+              <a:t>print</a:t>
+            </a:r>
+            <a:r>
+              <a:rPr lang="en-IN" sz="3200" dirty="0">
+                <a:latin typeface="Consolas" panose="020B0609020204030204" pitchFamily="49" charset="0"/>
+              </a:rPr>
+              <a:t>(</a:t>
+            </a:r>
+            <a:r>
+              <a:rPr lang="en-IN" sz="3200" dirty="0">
+                <a:solidFill>
+                  <a:srgbClr val="196B24"/>
+                </a:solidFill>
+                <a:latin typeface="Consolas" panose="020B0609020204030204" pitchFamily="49" charset="0"/>
+              </a:rPr>
+              <a:t>“Hello world”</a:t>
+            </a:r>
+            <a:r>
+              <a:rPr lang="en-IN" sz="3200" dirty="0">
+                <a:latin typeface="Consolas" panose="020B0609020204030204" pitchFamily="49" charset="0"/>
+              </a:rPr>
+              <a:t>)</a:t>
+            </a:r>
+          </a:p>
+          <a:p>
+            <a:r>
+              <a:rPr lang="en-IN" sz="3200" dirty="0">
+                <a:solidFill>
+                  <a:srgbClr val="0009C4"/>
+                </a:solidFill>
+                <a:latin typeface="Consolas" panose="020B0609020204030204" pitchFamily="49" charset="0"/>
+              </a:rPr>
+              <a:t>print</a:t>
+            </a:r>
+            <a:r>
+              <a:rPr lang="en-IN" sz="3200" dirty="0">
+                <a:latin typeface="Consolas" panose="020B0609020204030204" pitchFamily="49" charset="0"/>
+              </a:rPr>
+              <a:t>(</a:t>
+            </a:r>
+            <a:r>
+              <a:rPr lang="en-IN" sz="3200" dirty="0">
+                <a:solidFill>
+                  <a:schemeClr val="accent2"/>
+                </a:solidFill>
+                <a:latin typeface="Consolas" panose="020B0609020204030204" pitchFamily="49" charset="0"/>
+              </a:rPr>
+              <a:t>2+3</a:t>
+            </a:r>
+            <a:r>
+              <a:rPr lang="en-IN" sz="3200" dirty="0">
+                <a:latin typeface="Consolas" panose="020B0609020204030204" pitchFamily="49" charset="0"/>
+              </a:rPr>
+              <a:t>)</a:t>
+            </a:r>
+          </a:p>
+        </p:txBody>
+      </p:sp>
+    </p:spTree>
+    <p:extLst>
+      <p:ext uri="{BB962C8B-B14F-4D97-AF65-F5344CB8AC3E}">
+        <p14:creationId xmlns:p14="http://schemas.microsoft.com/office/powerpoint/2010/main" val="522749787"/>
+      </p:ext>
+    </p:extLst>
+  </p:cSld>
+  <p:clrMapOvr>
+    <a:masterClrMapping/>
+  </p:clrMapOvr>
+  <mc:AlternateContent xmlns:mc="http://schemas.openxmlformats.org/markup-compatibility/2006" xmlns:p159="http://schemas.microsoft.com/office/powerpoint/2015/09/main">
+    <mc:Choice Requires="p159">
+      <p:transition xmlns:p14="http://schemas.microsoft.com/office/powerpoint/2010/main" spd="slow" p14:dur="2000">
+        <p159:morph option="byObject"/>
+      </p:transition>
+    </mc:Choice>
+    <mc:Fallback xmlns="">
+      <p:transition spd="slow">
+        <p:fade/>
+      </p:transition>
+    </mc:Fallback>
+  </mc:AlternateContent>
+  <p:timing>
+    <p:tnLst>
+      <p:par>
+        <p:cTn id="1" dur="indefinite" restart="never" nodeType="tmRoot">
+          <p:childTnLst>
+            <p:seq concurrent="1" nextAc="seek">
+              <p:cTn id="2" dur="indefinite" nodeType="mainSeq">
+                <p:childTnLst>
+                  <p:par>
+                    <p:cTn id="3" fill="hold">
+                      <p:stCondLst>
+                        <p:cond delay="indefinite"/>
+                      </p:stCondLst>
+                      <p:childTnLst>
+                        <p:par>
+                          <p:cTn id="4" fill="hold">
+                            <p:stCondLst>
+                              <p:cond delay="0"/>
+                            </p:stCondLst>
+                            <p:childTnLst>
+                              <p:par>
+                                <p:cTn id="5" presetID="1" presetClass="entr" presetSubtype="0" fill="hold" grpId="0" nodeType="clickEffect">
+                                  <p:stCondLst>
+                                    <p:cond delay="0"/>
+                                  </p:stCondLst>
+                                  <p:childTnLst>
+                                    <p:set>
+                                      <p:cBhvr>
+                                        <p:cTn id="6" dur="1" fill="hold">
+                                          <p:stCondLst>
+                                            <p:cond delay="0"/>
+                                          </p:stCondLst>
+                                        </p:cTn>
+                                        <p:tgtEl>
+                                          <p:spTgt spid="4"/>
+                                        </p:tgtEl>
+                                        <p:attrNameLst>
+                                          <p:attrName>style.visibility</p:attrName>
+                                        </p:attrNameLst>
+                                      </p:cBhvr>
+                                      <p:to>
+                                        <p:strVal val="visible"/>
+                                      </p:to>
+                                    </p:set>
+                                  </p:childTnLst>
+                                </p:cTn>
+                              </p:par>
+                            </p:childTnLst>
+                          </p:cTn>
+                        </p:par>
+                      </p:childTnLst>
+                    </p:cTn>
+                  </p:par>
+                </p:childTnLst>
+              </p:cTn>
+              <p:prevCondLst>
+                <p:cond evt="onPrev" delay="0">
+                  <p:tgtEl>
+                    <p:sldTgt/>
+                  </p:tgtEl>
+                </p:cond>
+              </p:prevCondLst>
+              <p:nextCondLst>
+                <p:cond evt="onNext" delay="0">
+                  <p:tgtEl>
+                    <p:sldTgt/>
+                  </p:tgtEl>
+                </p:cond>
+              </p:nextCondLst>
+            </p:seq>
+          </p:childTnLst>
+        </p:cTn>
+      </p:par>
+    </p:tnLst>
+    <p:bldLst>
+      <p:bldP spid="4" grpId="0"/>
+    </p:bldLst>
+  </p:timing>
+</p:sld>
+</file>
+
+<file path=ppt/slides/slide7.xml><?xml version="1.0" encoding="utf-8"?>
+<p:sld xmlns:a="http://schemas.openxmlformats.org/drawingml/2006/main" xmlns:r="http://schemas.openxmlformats.org/officeDocument/2006/relationships" xmlns:p="http://schemas.openxmlformats.org/presentationml/2006/main">
+  <p:cSld>
+    <p:spTree>
+      <p:nvGrpSpPr>
+        <p:cNvPr id="1" name=""/>
+        <p:cNvGrpSpPr/>
+        <p:nvPr/>
+      </p:nvGrpSpPr>
+      <p:grpSpPr>
+        <a:xfrm>
+          <a:off x="0" y="0"/>
+          <a:ext cx="0" cy="0"/>
+          <a:chOff x="0" y="0"/>
+          <a:chExt cx="0" cy="0"/>
+        </a:xfrm>
+      </p:grpSpPr>
+      <p:sp>
+        <p:nvSpPr>
+          <p:cNvPr id="2" name="Title 1">
+            <a:extLst>
+              <a:ext uri="{FF2B5EF4-FFF2-40B4-BE49-F238E27FC236}">
+                <a16:creationId xmlns:a16="http://schemas.microsoft.com/office/drawing/2014/main" id="{5EFBD59B-18EE-5BE7-666B-498C22E0B783}"/>
+              </a:ext>
+            </a:extLst>
+          </p:cNvPr>
+          <p:cNvSpPr>
+            <a:spLocks noGrp="1"/>
+          </p:cNvSpPr>
+          <p:nvPr>
+            <p:ph type="title"/>
+          </p:nvPr>
+        </p:nvSpPr>
+        <p:spPr/>
+        <p:txBody>
+          <a:bodyPr/>
+          <a:lstStyle/>
+          <a:p>
+            <a:r>
+              <a:rPr lang="en-IN" dirty="0"/>
+              <a:t>print</a:t>
+            </a:r>
+          </a:p>
+        </p:txBody>
+      </p:sp>
+      <p:sp>
+        <p:nvSpPr>
+          <p:cNvPr id="3" name="Content Placeholder 2">
+            <a:extLst>
+              <a:ext uri="{FF2B5EF4-FFF2-40B4-BE49-F238E27FC236}">
+                <a16:creationId xmlns:a16="http://schemas.microsoft.com/office/drawing/2014/main" id="{11CCA755-2DA3-A5FF-8A6C-EABAEC1A2445}"/>
+              </a:ext>
+            </a:extLst>
+          </p:cNvPr>
+          <p:cNvSpPr>
+            <a:spLocks noGrp="1"/>
+          </p:cNvSpPr>
+          <p:nvPr>
+            <p:ph idx="1"/>
+          </p:nvPr>
+        </p:nvSpPr>
+        <p:spPr/>
+        <p:txBody>
+          <a:bodyPr anchor="t">
+            <a:normAutofit/>
+          </a:bodyPr>
+          <a:lstStyle/>
+          <a:p>
+            <a:pPr marL="0" indent="0" algn="ctr">
+              <a:buNone/>
+            </a:pPr>
+            <a:endParaRPr lang="en-IN" sz="6400" dirty="0">
+              <a:solidFill>
+                <a:schemeClr val="accent5"/>
+              </a:solidFill>
+            </a:endParaRPr>
+          </a:p>
+          <a:p>
+            <a:pPr marL="0" indent="0" algn="ctr">
+              <a:buNone/>
+            </a:pPr>
+            <a:endParaRPr lang="en-IN" sz="6400" dirty="0">
+              <a:solidFill>
+                <a:schemeClr val="accent5"/>
+              </a:solidFill>
+            </a:endParaRPr>
+          </a:p>
+          <a:p>
+            <a:pPr marL="0" indent="0" algn="ctr">
+              <a:buNone/>
+            </a:pPr>
+            <a:r>
+              <a:rPr lang="en-IN" sz="6400" dirty="0">
+                <a:solidFill>
+                  <a:srgbClr val="0009C4"/>
+                </a:solidFill>
+              </a:rPr>
+              <a:t>print</a:t>
+            </a:r>
+            <a:r>
+              <a:rPr lang="en-IN" sz="6400" dirty="0">
+                <a:solidFill>
+                  <a:schemeClr val="tx1"/>
+                </a:solidFill>
+              </a:rPr>
+              <a:t>(</a:t>
+            </a:r>
+            <a:r>
+              <a:rPr lang="en-IN" sz="6400" dirty="0">
+                <a:solidFill>
+                  <a:schemeClr val="accent3"/>
+                </a:solidFill>
+              </a:rPr>
+              <a:t>&lt;expr&gt;</a:t>
+            </a:r>
+            <a:r>
+              <a:rPr lang="en-IN" sz="6400" dirty="0">
+                <a:solidFill>
+                  <a:schemeClr val="tx1"/>
+                </a:solidFill>
+              </a:rPr>
+              <a:t>, </a:t>
+            </a:r>
+            <a:r>
+              <a:rPr lang="en-IN" sz="6400" dirty="0">
+                <a:solidFill>
+                  <a:schemeClr val="accent3"/>
+                </a:solidFill>
+              </a:rPr>
+              <a:t>&lt;expr&gt;</a:t>
+            </a:r>
+            <a:r>
+              <a:rPr lang="en-IN" sz="6400" dirty="0">
+                <a:solidFill>
+                  <a:schemeClr val="tx1"/>
+                </a:solidFill>
+              </a:rPr>
+              <a:t>, </a:t>
+            </a:r>
+            <a:r>
+              <a:rPr lang="en-IN" sz="6400" dirty="0">
+                <a:solidFill>
+                  <a:schemeClr val="accent3"/>
+                </a:solidFill>
+              </a:rPr>
+              <a:t>&lt;expr&gt;</a:t>
+            </a:r>
+            <a:r>
+              <a:rPr lang="en-IN" sz="6400" dirty="0">
+                <a:solidFill>
+                  <a:schemeClr val="tx1"/>
+                </a:solidFill>
+              </a:rPr>
+              <a:t>, … , </a:t>
+            </a:r>
+            <a:r>
+              <a:rPr lang="en-IN" sz="6400" dirty="0">
+                <a:solidFill>
+                  <a:schemeClr val="accent3"/>
+                </a:solidFill>
+              </a:rPr>
+              <a:t>&lt;expr&gt;</a:t>
+            </a:r>
+            <a:r>
+              <a:rPr lang="en-IN" sz="6400" dirty="0">
+                <a:solidFill>
+                  <a:schemeClr val="tx1"/>
+                </a:solidFill>
+              </a:rPr>
+              <a:t>)</a:t>
+            </a:r>
+          </a:p>
+        </p:txBody>
+      </p:sp>
+      <p:sp>
+        <p:nvSpPr>
+          <p:cNvPr id="4" name="TextBox 3">
+            <a:extLst>
+              <a:ext uri="{FF2B5EF4-FFF2-40B4-BE49-F238E27FC236}">
+                <a16:creationId xmlns:a16="http://schemas.microsoft.com/office/drawing/2014/main" id="{A15CB185-A829-C3E0-B59D-5AE74DEDDE00}"/>
+              </a:ext>
+            </a:extLst>
+          </p:cNvPr>
+          <p:cNvSpPr txBox="1"/>
+          <p:nvPr/>
+        </p:nvSpPr>
+        <p:spPr>
+          <a:xfrm>
+            <a:off x="1645921" y="6570488"/>
+            <a:ext cx="4705134" cy="1569660"/>
+          </a:xfrm>
+          <a:prstGeom prst="rect">
+            <a:avLst/>
+          </a:prstGeom>
+          <a:noFill/>
+        </p:spPr>
+        <p:txBody>
+          <a:bodyPr wrap="none" rtlCol="0">
+            <a:spAutoFit/>
+          </a:bodyPr>
+          <a:lstStyle/>
+          <a:p>
+            <a:r>
+              <a:rPr lang="en-IN" sz="3200" dirty="0">
+                <a:latin typeface="Consolas" panose="020B0609020204030204" pitchFamily="49" charset="0"/>
+              </a:rPr>
+              <a:t>Example: </a:t>
+            </a:r>
+          </a:p>
+          <a:p>
+            <a:endParaRPr lang="en-IN" sz="3200" dirty="0">
+              <a:latin typeface="Consolas" panose="020B0609020204030204" pitchFamily="49" charset="0"/>
+            </a:endParaRPr>
+          </a:p>
+          <a:p>
+            <a:r>
+              <a:rPr lang="en-IN" sz="3200" dirty="0">
+                <a:solidFill>
+                  <a:srgbClr val="0009C4"/>
+                </a:solidFill>
+                <a:latin typeface="Consolas" panose="020B0609020204030204" pitchFamily="49" charset="0"/>
+              </a:rPr>
+              <a:t>print</a:t>
+            </a:r>
+            <a:r>
+              <a:rPr lang="en-IN" sz="3200" dirty="0">
+                <a:solidFill>
+                  <a:srgbClr val="196B24"/>
+                </a:solidFill>
+                <a:latin typeface="Consolas" panose="020B0609020204030204" pitchFamily="49" charset="0"/>
+              </a:rPr>
+              <a:t>(“2+ 3 =”</a:t>
+            </a:r>
+            <a:r>
+              <a:rPr lang="en-IN" sz="3200" dirty="0">
+                <a:latin typeface="Consolas" panose="020B0609020204030204" pitchFamily="49" charset="0"/>
+              </a:rPr>
+              <a:t>, </a:t>
+            </a:r>
+            <a:r>
+              <a:rPr lang="en-IN" sz="3200" dirty="0">
+                <a:solidFill>
+                  <a:schemeClr val="accent2"/>
+                </a:solidFill>
+                <a:latin typeface="Consolas" panose="020B0609020204030204" pitchFamily="49" charset="0"/>
+              </a:rPr>
+              <a:t>2+3</a:t>
+            </a:r>
+            <a:r>
+              <a:rPr lang="en-IN" sz="3200" dirty="0">
+                <a:latin typeface="Consolas" panose="020B0609020204030204" pitchFamily="49" charset="0"/>
+              </a:rPr>
+              <a:t>)</a:t>
+            </a:r>
+          </a:p>
+        </p:txBody>
+      </p:sp>
+    </p:spTree>
+    <p:extLst>
+      <p:ext uri="{BB962C8B-B14F-4D97-AF65-F5344CB8AC3E}">
+        <p14:creationId xmlns:p14="http://schemas.microsoft.com/office/powerpoint/2010/main" val="2728780576"/>
+      </p:ext>
+    </p:extLst>
+  </p:cSld>
+  <p:clrMapOvr>
+    <a:masterClrMapping/>
+  </p:clrMapOvr>
+  <mc:AlternateContent xmlns:mc="http://schemas.openxmlformats.org/markup-compatibility/2006" xmlns:p159="http://schemas.microsoft.com/office/powerpoint/2015/09/main">
+    <mc:Choice Requires="p159">
+      <p:transition xmlns:p14="http://schemas.microsoft.com/office/powerpoint/2010/main" spd="slow" p14:dur="2000">
+        <p159:morph option="byObject"/>
+      </p:transition>
+    </mc:Choice>
+    <mc:Fallback xmlns="">
+      <p:transition spd="slow">
+        <p:fade/>
+      </p:transition>
+    </mc:Fallback>
+  </mc:AlternateContent>
+  <p:timing>
+    <p:tnLst>
+      <p:par>
+        <p:cTn id="1" dur="indefinite" restart="never" nodeType="tmRoot">
+          <p:childTnLst>
+            <p:seq concurrent="1" nextAc="seek">
+              <p:cTn id="2" dur="indefinite" nodeType="mainSeq">
+                <p:childTnLst>
+                  <p:par>
+                    <p:cTn id="3" fill="hold">
+                      <p:stCondLst>
+                        <p:cond delay="indefinite"/>
+                      </p:stCondLst>
+                      <p:childTnLst>
+                        <p:par>
+                          <p:cTn id="4" fill="hold">
+                            <p:stCondLst>
+                              <p:cond delay="0"/>
+                            </p:stCondLst>
+                            <p:childTnLst>
+                              <p:par>
+                                <p:cTn id="5" presetID="1" presetClass="entr" presetSubtype="0" fill="hold" grpId="0" nodeType="clickEffect">
+                                  <p:stCondLst>
+                                    <p:cond delay="0"/>
+                                  </p:stCondLst>
+                                  <p:childTnLst>
+                                    <p:set>
+                                      <p:cBhvr>
+                                        <p:cTn id="6" dur="1" fill="hold">
+                                          <p:stCondLst>
+                                            <p:cond delay="0"/>
+                                          </p:stCondLst>
+                                        </p:cTn>
+                                        <p:tgtEl>
+                                          <p:spTgt spid="4"/>
+                                        </p:tgtEl>
+                                        <p:attrNameLst>
+                                          <p:attrName>style.visibility</p:attrName>
+                                        </p:attrNameLst>
+                                      </p:cBhvr>
+                                      <p:to>
+                                        <p:strVal val="visible"/>
+                                      </p:to>
+                                    </p:set>
+                                  </p:childTnLst>
+                                </p:cTn>
+                              </p:par>
+                            </p:childTnLst>
+                          </p:cTn>
+                        </p:par>
+                      </p:childTnLst>
+                    </p:cTn>
+                  </p:par>
+                </p:childTnLst>
+              </p:cTn>
+              <p:prevCondLst>
+                <p:cond evt="onPrev" delay="0">
+                  <p:tgtEl>
+                    <p:sldTgt/>
+                  </p:tgtEl>
+                </p:cond>
+              </p:prevCondLst>
+              <p:nextCondLst>
+                <p:cond evt="onNext" delay="0">
+                  <p:tgtEl>
+                    <p:sldTgt/>
+                  </p:tgtEl>
+                </p:cond>
+              </p:nextCondLst>
+            </p:seq>
+          </p:childTnLst>
+        </p:cTn>
+      </p:par>
+    </p:tnLst>
+    <p:bldLst>
+      <p:bldP spid="4" grpId="0"/>
+    </p:bldLst>
+  </p:timing>
+</p:sld>
+</file>
+
+<file path=ppt/slides/slide8.xml><?xml version="1.0" encoding="utf-8"?>
+<p:sld xmlns:a="http://schemas.openxmlformats.org/drawingml/2006/main" xmlns:r="http://schemas.openxmlformats.org/officeDocument/2006/relationships" xmlns:p="http://schemas.openxmlformats.org/presentationml/2006/main">
+  <p:cSld>
+    <p:spTree>
+      <p:nvGrpSpPr>
+        <p:cNvPr id="1" name="">
+          <a:extLst>
+            <a:ext uri="{FF2B5EF4-FFF2-40B4-BE49-F238E27FC236}">
+              <a16:creationId xmlns:a16="http://schemas.microsoft.com/office/drawing/2014/main" id="{3C349840-5E9D-8C1D-E116-0DD01C2382E0}"/>
+            </a:ext>
+          </a:extLst>
+        </p:cNvPr>
+        <p:cNvGrpSpPr/>
+        <p:nvPr/>
+      </p:nvGrpSpPr>
+      <p:grpSpPr>
+        <a:xfrm>
+          <a:off x="0" y="0"/>
+          <a:ext cx="0" cy="0"/>
+          <a:chOff x="0" y="0"/>
+          <a:chExt cx="0" cy="0"/>
+        </a:xfrm>
+      </p:grpSpPr>
+      <p:sp>
+        <p:nvSpPr>
+          <p:cNvPr id="2" name="Title 1">
+            <a:extLst>
+              <a:ext uri="{FF2B5EF4-FFF2-40B4-BE49-F238E27FC236}">
+                <a16:creationId xmlns:a16="http://schemas.microsoft.com/office/drawing/2014/main" id="{A3079B02-F7B6-70D0-FB8E-8B4E2952C650}"/>
+              </a:ext>
+            </a:extLst>
+          </p:cNvPr>
+          <p:cNvSpPr>
+            <a:spLocks noGrp="1"/>
+          </p:cNvSpPr>
+          <p:nvPr>
+            <p:ph type="title"/>
+          </p:nvPr>
+        </p:nvSpPr>
+        <p:spPr/>
+        <p:txBody>
+          <a:bodyPr/>
+          <a:lstStyle/>
+          <a:p>
+            <a:r>
+              <a:rPr lang="en-IN" dirty="0"/>
+              <a:t>print</a:t>
+            </a:r>
+          </a:p>
+        </p:txBody>
+      </p:sp>
+      <p:sp>
+        <p:nvSpPr>
+          <p:cNvPr id="3" name="Content Placeholder 2">
+            <a:extLst>
+              <a:ext uri="{FF2B5EF4-FFF2-40B4-BE49-F238E27FC236}">
+                <a16:creationId xmlns:a16="http://schemas.microsoft.com/office/drawing/2014/main" id="{75346984-A268-3651-6C66-43F24E4B5C5B}"/>
+              </a:ext>
+            </a:extLst>
+          </p:cNvPr>
+          <p:cNvSpPr>
+            <a:spLocks noGrp="1"/>
+          </p:cNvSpPr>
+          <p:nvPr>
+            <p:ph idx="1"/>
+          </p:nvPr>
+        </p:nvSpPr>
+        <p:spPr/>
+        <p:txBody>
+          <a:bodyPr anchor="t">
+            <a:normAutofit/>
+          </a:bodyPr>
+          <a:lstStyle/>
+          <a:p>
+            <a:pPr marL="0" indent="0" algn="ctr">
+              <a:buNone/>
+            </a:pPr>
+            <a:endParaRPr lang="en-IN" sz="6400" dirty="0">
+              <a:solidFill>
+                <a:schemeClr val="accent5"/>
+              </a:solidFill>
+            </a:endParaRPr>
+          </a:p>
+          <a:p>
+            <a:pPr marL="0" indent="0" algn="ctr">
+              <a:buNone/>
+            </a:pPr>
+            <a:endParaRPr lang="en-IN" sz="6400" dirty="0">
+              <a:solidFill>
+                <a:schemeClr val="accent5"/>
+              </a:solidFill>
+            </a:endParaRPr>
+          </a:p>
+          <a:p>
+            <a:pPr marL="0" indent="0" algn="ctr">
+              <a:buNone/>
+            </a:pPr>
+            <a:r>
+              <a:rPr lang="en-IN" sz="6400" dirty="0">
+                <a:solidFill>
+                  <a:srgbClr val="0009C4"/>
+                </a:solidFill>
+              </a:rPr>
+              <a:t>print</a:t>
+            </a:r>
+            <a:r>
+              <a:rPr lang="en-IN" sz="6400" dirty="0">
+                <a:solidFill>
+                  <a:schemeClr val="tx1"/>
+                </a:solidFill>
+              </a:rPr>
+              <a:t>(</a:t>
+            </a:r>
+            <a:r>
+              <a:rPr lang="en-IN" sz="6400" dirty="0">
+                <a:solidFill>
+                  <a:schemeClr val="accent3"/>
+                </a:solidFill>
+              </a:rPr>
+              <a:t>&lt;expr&gt;</a:t>
+            </a:r>
+            <a:r>
+              <a:rPr lang="en-IN" sz="6400" dirty="0">
+                <a:solidFill>
+                  <a:schemeClr val="tx1"/>
+                </a:solidFill>
+              </a:rPr>
+              <a:t>, </a:t>
+            </a:r>
+            <a:r>
+              <a:rPr lang="en-IN" sz="6400" dirty="0">
+                <a:solidFill>
+                  <a:schemeClr val="accent3"/>
+                </a:solidFill>
+              </a:rPr>
+              <a:t>&lt;expr&gt;</a:t>
+            </a:r>
+            <a:r>
+              <a:rPr lang="en-IN" sz="6400" dirty="0">
+                <a:solidFill>
+                  <a:schemeClr val="tx1"/>
+                </a:solidFill>
+              </a:rPr>
+              <a:t>, </a:t>
+            </a:r>
+            <a:r>
+              <a:rPr lang="en-IN" sz="6400" dirty="0">
+                <a:solidFill>
+                  <a:schemeClr val="accent3"/>
+                </a:solidFill>
+              </a:rPr>
+              <a:t>&lt;expr&gt;</a:t>
+            </a:r>
+            <a:r>
+              <a:rPr lang="en-IN" sz="6400" dirty="0">
+                <a:solidFill>
+                  <a:schemeClr val="tx1"/>
+                </a:solidFill>
+              </a:rPr>
+              <a:t>, … , </a:t>
+            </a:r>
+            <a:r>
+              <a:rPr lang="en-IN" sz="6400" dirty="0">
+                <a:solidFill>
+                  <a:schemeClr val="accent3"/>
+                </a:solidFill>
+              </a:rPr>
+              <a:t>&lt;expr&gt;</a:t>
+            </a:r>
+            <a:r>
+              <a:rPr lang="en-IN" sz="6400" dirty="0">
+                <a:solidFill>
+                  <a:schemeClr val="tx1"/>
+                </a:solidFill>
+              </a:rPr>
+              <a:t>)</a:t>
+            </a:r>
+          </a:p>
+        </p:txBody>
+      </p:sp>
+      <p:sp>
+        <p:nvSpPr>
+          <p:cNvPr id="4" name="Left Brace 3">
+            <a:extLst>
+              <a:ext uri="{FF2B5EF4-FFF2-40B4-BE49-F238E27FC236}">
+                <a16:creationId xmlns:a16="http://schemas.microsoft.com/office/drawing/2014/main" id="{BEACEFB0-C2A9-113B-4FE8-A7F7E8CFF05F}"/>
+              </a:ext>
+            </a:extLst>
+          </p:cNvPr>
+          <p:cNvSpPr/>
+          <p:nvPr/>
+        </p:nvSpPr>
+        <p:spPr>
+          <a:xfrm rot="16200000" flipH="1">
+            <a:off x="9526197" y="-2523394"/>
+            <a:ext cx="1106607" cy="12703128"/>
+          </a:xfrm>
+          <a:prstGeom prst="leftBrace">
+            <a:avLst>
+              <a:gd name="adj1" fmla="val 101060"/>
+              <a:gd name="adj2" fmla="val 50000"/>
+            </a:avLst>
+          </a:prstGeom>
+          <a:ln w="28575">
+            <a:solidFill>
+              <a:schemeClr val="accent2"/>
+            </a:solidFill>
+          </a:ln>
+        </p:spPr>
+        <p:style>
+          <a:lnRef idx="2">
+            <a:schemeClr val="accent1"/>
+          </a:lnRef>
+          <a:fillRef idx="0">
+            <a:schemeClr val="accent1"/>
+          </a:fillRef>
+          <a:effectRef idx="1">
+            <a:schemeClr val="accent1"/>
+          </a:effectRef>
+          <a:fontRef idx="minor">
+            <a:schemeClr val="tx1"/>
+          </a:fontRef>
+        </p:style>
+        <p:txBody>
+          <a:bodyPr rtlCol="0" anchor="ctr"/>
+          <a:lstStyle/>
+          <a:p>
+            <a:pPr algn="ctr"/>
+            <a:endParaRPr lang="en-IN"/>
+          </a:p>
+        </p:txBody>
+      </p:sp>
+      <p:sp>
+        <p:nvSpPr>
+          <p:cNvPr id="6" name="TextBox 5">
+            <a:extLst>
+              <a:ext uri="{FF2B5EF4-FFF2-40B4-BE49-F238E27FC236}">
+                <a16:creationId xmlns:a16="http://schemas.microsoft.com/office/drawing/2014/main" id="{5FA03EA0-643F-53CB-CB71-05747AE4F699}"/>
+              </a:ext>
+            </a:extLst>
+          </p:cNvPr>
+          <p:cNvSpPr txBox="1"/>
+          <p:nvPr/>
+        </p:nvSpPr>
+        <p:spPr>
+          <a:xfrm>
+            <a:off x="8982885" y="1978988"/>
+            <a:ext cx="2052550" cy="1077218"/>
+          </a:xfrm>
+          <a:prstGeom prst="rect">
+            <a:avLst/>
+          </a:prstGeom>
+          <a:noFill/>
+        </p:spPr>
+        <p:txBody>
+          <a:bodyPr wrap="none" rtlCol="0">
+            <a:spAutoFit/>
+          </a:bodyPr>
+          <a:lstStyle/>
+          <a:p>
+            <a:r>
+              <a:rPr lang="en-IN" sz="6400" dirty="0">
+                <a:solidFill>
+                  <a:schemeClr val="tx1">
+                    <a:lumMod val="95000"/>
+                    <a:lumOff val="5000"/>
+                  </a:schemeClr>
+                </a:solidFill>
+                <a:latin typeface="+mj-lt"/>
+              </a:rPr>
+              <a:t>*</a:t>
+            </a:r>
+            <a:r>
+              <a:rPr lang="en-IN" sz="6400" dirty="0" err="1">
+                <a:solidFill>
+                  <a:schemeClr val="tx1">
+                    <a:lumMod val="95000"/>
+                    <a:lumOff val="5000"/>
+                  </a:schemeClr>
+                </a:solidFill>
+                <a:latin typeface="+mj-lt"/>
+              </a:rPr>
+              <a:t>args</a:t>
+            </a:r>
+            <a:endParaRPr lang="en-IN" sz="6400" dirty="0">
+              <a:solidFill>
+                <a:schemeClr val="tx1">
+                  <a:lumMod val="95000"/>
+                  <a:lumOff val="5000"/>
+                </a:schemeClr>
+              </a:solidFill>
+              <a:latin typeface="+mj-lt"/>
+            </a:endParaRPr>
+          </a:p>
+        </p:txBody>
+      </p:sp>
+    </p:spTree>
+    <p:extLst>
+      <p:ext uri="{BB962C8B-B14F-4D97-AF65-F5344CB8AC3E}">
+        <p14:creationId xmlns:p14="http://schemas.microsoft.com/office/powerpoint/2010/main" val="3652102661"/>
+      </p:ext>
+    </p:extLst>
+  </p:cSld>
+  <p:clrMapOvr>
+    <a:masterClrMapping/>
+  </p:clrMapOvr>
+  <mc:AlternateContent xmlns:mc="http://schemas.openxmlformats.org/markup-compatibility/2006" xmlns:p159="http://schemas.microsoft.com/office/powerpoint/2015/09/main">
+    <mc:Choice Requires="p159">
+      <p:transition xmlns:p14="http://schemas.microsoft.com/office/powerpoint/2010/main" spd="slow" p14:dur="2000">
+        <p159:morph option="byObject"/>
+      </p:transition>
+    </mc:Choice>
+    <mc:Fallback xmlns="">
+      <p:transition spd="slow">
+        <p:fade/>
+      </p:transition>
+    </mc:Fallback>
+  </mc:AlternateContent>
+</p:sld>
+</file>
+
+<file path=ppt/slides/slide9.xml><?xml version="1.0" encoding="utf-8"?>
+<p:sld xmlns:a="http://schemas.openxmlformats.org/drawingml/2006/main" xmlns:r="http://schemas.openxmlformats.org/officeDocument/2006/relationships" xmlns:p="http://schemas.openxmlformats.org/presentationml/2006/main">
+  <p:cSld>
+    <p:spTree>
+      <p:nvGrpSpPr>
+        <p:cNvPr id="1" name="">
+          <a:extLst>
+            <a:ext uri="{FF2B5EF4-FFF2-40B4-BE49-F238E27FC236}">
+              <a16:creationId xmlns:a16="http://schemas.microsoft.com/office/drawing/2014/main" id="{5B216CF5-4164-31C4-A461-8A23A908EE08}"/>
+            </a:ext>
+          </a:extLst>
+        </p:cNvPr>
+        <p:cNvGrpSpPr/>
+        <p:nvPr/>
+      </p:nvGrpSpPr>
+      <p:grpSpPr>
+        <a:xfrm>
+          <a:off x="0" y="0"/>
+          <a:ext cx="0" cy="0"/>
+          <a:chOff x="0" y="0"/>
+          <a:chExt cx="0" cy="0"/>
+        </a:xfrm>
+      </p:grpSpPr>
+      <p:sp>
+        <p:nvSpPr>
+          <p:cNvPr id="2" name="Title 1">
+            <a:extLst>
+              <a:ext uri="{FF2B5EF4-FFF2-40B4-BE49-F238E27FC236}">
+                <a16:creationId xmlns:a16="http://schemas.microsoft.com/office/drawing/2014/main" id="{1F034CCA-4189-4C15-EC38-93E84257FC14}"/>
+              </a:ext>
+            </a:extLst>
+          </p:cNvPr>
+          <p:cNvSpPr>
+            <a:spLocks noGrp="1"/>
+          </p:cNvSpPr>
+          <p:nvPr>
+            <p:ph type="title"/>
+          </p:nvPr>
+        </p:nvSpPr>
+        <p:spPr/>
+        <p:txBody>
+          <a:bodyPr/>
+          <a:lstStyle/>
+          <a:p>
+            <a:r>
+              <a:rPr lang="en-IN" dirty="0">
+                <a:solidFill>
+                  <a:srgbClr val="0009C4"/>
+                </a:solidFill>
+              </a:rPr>
+              <a:t>print – Special Escape Characters</a:t>
+            </a:r>
+          </a:p>
+        </p:txBody>
+      </p:sp>
+      <p:sp>
+        <p:nvSpPr>
+          <p:cNvPr id="3" name="Content Placeholder 2">
+            <a:extLst>
+              <a:ext uri="{FF2B5EF4-FFF2-40B4-BE49-F238E27FC236}">
+                <a16:creationId xmlns:a16="http://schemas.microsoft.com/office/drawing/2014/main" id="{802BF3CC-DA53-8F58-60BE-58029D09EB4F}"/>
+              </a:ext>
+            </a:extLst>
+          </p:cNvPr>
+          <p:cNvSpPr>
+            <a:spLocks noGrp="1"/>
+          </p:cNvSpPr>
+          <p:nvPr>
+            <p:ph idx="1"/>
+          </p:nvPr>
+        </p:nvSpPr>
+        <p:spPr/>
+        <p:txBody>
+          <a:bodyPr/>
+          <a:lstStyle/>
+          <a:p>
+            <a:r>
+              <a:rPr lang="en-IN" dirty="0"/>
+              <a:t>These escape sequence are used for formatting text.</a:t>
+            </a:r>
+          </a:p>
+        </p:txBody>
+      </p:sp>
+      <p:graphicFrame>
+        <p:nvGraphicFramePr>
+          <p:cNvPr id="5" name="Table 4">
+            <a:extLst>
+              <a:ext uri="{FF2B5EF4-FFF2-40B4-BE49-F238E27FC236}">
+                <a16:creationId xmlns:a16="http://schemas.microsoft.com/office/drawing/2014/main" id="{7E91985D-427B-339E-E5D4-277932658E58}"/>
+              </a:ext>
+            </a:extLst>
+          </p:cNvPr>
+          <p:cNvGraphicFramePr>
+            <a:graphicFrameLocks noGrp="1"/>
+          </p:cNvGraphicFramePr>
+          <p:nvPr>
+            <p:extLst>
+              <p:ext uri="{D42A27DB-BD31-4B8C-83A1-F6EECF244321}">
+                <p14:modId xmlns:p14="http://schemas.microsoft.com/office/powerpoint/2010/main" val="3289502671"/>
+              </p:ext>
+            </p:extLst>
+          </p:nvPr>
+        </p:nvGraphicFramePr>
+        <p:xfrm>
+          <a:off x="1454247" y="3582694"/>
+          <a:ext cx="14574520" cy="4023360"/>
+        </p:xfrm>
+        <a:graphic>
+          <a:graphicData uri="http://schemas.openxmlformats.org/drawingml/2006/table">
+            <a:tbl>
+              <a:tblPr/>
+              <a:tblGrid>
+                <a:gridCol w="3943350">
+                  <a:extLst>
+                    <a:ext uri="{9D8B030D-6E8A-4147-A177-3AD203B41FA5}">
+                      <a16:colId xmlns:a16="http://schemas.microsoft.com/office/drawing/2014/main" val="2160047851"/>
+                    </a:ext>
+                  </a:extLst>
+                </a:gridCol>
+                <a:gridCol w="2634869">
+                  <a:extLst>
+                    <a:ext uri="{9D8B030D-6E8A-4147-A177-3AD203B41FA5}">
+                      <a16:colId xmlns:a16="http://schemas.microsoft.com/office/drawing/2014/main" val="3899678510"/>
+                    </a:ext>
+                  </a:extLst>
+                </a:gridCol>
+                <a:gridCol w="4052951">
+                  <a:extLst>
+                    <a:ext uri="{9D8B030D-6E8A-4147-A177-3AD203B41FA5}">
+                      <a16:colId xmlns:a16="http://schemas.microsoft.com/office/drawing/2014/main" val="3125248851"/>
+                    </a:ext>
+                  </a:extLst>
+                </a:gridCol>
+                <a:gridCol w="3943350">
+                  <a:extLst>
+                    <a:ext uri="{9D8B030D-6E8A-4147-A177-3AD203B41FA5}">
+                      <a16:colId xmlns:a16="http://schemas.microsoft.com/office/drawing/2014/main" val="2617481478"/>
+                    </a:ext>
+                  </a:extLst>
+                </a:gridCol>
+              </a:tblGrid>
+              <a:tr h="0">
+                <a:tc>
+                  <a:txBody>
+                    <a:bodyPr/>
+                    <a:lstStyle/>
+                    <a:p>
+                      <a:pPr algn="ctr"/>
+                      <a:r>
+                        <a:rPr lang="en-IN" b="1" dirty="0">
+                          <a:solidFill>
+                            <a:schemeClr val="tx1"/>
+                          </a:solidFill>
+                        </a:rPr>
+                        <a:t>Escape Sequence</a:t>
+                      </a:r>
+                    </a:p>
+                  </a:txBody>
+                  <a:tcPr anchor="ctr">
+                    <a:lnL w="12700" cap="flat" cmpd="sng" algn="ctr">
+                      <a:solidFill>
+                        <a:schemeClr val="bg1">
+                          <a:lumMod val="50000"/>
+                        </a:schemeClr>
+                      </a:solidFill>
+                      <a:prstDash val="solid"/>
+                      <a:round/>
+                      <a:headEnd type="none" w="med" len="med"/>
+                      <a:tailEnd type="none" w="med" len="med"/>
+                    </a:lnL>
+                    <a:lnR w="12700" cap="flat" cmpd="sng" algn="ctr">
+                      <a:solidFill>
+                        <a:schemeClr val="bg1">
+                          <a:lumMod val="50000"/>
+                        </a:schemeClr>
+                      </a:solidFill>
+                      <a:prstDash val="solid"/>
+                      <a:round/>
+                      <a:headEnd type="none" w="med" len="med"/>
+                      <a:tailEnd type="none" w="med" len="med"/>
+                    </a:lnR>
+                    <a:lnT w="12700" cap="flat" cmpd="sng" algn="ctr">
+                      <a:solidFill>
+                        <a:schemeClr val="bg1">
+                          <a:lumMod val="50000"/>
+                        </a:schemeClr>
+                      </a:solidFill>
+                      <a:prstDash val="solid"/>
+                      <a:round/>
+                      <a:headEnd type="none" w="med" len="med"/>
+                      <a:tailEnd type="none" w="med" len="med"/>
+                    </a:lnT>
+                    <a:lnB w="12700" cap="flat" cmpd="sng" algn="ctr">
+                      <a:solidFill>
+                        <a:schemeClr val="bg1">
+                          <a:lumMod val="50000"/>
+                        </a:schemeClr>
+                      </a:solidFill>
+                      <a:prstDash val="solid"/>
+                      <a:round/>
+                      <a:headEnd type="none" w="med" len="med"/>
+                      <a:tailEnd type="none" w="med" len="med"/>
+                    </a:lnB>
+                    <a:solidFill>
+                      <a:srgbClr val="00FFFF"/>
+                    </a:solidFill>
+                  </a:tcPr>
+                </a:tc>
+                <a:tc>
+                  <a:txBody>
+                    <a:bodyPr/>
+                    <a:lstStyle/>
+                    <a:p>
+                      <a:pPr algn="ctr"/>
+                      <a:r>
+                        <a:rPr lang="en-IN" b="1" dirty="0">
+                          <a:solidFill>
+                            <a:schemeClr val="tx1"/>
+                          </a:solidFill>
+                        </a:rPr>
+                        <a:t>Description</a:t>
+                      </a:r>
+                    </a:p>
+                  </a:txBody>
+                  <a:tcPr anchor="ctr">
+                    <a:lnL w="12700" cap="flat" cmpd="sng" algn="ctr">
+                      <a:solidFill>
+                        <a:schemeClr val="bg1">
+                          <a:lumMod val="50000"/>
+                        </a:schemeClr>
+                      </a:solidFill>
+                      <a:prstDash val="solid"/>
+                      <a:round/>
+                      <a:headEnd type="none" w="med" len="med"/>
+                      <a:tailEnd type="none" w="med" len="med"/>
+                    </a:lnL>
+                    <a:lnR w="12700" cap="flat" cmpd="sng" algn="ctr">
+                      <a:solidFill>
+                        <a:schemeClr val="bg1">
+                          <a:lumMod val="50000"/>
+                        </a:schemeClr>
+                      </a:solidFill>
+                      <a:prstDash val="solid"/>
+                      <a:round/>
+                      <a:headEnd type="none" w="med" len="med"/>
+                      <a:tailEnd type="none" w="med" len="med"/>
+                    </a:lnR>
+                    <a:lnT w="12700" cap="flat" cmpd="sng" algn="ctr">
+                      <a:solidFill>
+                        <a:schemeClr val="bg1">
+                          <a:lumMod val="50000"/>
+                        </a:schemeClr>
+                      </a:solidFill>
+                      <a:prstDash val="solid"/>
+                      <a:round/>
+                      <a:headEnd type="none" w="med" len="med"/>
+                      <a:tailEnd type="none" w="med" len="med"/>
+                    </a:lnT>
+                    <a:lnB w="12700" cap="flat" cmpd="sng" algn="ctr">
+                      <a:solidFill>
+                        <a:schemeClr val="bg1">
+                          <a:lumMod val="50000"/>
+                        </a:schemeClr>
+                      </a:solidFill>
+                      <a:prstDash val="solid"/>
+                      <a:round/>
+                      <a:headEnd type="none" w="med" len="med"/>
+                      <a:tailEnd type="none" w="med" len="med"/>
+                    </a:lnB>
+                    <a:solidFill>
+                      <a:srgbClr val="00FFFF"/>
+                    </a:solidFill>
+                  </a:tcPr>
+                </a:tc>
+                <a:tc>
+                  <a:txBody>
+                    <a:bodyPr/>
+                    <a:lstStyle/>
+                    <a:p>
+                      <a:pPr algn="ctr"/>
+                      <a:r>
+                        <a:rPr lang="en-IN" b="1">
+                          <a:solidFill>
+                            <a:schemeClr val="tx1"/>
+                          </a:solidFill>
+                        </a:rPr>
+                        <a:t>Example</a:t>
+                      </a:r>
+                    </a:p>
+                  </a:txBody>
+                  <a:tcPr anchor="ctr">
+                    <a:lnL w="12700" cap="flat" cmpd="sng" algn="ctr">
+                      <a:solidFill>
+                        <a:schemeClr val="bg1">
+                          <a:lumMod val="50000"/>
+                        </a:schemeClr>
+                      </a:solidFill>
+                      <a:prstDash val="solid"/>
+                      <a:round/>
+                      <a:headEnd type="none" w="med" len="med"/>
+                      <a:tailEnd type="none" w="med" len="med"/>
+                    </a:lnL>
+                    <a:lnR w="12700" cap="flat" cmpd="sng" algn="ctr">
+                      <a:solidFill>
+                        <a:schemeClr val="bg1">
+                          <a:lumMod val="50000"/>
+                        </a:schemeClr>
+                      </a:solidFill>
+                      <a:prstDash val="solid"/>
+                      <a:round/>
+                      <a:headEnd type="none" w="med" len="med"/>
+                      <a:tailEnd type="none" w="med" len="med"/>
+                    </a:lnR>
+                    <a:lnT w="12700" cap="flat" cmpd="sng" algn="ctr">
+                      <a:solidFill>
+                        <a:schemeClr val="bg1">
+                          <a:lumMod val="50000"/>
+                        </a:schemeClr>
+                      </a:solidFill>
+                      <a:prstDash val="solid"/>
+                      <a:round/>
+                      <a:headEnd type="none" w="med" len="med"/>
+                      <a:tailEnd type="none" w="med" len="med"/>
+                    </a:lnT>
+                    <a:lnB w="12700" cap="flat" cmpd="sng" algn="ctr">
+                      <a:solidFill>
+                        <a:schemeClr val="bg1">
+                          <a:lumMod val="50000"/>
+                        </a:schemeClr>
+                      </a:solidFill>
+                      <a:prstDash val="solid"/>
+                      <a:round/>
+                      <a:headEnd type="none" w="med" len="med"/>
+                      <a:tailEnd type="none" w="med" len="med"/>
+                    </a:lnB>
+                    <a:solidFill>
+                      <a:srgbClr val="00FFFF"/>
+                    </a:solidFill>
+                  </a:tcPr>
+                </a:tc>
+                <a:tc>
+                  <a:txBody>
+                    <a:bodyPr/>
+                    <a:lstStyle/>
+                    <a:p>
+                      <a:pPr algn="ctr"/>
+                      <a:r>
+                        <a:rPr lang="en-IN" b="1" dirty="0">
+                          <a:solidFill>
+                            <a:schemeClr val="tx1"/>
+                          </a:solidFill>
+                        </a:rPr>
+                        <a:t>Output</a:t>
+                      </a:r>
+                    </a:p>
+                  </a:txBody>
+                  <a:tcPr anchor="ctr">
+                    <a:lnL w="12700" cap="flat" cmpd="sng" algn="ctr">
+                      <a:solidFill>
+                        <a:schemeClr val="bg1">
+                          <a:lumMod val="50000"/>
+                        </a:schemeClr>
+                      </a:solidFill>
+                      <a:prstDash val="solid"/>
+                      <a:round/>
+                      <a:headEnd type="none" w="med" len="med"/>
+                      <a:tailEnd type="none" w="med" len="med"/>
+                    </a:lnL>
+                    <a:lnR w="12700" cap="flat" cmpd="sng" algn="ctr">
+                      <a:solidFill>
+                        <a:schemeClr val="bg1">
+                          <a:lumMod val="50000"/>
+                        </a:schemeClr>
+                      </a:solidFill>
+                      <a:prstDash val="solid"/>
+                      <a:round/>
+                      <a:headEnd type="none" w="med" len="med"/>
+                      <a:tailEnd type="none" w="med" len="med"/>
+                    </a:lnR>
+                    <a:lnT w="12700" cap="flat" cmpd="sng" algn="ctr">
+                      <a:solidFill>
+                        <a:schemeClr val="bg1">
+                          <a:lumMod val="50000"/>
+                        </a:schemeClr>
+                      </a:solidFill>
+                      <a:prstDash val="solid"/>
+                      <a:round/>
+                      <a:headEnd type="none" w="med" len="med"/>
+                      <a:tailEnd type="none" w="med" len="med"/>
+                    </a:lnT>
+                    <a:lnB w="12700" cap="flat" cmpd="sng" algn="ctr">
+                      <a:solidFill>
+                        <a:schemeClr val="bg1">
+                          <a:lumMod val="50000"/>
+                        </a:schemeClr>
+                      </a:solidFill>
+                      <a:prstDash val="solid"/>
+                      <a:round/>
+                      <a:headEnd type="none" w="med" len="med"/>
+                      <a:tailEnd type="none" w="med" len="med"/>
+                    </a:lnB>
+                    <a:solidFill>
+                      <a:srgbClr val="00FFFF"/>
+                    </a:solidFill>
+                  </a:tcPr>
+                </a:tc>
+                <a:extLst>
+                  <a:ext uri="{0D108BD9-81ED-4DB2-BD59-A6C34878D82A}">
+                    <a16:rowId xmlns:a16="http://schemas.microsoft.com/office/drawing/2014/main" val="1813939875"/>
+                  </a:ext>
+                </a:extLst>
+              </a:tr>
+              <a:tr h="0">
+                <a:tc>
+                  <a:txBody>
+                    <a:bodyPr/>
+                    <a:lstStyle/>
+                    <a:p>
+                      <a:pPr algn="ctr"/>
+                      <a:r>
+                        <a:rPr lang="en-IN"/>
+                        <a:t>\n</a:t>
+                      </a:r>
+                    </a:p>
+                  </a:txBody>
+                  <a:tcPr anchor="ctr">
+                    <a:lnL w="12700" cap="flat" cmpd="sng" algn="ctr">
+                      <a:solidFill>
+                        <a:schemeClr val="bg1">
+                          <a:lumMod val="50000"/>
+                        </a:schemeClr>
+                      </a:solidFill>
+                      <a:prstDash val="solid"/>
+                      <a:round/>
+                      <a:headEnd type="none" w="med" len="med"/>
+                      <a:tailEnd type="none" w="med" len="med"/>
+                    </a:lnL>
+                    <a:lnR w="12700" cap="flat" cmpd="sng" algn="ctr">
+                      <a:solidFill>
+                        <a:schemeClr val="bg1">
+                          <a:lumMod val="50000"/>
+                        </a:schemeClr>
+                      </a:solidFill>
+                      <a:prstDash val="solid"/>
+                      <a:round/>
+                      <a:headEnd type="none" w="med" len="med"/>
+                      <a:tailEnd type="none" w="med" len="med"/>
+                    </a:lnR>
+                    <a:lnT w="12700" cap="flat" cmpd="sng" algn="ctr">
+                      <a:solidFill>
+                        <a:schemeClr val="bg1">
+                          <a:lumMod val="50000"/>
+                        </a:schemeClr>
+                      </a:solidFill>
+                      <a:prstDash val="solid"/>
+                      <a:round/>
+                      <a:headEnd type="none" w="med" len="med"/>
+                      <a:tailEnd type="none" w="med" len="med"/>
+                    </a:lnT>
+                    <a:lnB w="12700" cap="flat" cmpd="sng" algn="ctr">
+                      <a:solidFill>
+                        <a:schemeClr val="bg1">
+                          <a:lumMod val="50000"/>
+                        </a:schemeClr>
+                      </a:solidFill>
+                      <a:prstDash val="solid"/>
+                      <a:round/>
+                      <a:headEnd type="none" w="med" len="med"/>
+                      <a:tailEnd type="none" w="med" len="med"/>
+                    </a:lnB>
+                    <a:noFill/>
+                  </a:tcPr>
+                </a:tc>
+                <a:tc>
+                  <a:txBody>
+                    <a:bodyPr/>
+                    <a:lstStyle/>
+                    <a:p>
+                      <a:r>
+                        <a:rPr lang="en-IN" dirty="0"/>
+                        <a:t>New line</a:t>
+                      </a:r>
+                    </a:p>
+                  </a:txBody>
+                  <a:tcPr anchor="ctr">
+                    <a:lnL w="12700" cap="flat" cmpd="sng" algn="ctr">
+                      <a:solidFill>
+                        <a:schemeClr val="bg1">
+                          <a:lumMod val="50000"/>
+                        </a:schemeClr>
+                      </a:solidFill>
+                      <a:prstDash val="solid"/>
+                      <a:round/>
+                      <a:headEnd type="none" w="med" len="med"/>
+                      <a:tailEnd type="none" w="med" len="med"/>
+                    </a:lnL>
+                    <a:lnR w="12700" cap="flat" cmpd="sng" algn="ctr">
+                      <a:solidFill>
+                        <a:schemeClr val="bg1">
+                          <a:lumMod val="50000"/>
+                        </a:schemeClr>
+                      </a:solidFill>
+                      <a:prstDash val="solid"/>
+                      <a:round/>
+                      <a:headEnd type="none" w="med" len="med"/>
+                      <a:tailEnd type="none" w="med" len="med"/>
+                    </a:lnR>
+                    <a:lnT w="12700" cap="flat" cmpd="sng" algn="ctr">
+                      <a:solidFill>
+                        <a:schemeClr val="bg1">
+                          <a:lumMod val="50000"/>
+                        </a:schemeClr>
+                      </a:solidFill>
+                      <a:prstDash val="solid"/>
+                      <a:round/>
+                      <a:headEnd type="none" w="med" len="med"/>
+                      <a:tailEnd type="none" w="med" len="med"/>
+                    </a:lnT>
+                    <a:lnB w="12700" cap="flat" cmpd="sng" algn="ctr">
+                      <a:solidFill>
+                        <a:schemeClr val="bg1">
+                          <a:lumMod val="50000"/>
+                        </a:schemeClr>
+                      </a:solidFill>
+                      <a:prstDash val="solid"/>
+                      <a:round/>
+                      <a:headEnd type="none" w="med" len="med"/>
+                      <a:tailEnd type="none" w="med" len="med"/>
+                    </a:lnB>
+                    <a:noFill/>
+                  </a:tcPr>
+                </a:tc>
+                <a:tc>
+                  <a:txBody>
+                    <a:bodyPr/>
+                    <a:lstStyle/>
+                    <a:p>
+                      <a:r>
+                        <a:rPr lang="en-IN" dirty="0">
+                          <a:solidFill>
+                            <a:srgbClr val="0009C4"/>
+                          </a:solidFill>
+                        </a:rPr>
+                        <a:t>print</a:t>
+                      </a:r>
+                      <a:r>
+                        <a:rPr lang="en-IN" dirty="0"/>
+                        <a:t>(</a:t>
+                      </a:r>
+                      <a:r>
+                        <a:rPr lang="en-IN" dirty="0">
+                          <a:solidFill>
+                            <a:schemeClr val="accent6">
+                              <a:lumMod val="75000"/>
+                            </a:schemeClr>
+                          </a:solidFill>
+                        </a:rPr>
+                        <a:t>"Hello\</a:t>
+                      </a:r>
+                      <a:r>
+                        <a:rPr lang="en-IN" dirty="0" err="1">
+                          <a:solidFill>
+                            <a:schemeClr val="accent6">
+                              <a:lumMod val="75000"/>
+                            </a:schemeClr>
+                          </a:solidFill>
+                        </a:rPr>
+                        <a:t>nWorld</a:t>
+                      </a:r>
+                      <a:r>
+                        <a:rPr lang="en-IN" dirty="0">
+                          <a:solidFill>
+                            <a:schemeClr val="accent6">
+                              <a:lumMod val="75000"/>
+                            </a:schemeClr>
+                          </a:solidFill>
+                        </a:rPr>
+                        <a:t>"</a:t>
+                      </a:r>
+                      <a:r>
+                        <a:rPr lang="en-IN" dirty="0"/>
+                        <a:t>)</a:t>
+                      </a:r>
+                    </a:p>
+                  </a:txBody>
+                  <a:tcPr anchor="ctr">
+                    <a:lnL w="12700" cap="flat" cmpd="sng" algn="ctr">
+                      <a:solidFill>
+                        <a:schemeClr val="bg1">
+                          <a:lumMod val="50000"/>
+                        </a:schemeClr>
+                      </a:solidFill>
+                      <a:prstDash val="solid"/>
+                      <a:round/>
+                      <a:headEnd type="none" w="med" len="med"/>
+                      <a:tailEnd type="none" w="med" len="med"/>
+                    </a:lnL>
+                    <a:lnR w="12700" cap="flat" cmpd="sng" algn="ctr">
+                      <a:solidFill>
+                        <a:schemeClr val="bg1">
+                          <a:lumMod val="50000"/>
+                        </a:schemeClr>
+                      </a:solidFill>
+                      <a:prstDash val="solid"/>
+                      <a:round/>
+                      <a:headEnd type="none" w="med" len="med"/>
+                      <a:tailEnd type="none" w="med" len="med"/>
+                    </a:lnR>
+                    <a:lnT w="12700" cap="flat" cmpd="sng" algn="ctr">
+                      <a:solidFill>
+                        <a:schemeClr val="bg1">
+                          <a:lumMod val="50000"/>
+                        </a:schemeClr>
+                      </a:solidFill>
+                      <a:prstDash val="solid"/>
+                      <a:round/>
+                      <a:headEnd type="none" w="med" len="med"/>
+                      <a:tailEnd type="none" w="med" len="med"/>
+                    </a:lnT>
+                    <a:lnB w="12700" cap="flat" cmpd="sng" algn="ctr">
+                      <a:solidFill>
+                        <a:schemeClr val="bg1">
+                          <a:lumMod val="50000"/>
+                        </a:schemeClr>
+                      </a:solidFill>
+                      <a:prstDash val="solid"/>
+                      <a:round/>
+                      <a:headEnd type="none" w="med" len="med"/>
+                      <a:tailEnd type="none" w="med" len="med"/>
+                    </a:lnB>
+                    <a:noFill/>
+                  </a:tcPr>
+                </a:tc>
+                <a:tc>
+                  <a:txBody>
+                    <a:bodyPr/>
+                    <a:lstStyle/>
+                    <a:p>
+                      <a:r>
+                        <a:rPr lang="en-IN" dirty="0"/>
+                        <a:t>Hello ⏎ World</a:t>
+                      </a:r>
+                    </a:p>
+                  </a:txBody>
+                  <a:tcPr anchor="ctr">
+                    <a:lnL w="12700" cap="flat" cmpd="sng" algn="ctr">
+                      <a:solidFill>
+                        <a:schemeClr val="bg1">
+                          <a:lumMod val="50000"/>
+                        </a:schemeClr>
+                      </a:solidFill>
+                      <a:prstDash val="solid"/>
+                      <a:round/>
+                      <a:headEnd type="none" w="med" len="med"/>
+                      <a:tailEnd type="none" w="med" len="med"/>
+                    </a:lnL>
+                    <a:lnR w="12700" cap="flat" cmpd="sng" algn="ctr">
+                      <a:solidFill>
+                        <a:schemeClr val="bg1">
+                          <a:lumMod val="50000"/>
+                        </a:schemeClr>
+                      </a:solidFill>
+                      <a:prstDash val="solid"/>
+                      <a:round/>
+                      <a:headEnd type="none" w="med" len="med"/>
+                      <a:tailEnd type="none" w="med" len="med"/>
+                    </a:lnR>
+                    <a:lnT w="12700" cap="flat" cmpd="sng" algn="ctr">
+                      <a:solidFill>
+                        <a:schemeClr val="bg1">
+                          <a:lumMod val="50000"/>
+                        </a:schemeClr>
+                      </a:solidFill>
+                      <a:prstDash val="solid"/>
+                      <a:round/>
+                      <a:headEnd type="none" w="med" len="med"/>
+                      <a:tailEnd type="none" w="med" len="med"/>
+                    </a:lnT>
+                    <a:lnB w="12700" cap="flat" cmpd="sng" algn="ctr">
+                      <a:solidFill>
+                        <a:schemeClr val="bg1">
+                          <a:lumMod val="50000"/>
+                        </a:schemeClr>
+                      </a:solidFill>
+                      <a:prstDash val="solid"/>
+                      <a:round/>
+                      <a:headEnd type="none" w="med" len="med"/>
+                      <a:tailEnd type="none" w="med" len="med"/>
+                    </a:lnB>
+                    <a:noFill/>
+                  </a:tcPr>
+                </a:tc>
+                <a:extLst>
+                  <a:ext uri="{0D108BD9-81ED-4DB2-BD59-A6C34878D82A}">
+                    <a16:rowId xmlns:a16="http://schemas.microsoft.com/office/drawing/2014/main" val="1281898190"/>
+                  </a:ext>
+                </a:extLst>
+              </a:tr>
+              <a:tr h="0">
+                <a:tc>
+                  <a:txBody>
+                    <a:bodyPr/>
+                    <a:lstStyle/>
+                    <a:p>
+                      <a:pPr algn="ctr"/>
+                      <a:r>
+                        <a:rPr lang="en-IN"/>
+                        <a:t>\t</a:t>
+                      </a:r>
+                    </a:p>
+                  </a:txBody>
+                  <a:tcPr anchor="ctr">
+                    <a:lnL w="12700" cap="flat" cmpd="sng" algn="ctr">
+                      <a:solidFill>
+                        <a:schemeClr val="bg1">
+                          <a:lumMod val="50000"/>
+                        </a:schemeClr>
+                      </a:solidFill>
+                      <a:prstDash val="solid"/>
+                      <a:round/>
+                      <a:headEnd type="none" w="med" len="med"/>
+                      <a:tailEnd type="none" w="med" len="med"/>
+                    </a:lnL>
+                    <a:lnR w="12700" cap="flat" cmpd="sng" algn="ctr">
+                      <a:solidFill>
+                        <a:schemeClr val="bg1">
+                          <a:lumMod val="50000"/>
+                        </a:schemeClr>
+                      </a:solidFill>
+                      <a:prstDash val="solid"/>
+                      <a:round/>
+                      <a:headEnd type="none" w="med" len="med"/>
+                      <a:tailEnd type="none" w="med" len="med"/>
+                    </a:lnR>
+                    <a:lnT w="12700" cap="flat" cmpd="sng" algn="ctr">
+                      <a:solidFill>
+                        <a:schemeClr val="bg1">
+                          <a:lumMod val="50000"/>
+                        </a:schemeClr>
+                      </a:solidFill>
+                      <a:prstDash val="solid"/>
+                      <a:round/>
+                      <a:headEnd type="none" w="med" len="med"/>
+                      <a:tailEnd type="none" w="med" len="med"/>
+                    </a:lnT>
+                    <a:lnB w="12700" cap="flat" cmpd="sng" algn="ctr">
+                      <a:solidFill>
+                        <a:schemeClr val="bg1">
+                          <a:lumMod val="50000"/>
+                        </a:schemeClr>
+                      </a:solidFill>
+                      <a:prstDash val="solid"/>
+                      <a:round/>
+                      <a:headEnd type="none" w="med" len="med"/>
+                      <a:tailEnd type="none" w="med" len="med"/>
+                    </a:lnB>
+                    <a:noFill/>
+                  </a:tcPr>
+                </a:tc>
+                <a:tc>
+                  <a:txBody>
+                    <a:bodyPr/>
+                    <a:lstStyle/>
+                    <a:p>
+                      <a:r>
+                        <a:rPr lang="en-IN"/>
+                        <a:t>Horizontal Tab</a:t>
+                      </a:r>
+                    </a:p>
+                  </a:txBody>
+                  <a:tcPr anchor="ctr">
+                    <a:lnL w="12700" cap="flat" cmpd="sng" algn="ctr">
+                      <a:solidFill>
+                        <a:schemeClr val="bg1">
+                          <a:lumMod val="50000"/>
+                        </a:schemeClr>
+                      </a:solidFill>
+                      <a:prstDash val="solid"/>
+                      <a:round/>
+                      <a:headEnd type="none" w="med" len="med"/>
+                      <a:tailEnd type="none" w="med" len="med"/>
+                    </a:lnL>
+                    <a:lnR w="12700" cap="flat" cmpd="sng" algn="ctr">
+                      <a:solidFill>
+                        <a:schemeClr val="bg1">
+                          <a:lumMod val="50000"/>
+                        </a:schemeClr>
+                      </a:solidFill>
+                      <a:prstDash val="solid"/>
+                      <a:round/>
+                      <a:headEnd type="none" w="med" len="med"/>
+                      <a:tailEnd type="none" w="med" len="med"/>
+                    </a:lnR>
+                    <a:lnT w="12700" cap="flat" cmpd="sng" algn="ctr">
+                      <a:solidFill>
+                        <a:schemeClr val="bg1">
+                          <a:lumMod val="50000"/>
+                        </a:schemeClr>
+                      </a:solidFill>
+                      <a:prstDash val="solid"/>
+                      <a:round/>
+                      <a:headEnd type="none" w="med" len="med"/>
+                      <a:tailEnd type="none" w="med" len="med"/>
+                    </a:lnT>
+                    <a:lnB w="12700" cap="flat" cmpd="sng" algn="ctr">
+                      <a:solidFill>
+                        <a:schemeClr val="bg1">
+                          <a:lumMod val="50000"/>
+                        </a:schemeClr>
+                      </a:solidFill>
+                      <a:prstDash val="solid"/>
+                      <a:round/>
+                      <a:headEnd type="none" w="med" len="med"/>
+                      <a:tailEnd type="none" w="med" len="med"/>
+                    </a:lnB>
+                    <a:noFill/>
+                  </a:tcPr>
+                </a:tc>
+                <a:tc>
+                  <a:txBody>
+                    <a:bodyPr/>
+                    <a:lstStyle/>
+                    <a:p>
+                      <a:r>
+                        <a:rPr lang="en-IN" dirty="0">
+                          <a:solidFill>
+                            <a:srgbClr val="0009C4"/>
+                          </a:solidFill>
+                        </a:rPr>
+                        <a:t>print</a:t>
+                      </a:r>
+                      <a:r>
+                        <a:rPr lang="en-IN" dirty="0"/>
+                        <a:t>(</a:t>
+                      </a:r>
+                      <a:r>
+                        <a:rPr lang="en-IN" dirty="0">
+                          <a:solidFill>
+                            <a:schemeClr val="accent6">
+                              <a:lumMod val="75000"/>
+                            </a:schemeClr>
+                          </a:solidFill>
+                        </a:rPr>
+                        <a:t>"Hello\</a:t>
+                      </a:r>
+                      <a:r>
+                        <a:rPr lang="en-IN" dirty="0" err="1">
+                          <a:solidFill>
+                            <a:schemeClr val="accent6">
+                              <a:lumMod val="75000"/>
+                            </a:schemeClr>
+                          </a:solidFill>
+                        </a:rPr>
+                        <a:t>tWorld</a:t>
+                      </a:r>
+                      <a:r>
+                        <a:rPr lang="en-IN" dirty="0">
+                          <a:solidFill>
+                            <a:schemeClr val="accent6">
+                              <a:lumMod val="75000"/>
+                            </a:schemeClr>
+                          </a:solidFill>
+                        </a:rPr>
+                        <a:t>"</a:t>
+                      </a:r>
+                      <a:r>
+                        <a:rPr lang="en-IN" dirty="0"/>
+                        <a:t>)</a:t>
+                      </a:r>
+                    </a:p>
+                  </a:txBody>
+                  <a:tcPr anchor="ctr">
+                    <a:lnL w="12700" cap="flat" cmpd="sng" algn="ctr">
+                      <a:solidFill>
+                        <a:schemeClr val="bg1">
+                          <a:lumMod val="50000"/>
+                        </a:schemeClr>
+                      </a:solidFill>
+                      <a:prstDash val="solid"/>
+                      <a:round/>
+                      <a:headEnd type="none" w="med" len="med"/>
+                      <a:tailEnd type="none" w="med" len="med"/>
+                    </a:lnL>
+                    <a:lnR w="12700" cap="flat" cmpd="sng" algn="ctr">
+                      <a:solidFill>
+                        <a:schemeClr val="bg1">
+                          <a:lumMod val="50000"/>
+                        </a:schemeClr>
+                      </a:solidFill>
+                      <a:prstDash val="solid"/>
+                      <a:round/>
+                      <a:headEnd type="none" w="med" len="med"/>
+                      <a:tailEnd type="none" w="med" len="med"/>
+                    </a:lnR>
+                    <a:lnT w="12700" cap="flat" cmpd="sng" algn="ctr">
+                      <a:solidFill>
+                        <a:schemeClr val="bg1">
+                          <a:lumMod val="50000"/>
+                        </a:schemeClr>
+                      </a:solidFill>
+                      <a:prstDash val="solid"/>
+                      <a:round/>
+                      <a:headEnd type="none" w="med" len="med"/>
+                      <a:tailEnd type="none" w="med" len="med"/>
+                    </a:lnT>
+                    <a:lnB w="12700" cap="flat" cmpd="sng" algn="ctr">
+                      <a:solidFill>
+                        <a:schemeClr val="bg1">
+                          <a:lumMod val="50000"/>
+                        </a:schemeClr>
+                      </a:solidFill>
+                      <a:prstDash val="solid"/>
+                      <a:round/>
+                      <a:headEnd type="none" w="med" len="med"/>
+                      <a:tailEnd type="none" w="med" len="med"/>
+                    </a:lnB>
+                    <a:noFill/>
+                  </a:tcPr>
+                </a:tc>
+                <a:tc>
+                  <a:txBody>
+                    <a:bodyPr/>
+                    <a:lstStyle/>
+                    <a:p>
+                      <a:r>
+                        <a:rPr lang="en-IN" dirty="0"/>
+                        <a:t>Hello World</a:t>
+                      </a:r>
+                    </a:p>
+                  </a:txBody>
+                  <a:tcPr anchor="ctr">
+                    <a:lnL w="12700" cap="flat" cmpd="sng" algn="ctr">
+                      <a:solidFill>
+                        <a:schemeClr val="bg1">
+                          <a:lumMod val="50000"/>
+                        </a:schemeClr>
+                      </a:solidFill>
+                      <a:prstDash val="solid"/>
+                      <a:round/>
+                      <a:headEnd type="none" w="med" len="med"/>
+                      <a:tailEnd type="none" w="med" len="med"/>
+                    </a:lnL>
+                    <a:lnR w="12700" cap="flat" cmpd="sng" algn="ctr">
+                      <a:solidFill>
+                        <a:schemeClr val="bg1">
+                          <a:lumMod val="50000"/>
+                        </a:schemeClr>
+                      </a:solidFill>
+                      <a:prstDash val="solid"/>
+                      <a:round/>
+                      <a:headEnd type="none" w="med" len="med"/>
+                      <a:tailEnd type="none" w="med" len="med"/>
+                    </a:lnR>
+                    <a:lnT w="12700" cap="flat" cmpd="sng" algn="ctr">
+                      <a:solidFill>
+                        <a:schemeClr val="bg1">
+                          <a:lumMod val="50000"/>
+                        </a:schemeClr>
+                      </a:solidFill>
+                      <a:prstDash val="solid"/>
+                      <a:round/>
+                      <a:headEnd type="none" w="med" len="med"/>
+                      <a:tailEnd type="none" w="med" len="med"/>
+                    </a:lnT>
+                    <a:lnB w="12700" cap="flat" cmpd="sng" algn="ctr">
+                      <a:solidFill>
+                        <a:schemeClr val="bg1">
+                          <a:lumMod val="50000"/>
+                        </a:schemeClr>
+                      </a:solidFill>
+                      <a:prstDash val="solid"/>
+                      <a:round/>
+                      <a:headEnd type="none" w="med" len="med"/>
+                      <a:tailEnd type="none" w="med" len="med"/>
+                    </a:lnB>
+                    <a:noFill/>
+                  </a:tcPr>
+                </a:tc>
+                <a:extLst>
+                  <a:ext uri="{0D108BD9-81ED-4DB2-BD59-A6C34878D82A}">
+                    <a16:rowId xmlns:a16="http://schemas.microsoft.com/office/drawing/2014/main" val="316519916"/>
+                  </a:ext>
+                </a:extLst>
+              </a:tr>
+              <a:tr h="0">
+                <a:tc>
+                  <a:txBody>
+                    <a:bodyPr/>
+                    <a:lstStyle/>
+                    <a:p>
+                      <a:pPr algn="ctr"/>
+                      <a:r>
+                        <a:rPr lang="en-IN"/>
+                        <a:t>\\</a:t>
+                      </a:r>
+                    </a:p>
+                  </a:txBody>
+                  <a:tcPr anchor="ctr">
+                    <a:lnL w="12700" cap="flat" cmpd="sng" algn="ctr">
+                      <a:solidFill>
+                        <a:schemeClr val="bg1">
+                          <a:lumMod val="50000"/>
+                        </a:schemeClr>
+                      </a:solidFill>
+                      <a:prstDash val="solid"/>
+                      <a:round/>
+                      <a:headEnd type="none" w="med" len="med"/>
+                      <a:tailEnd type="none" w="med" len="med"/>
+                    </a:lnL>
+                    <a:lnR w="12700" cap="flat" cmpd="sng" algn="ctr">
+                      <a:solidFill>
+                        <a:schemeClr val="bg1">
+                          <a:lumMod val="50000"/>
+                        </a:schemeClr>
+                      </a:solidFill>
+                      <a:prstDash val="solid"/>
+                      <a:round/>
+                      <a:headEnd type="none" w="med" len="med"/>
+                      <a:tailEnd type="none" w="med" len="med"/>
+                    </a:lnR>
+                    <a:lnT w="12700" cap="flat" cmpd="sng" algn="ctr">
+                      <a:solidFill>
+                        <a:schemeClr val="bg1">
+                          <a:lumMod val="50000"/>
+                        </a:schemeClr>
+                      </a:solidFill>
+                      <a:prstDash val="solid"/>
+                      <a:round/>
+                      <a:headEnd type="none" w="med" len="med"/>
+                      <a:tailEnd type="none" w="med" len="med"/>
+                    </a:lnT>
+                    <a:lnB w="12700" cap="flat" cmpd="sng" algn="ctr">
+                      <a:solidFill>
+                        <a:schemeClr val="bg1">
+                          <a:lumMod val="50000"/>
+                        </a:schemeClr>
+                      </a:solidFill>
+                      <a:prstDash val="solid"/>
+                      <a:round/>
+                      <a:headEnd type="none" w="med" len="med"/>
+                      <a:tailEnd type="none" w="med" len="med"/>
+                    </a:lnB>
+                    <a:noFill/>
+                  </a:tcPr>
+                </a:tc>
+                <a:tc>
+                  <a:txBody>
+                    <a:bodyPr/>
+                    <a:lstStyle/>
+                    <a:p>
+                      <a:r>
+                        <a:rPr lang="en-IN"/>
+                        <a:t>Backslash</a:t>
+                      </a:r>
+                    </a:p>
+                  </a:txBody>
+                  <a:tcPr anchor="ctr">
+                    <a:lnL w="12700" cap="flat" cmpd="sng" algn="ctr">
+                      <a:solidFill>
+                        <a:schemeClr val="bg1">
+                          <a:lumMod val="50000"/>
+                        </a:schemeClr>
+                      </a:solidFill>
+                      <a:prstDash val="solid"/>
+                      <a:round/>
+                      <a:headEnd type="none" w="med" len="med"/>
+                      <a:tailEnd type="none" w="med" len="med"/>
+                    </a:lnL>
+                    <a:lnR w="12700" cap="flat" cmpd="sng" algn="ctr">
+                      <a:solidFill>
+                        <a:schemeClr val="bg1">
+                          <a:lumMod val="50000"/>
+                        </a:schemeClr>
+                      </a:solidFill>
+                      <a:prstDash val="solid"/>
+                      <a:round/>
+                      <a:headEnd type="none" w="med" len="med"/>
+                      <a:tailEnd type="none" w="med" len="med"/>
+                    </a:lnR>
+                    <a:lnT w="12700" cap="flat" cmpd="sng" algn="ctr">
+                      <a:solidFill>
+                        <a:schemeClr val="bg1">
+                          <a:lumMod val="50000"/>
+                        </a:schemeClr>
+                      </a:solidFill>
+                      <a:prstDash val="solid"/>
+                      <a:round/>
+                      <a:headEnd type="none" w="med" len="med"/>
+                      <a:tailEnd type="none" w="med" len="med"/>
+                    </a:lnT>
+                    <a:lnB w="12700" cap="flat" cmpd="sng" algn="ctr">
+                      <a:solidFill>
+                        <a:schemeClr val="bg1">
+                          <a:lumMod val="50000"/>
+                        </a:schemeClr>
+                      </a:solidFill>
+                      <a:prstDash val="solid"/>
+                      <a:round/>
+                      <a:headEnd type="none" w="med" len="med"/>
+                      <a:tailEnd type="none" w="med" len="med"/>
+                    </a:lnB>
+                    <a:noFill/>
+                  </a:tcPr>
+                </a:tc>
+                <a:tc>
+                  <a:txBody>
+                    <a:bodyPr/>
+                    <a:lstStyle/>
+                    <a:p>
+                      <a:r>
+                        <a:rPr lang="en-US" dirty="0">
+                          <a:solidFill>
+                            <a:srgbClr val="0009C4"/>
+                          </a:solidFill>
+                        </a:rPr>
+                        <a:t>print</a:t>
+                      </a:r>
+                      <a:r>
+                        <a:rPr lang="en-US" dirty="0"/>
+                        <a:t>(</a:t>
+                      </a:r>
+                      <a:r>
+                        <a:rPr lang="en-US" dirty="0">
+                          <a:solidFill>
+                            <a:schemeClr val="accent6">
+                              <a:lumMod val="75000"/>
+                            </a:schemeClr>
+                          </a:solidFill>
+                        </a:rPr>
+                        <a:t>"C:\\Path\\To\\File"</a:t>
+                      </a:r>
+                      <a:r>
+                        <a:rPr lang="en-US" dirty="0"/>
+                        <a:t>)</a:t>
+                      </a:r>
+                    </a:p>
+                  </a:txBody>
+                  <a:tcPr anchor="ctr">
+                    <a:lnL w="12700" cap="flat" cmpd="sng" algn="ctr">
+                      <a:solidFill>
+                        <a:schemeClr val="bg1">
+                          <a:lumMod val="50000"/>
+                        </a:schemeClr>
+                      </a:solidFill>
+                      <a:prstDash val="solid"/>
+                      <a:round/>
+                      <a:headEnd type="none" w="med" len="med"/>
+                      <a:tailEnd type="none" w="med" len="med"/>
+                    </a:lnL>
+                    <a:lnR w="12700" cap="flat" cmpd="sng" algn="ctr">
+                      <a:solidFill>
+                        <a:schemeClr val="bg1">
+                          <a:lumMod val="50000"/>
+                        </a:schemeClr>
+                      </a:solidFill>
+                      <a:prstDash val="solid"/>
+                      <a:round/>
+                      <a:headEnd type="none" w="med" len="med"/>
+                      <a:tailEnd type="none" w="med" len="med"/>
+                    </a:lnR>
+                    <a:lnT w="12700" cap="flat" cmpd="sng" algn="ctr">
+                      <a:solidFill>
+                        <a:schemeClr val="bg1">
+                          <a:lumMod val="50000"/>
+                        </a:schemeClr>
+                      </a:solidFill>
+                      <a:prstDash val="solid"/>
+                      <a:round/>
+                      <a:headEnd type="none" w="med" len="med"/>
+                      <a:tailEnd type="none" w="med" len="med"/>
+                    </a:lnT>
+                    <a:lnB w="12700" cap="flat" cmpd="sng" algn="ctr">
+                      <a:solidFill>
+                        <a:schemeClr val="bg1">
+                          <a:lumMod val="50000"/>
+                        </a:schemeClr>
+                      </a:solidFill>
+                      <a:prstDash val="solid"/>
+                      <a:round/>
+                      <a:headEnd type="none" w="med" len="med"/>
+                      <a:tailEnd type="none" w="med" len="med"/>
+                    </a:lnB>
+                    <a:noFill/>
+                  </a:tcPr>
+                </a:tc>
+                <a:tc>
+                  <a:txBody>
+                    <a:bodyPr/>
+                    <a:lstStyle/>
+                    <a:p>
+                      <a:r>
+                        <a:rPr lang="en-IN"/>
+                        <a:t>C:\Path\To\File</a:t>
+                      </a:r>
+                    </a:p>
+                  </a:txBody>
+                  <a:tcPr anchor="ctr">
+                    <a:lnL w="12700" cap="flat" cmpd="sng" algn="ctr">
+                      <a:solidFill>
+                        <a:schemeClr val="bg1">
+                          <a:lumMod val="50000"/>
+                        </a:schemeClr>
+                      </a:solidFill>
+                      <a:prstDash val="solid"/>
+                      <a:round/>
+                      <a:headEnd type="none" w="med" len="med"/>
+                      <a:tailEnd type="none" w="med" len="med"/>
+                    </a:lnL>
+                    <a:lnR w="12700" cap="flat" cmpd="sng" algn="ctr">
+                      <a:solidFill>
+                        <a:schemeClr val="bg1">
+                          <a:lumMod val="50000"/>
+                        </a:schemeClr>
+                      </a:solidFill>
+                      <a:prstDash val="solid"/>
+                      <a:round/>
+                      <a:headEnd type="none" w="med" len="med"/>
+                      <a:tailEnd type="none" w="med" len="med"/>
+                    </a:lnR>
+                    <a:lnT w="12700" cap="flat" cmpd="sng" algn="ctr">
+                      <a:solidFill>
+                        <a:schemeClr val="bg1">
+                          <a:lumMod val="50000"/>
+                        </a:schemeClr>
+                      </a:solidFill>
+                      <a:prstDash val="solid"/>
+                      <a:round/>
+                      <a:headEnd type="none" w="med" len="med"/>
+                      <a:tailEnd type="none" w="med" len="med"/>
+                    </a:lnT>
+                    <a:lnB w="12700" cap="flat" cmpd="sng" algn="ctr">
+                      <a:solidFill>
+                        <a:schemeClr val="bg1">
+                          <a:lumMod val="50000"/>
+                        </a:schemeClr>
+                      </a:solidFill>
+                      <a:prstDash val="solid"/>
+                      <a:round/>
+                      <a:headEnd type="none" w="med" len="med"/>
+                      <a:tailEnd type="none" w="med" len="med"/>
+                    </a:lnB>
+                    <a:noFill/>
+                  </a:tcPr>
+                </a:tc>
+                <a:extLst>
+                  <a:ext uri="{0D108BD9-81ED-4DB2-BD59-A6C34878D82A}">
+                    <a16:rowId xmlns:a16="http://schemas.microsoft.com/office/drawing/2014/main" val="283177717"/>
+                  </a:ext>
+                </a:extLst>
+              </a:tr>
+              <a:tr h="0">
+                <a:tc>
+                  <a:txBody>
+                    <a:bodyPr/>
+                    <a:lstStyle/>
+                    <a:p>
+                      <a:pPr algn="ctr"/>
+                      <a:r>
+                        <a:rPr lang="en-IN"/>
+                        <a:t>\'</a:t>
+                      </a:r>
+                    </a:p>
+                  </a:txBody>
+                  <a:tcPr anchor="ctr">
+                    <a:lnL w="12700" cap="flat" cmpd="sng" algn="ctr">
+                      <a:solidFill>
+                        <a:schemeClr val="bg1">
+                          <a:lumMod val="50000"/>
+                        </a:schemeClr>
+                      </a:solidFill>
+                      <a:prstDash val="solid"/>
+                      <a:round/>
+                      <a:headEnd type="none" w="med" len="med"/>
+                      <a:tailEnd type="none" w="med" len="med"/>
+                    </a:lnL>
+                    <a:lnR w="12700" cap="flat" cmpd="sng" algn="ctr">
+                      <a:solidFill>
+                        <a:schemeClr val="bg1">
+                          <a:lumMod val="50000"/>
+                        </a:schemeClr>
+                      </a:solidFill>
+                      <a:prstDash val="solid"/>
+                      <a:round/>
+                      <a:headEnd type="none" w="med" len="med"/>
+                      <a:tailEnd type="none" w="med" len="med"/>
+                    </a:lnR>
+                    <a:lnT w="12700" cap="flat" cmpd="sng" algn="ctr">
+                      <a:solidFill>
+                        <a:schemeClr val="bg1">
+                          <a:lumMod val="50000"/>
+                        </a:schemeClr>
+                      </a:solidFill>
+                      <a:prstDash val="solid"/>
+                      <a:round/>
+                      <a:headEnd type="none" w="med" len="med"/>
+                      <a:tailEnd type="none" w="med" len="med"/>
+                    </a:lnT>
+                    <a:lnB w="12700" cap="flat" cmpd="sng" algn="ctr">
+                      <a:solidFill>
+                        <a:schemeClr val="bg1">
+                          <a:lumMod val="50000"/>
+                        </a:schemeClr>
+                      </a:solidFill>
+                      <a:prstDash val="solid"/>
+                      <a:round/>
+                      <a:headEnd type="none" w="med" len="med"/>
+                      <a:tailEnd type="none" w="med" len="med"/>
+                    </a:lnB>
+                    <a:noFill/>
+                  </a:tcPr>
+                </a:tc>
+                <a:tc>
+                  <a:txBody>
+                    <a:bodyPr/>
+                    <a:lstStyle/>
+                    <a:p>
+                      <a:r>
+                        <a:rPr lang="en-IN"/>
+                        <a:t>Single Quote</a:t>
+                      </a:r>
+                    </a:p>
+                  </a:txBody>
+                  <a:tcPr anchor="ctr">
+                    <a:lnL w="12700" cap="flat" cmpd="sng" algn="ctr">
+                      <a:solidFill>
+                        <a:schemeClr val="bg1">
+                          <a:lumMod val="50000"/>
+                        </a:schemeClr>
+                      </a:solidFill>
+                      <a:prstDash val="solid"/>
+                      <a:round/>
+                      <a:headEnd type="none" w="med" len="med"/>
+                      <a:tailEnd type="none" w="med" len="med"/>
+                    </a:lnL>
+                    <a:lnR w="12700" cap="flat" cmpd="sng" algn="ctr">
+                      <a:solidFill>
+                        <a:schemeClr val="bg1">
+                          <a:lumMod val="50000"/>
+                        </a:schemeClr>
+                      </a:solidFill>
+                      <a:prstDash val="solid"/>
+                      <a:round/>
+                      <a:headEnd type="none" w="med" len="med"/>
+                      <a:tailEnd type="none" w="med" len="med"/>
+                    </a:lnR>
+                    <a:lnT w="12700" cap="flat" cmpd="sng" algn="ctr">
+                      <a:solidFill>
+                        <a:schemeClr val="bg1">
+                          <a:lumMod val="50000"/>
+                        </a:schemeClr>
+                      </a:solidFill>
+                      <a:prstDash val="solid"/>
+                      <a:round/>
+                      <a:headEnd type="none" w="med" len="med"/>
+                      <a:tailEnd type="none" w="med" len="med"/>
+                    </a:lnT>
+                    <a:lnB w="12700" cap="flat" cmpd="sng" algn="ctr">
+                      <a:solidFill>
+                        <a:schemeClr val="bg1">
+                          <a:lumMod val="50000"/>
+                        </a:schemeClr>
+                      </a:solidFill>
+                      <a:prstDash val="solid"/>
+                      <a:round/>
+                      <a:headEnd type="none" w="med" len="med"/>
+                      <a:tailEnd type="none" w="med" len="med"/>
+                    </a:lnB>
+                    <a:noFill/>
+                  </a:tcPr>
+                </a:tc>
+                <a:tc>
+                  <a:txBody>
+                    <a:bodyPr/>
+                    <a:lstStyle/>
+                    <a:p>
+                      <a:r>
+                        <a:rPr lang="en-IN" dirty="0">
+                          <a:solidFill>
+                            <a:srgbClr val="0009C4"/>
+                          </a:solidFill>
+                        </a:rPr>
+                        <a:t>print</a:t>
+                      </a:r>
+                      <a:r>
+                        <a:rPr lang="en-IN" dirty="0"/>
+                        <a:t>(</a:t>
+                      </a:r>
+                      <a:r>
+                        <a:rPr lang="en-IN" dirty="0">
+                          <a:solidFill>
+                            <a:schemeClr val="accent6">
+                              <a:lumMod val="75000"/>
+                            </a:schemeClr>
+                          </a:solidFill>
+                        </a:rPr>
+                        <a:t>“It\'s fine”</a:t>
+                      </a:r>
+                      <a:r>
+                        <a:rPr lang="en-IN" dirty="0"/>
+                        <a:t>)</a:t>
+                      </a:r>
+                    </a:p>
+                  </a:txBody>
+                  <a:tcPr anchor="ctr">
+                    <a:lnL w="12700" cap="flat" cmpd="sng" algn="ctr">
+                      <a:solidFill>
+                        <a:schemeClr val="bg1">
+                          <a:lumMod val="50000"/>
+                        </a:schemeClr>
+                      </a:solidFill>
+                      <a:prstDash val="solid"/>
+                      <a:round/>
+                      <a:headEnd type="none" w="med" len="med"/>
+                      <a:tailEnd type="none" w="med" len="med"/>
+                    </a:lnL>
+                    <a:lnR w="12700" cap="flat" cmpd="sng" algn="ctr">
+                      <a:solidFill>
+                        <a:schemeClr val="bg1">
+                          <a:lumMod val="50000"/>
+                        </a:schemeClr>
+                      </a:solidFill>
+                      <a:prstDash val="solid"/>
+                      <a:round/>
+                      <a:headEnd type="none" w="med" len="med"/>
+                      <a:tailEnd type="none" w="med" len="med"/>
+                    </a:lnR>
+                    <a:lnT w="12700" cap="flat" cmpd="sng" algn="ctr">
+                      <a:solidFill>
+                        <a:schemeClr val="bg1">
+                          <a:lumMod val="50000"/>
+                        </a:schemeClr>
+                      </a:solidFill>
+                      <a:prstDash val="solid"/>
+                      <a:round/>
+                      <a:headEnd type="none" w="med" len="med"/>
+                      <a:tailEnd type="none" w="med" len="med"/>
+                    </a:lnT>
+                    <a:lnB w="12700" cap="flat" cmpd="sng" algn="ctr">
+                      <a:solidFill>
+                        <a:schemeClr val="bg1">
+                          <a:lumMod val="50000"/>
+                        </a:schemeClr>
+                      </a:solidFill>
+                      <a:prstDash val="solid"/>
+                      <a:round/>
+                      <a:headEnd type="none" w="med" len="med"/>
+                      <a:tailEnd type="none" w="med" len="med"/>
+                    </a:lnB>
+                    <a:noFill/>
+                  </a:tcPr>
+                </a:tc>
+                <a:tc>
+                  <a:txBody>
+                    <a:bodyPr/>
+                    <a:lstStyle/>
+                    <a:p>
+                      <a:r>
+                        <a:rPr lang="en-IN"/>
+                        <a:t>It's fine</a:t>
+                      </a:r>
+                    </a:p>
+                  </a:txBody>
+                  <a:tcPr anchor="ctr">
+                    <a:lnL w="12700" cap="flat" cmpd="sng" algn="ctr">
+                      <a:solidFill>
+                        <a:schemeClr val="bg1">
+                          <a:lumMod val="50000"/>
+                        </a:schemeClr>
+                      </a:solidFill>
+                      <a:prstDash val="solid"/>
+                      <a:round/>
+                      <a:headEnd type="none" w="med" len="med"/>
+                      <a:tailEnd type="none" w="med" len="med"/>
+                    </a:lnL>
+                    <a:lnR w="12700" cap="flat" cmpd="sng" algn="ctr">
+                      <a:solidFill>
+                        <a:schemeClr val="bg1">
+                          <a:lumMod val="50000"/>
+                        </a:schemeClr>
+                      </a:solidFill>
+                      <a:prstDash val="solid"/>
+                      <a:round/>
+                      <a:headEnd type="none" w="med" len="med"/>
+                      <a:tailEnd type="none" w="med" len="med"/>
+                    </a:lnR>
+                    <a:lnT w="12700" cap="flat" cmpd="sng" algn="ctr">
+                      <a:solidFill>
+                        <a:schemeClr val="bg1">
+                          <a:lumMod val="50000"/>
+                        </a:schemeClr>
+                      </a:solidFill>
+                      <a:prstDash val="solid"/>
+                      <a:round/>
+                      <a:headEnd type="none" w="med" len="med"/>
+                      <a:tailEnd type="none" w="med" len="med"/>
+                    </a:lnT>
+                    <a:lnB w="12700" cap="flat" cmpd="sng" algn="ctr">
+                      <a:solidFill>
+                        <a:schemeClr val="bg1">
+                          <a:lumMod val="50000"/>
+                        </a:schemeClr>
+                      </a:solidFill>
+                      <a:prstDash val="solid"/>
+                      <a:round/>
+                      <a:headEnd type="none" w="med" len="med"/>
+                      <a:tailEnd type="none" w="med" len="med"/>
+                    </a:lnB>
+                    <a:noFill/>
+                  </a:tcPr>
+                </a:tc>
+                <a:extLst>
+                  <a:ext uri="{0D108BD9-81ED-4DB2-BD59-A6C34878D82A}">
+                    <a16:rowId xmlns:a16="http://schemas.microsoft.com/office/drawing/2014/main" val="3203445103"/>
+                  </a:ext>
+                </a:extLst>
+              </a:tr>
+              <a:tr h="0">
+                <a:tc>
+                  <a:txBody>
+                    <a:bodyPr/>
+                    <a:lstStyle/>
+                    <a:p>
+                      <a:pPr algn="ctr"/>
+                      <a:r>
+                        <a:rPr lang="en-IN"/>
+                        <a:t>\"</a:t>
+                      </a:r>
+                    </a:p>
+                  </a:txBody>
+                  <a:tcPr anchor="ctr">
+                    <a:lnL w="12700" cap="flat" cmpd="sng" algn="ctr">
+                      <a:solidFill>
+                        <a:schemeClr val="bg1">
+                          <a:lumMod val="50000"/>
+                        </a:schemeClr>
+                      </a:solidFill>
+                      <a:prstDash val="solid"/>
+                      <a:round/>
+                      <a:headEnd type="none" w="med" len="med"/>
+                      <a:tailEnd type="none" w="med" len="med"/>
+                    </a:lnL>
+                    <a:lnR w="12700" cap="flat" cmpd="sng" algn="ctr">
+                      <a:solidFill>
+                        <a:schemeClr val="bg1">
+                          <a:lumMod val="50000"/>
+                        </a:schemeClr>
+                      </a:solidFill>
+                      <a:prstDash val="solid"/>
+                      <a:round/>
+                      <a:headEnd type="none" w="med" len="med"/>
+                      <a:tailEnd type="none" w="med" len="med"/>
+                    </a:lnR>
+                    <a:lnT w="12700" cap="flat" cmpd="sng" algn="ctr">
+                      <a:solidFill>
+                        <a:schemeClr val="bg1">
+                          <a:lumMod val="50000"/>
+                        </a:schemeClr>
+                      </a:solidFill>
+                      <a:prstDash val="solid"/>
+                      <a:round/>
+                      <a:headEnd type="none" w="med" len="med"/>
+                      <a:tailEnd type="none" w="med" len="med"/>
+                    </a:lnT>
+                    <a:lnB w="12700" cap="flat" cmpd="sng" algn="ctr">
+                      <a:solidFill>
+                        <a:schemeClr val="bg1">
+                          <a:lumMod val="50000"/>
+                        </a:schemeClr>
+                      </a:solidFill>
+                      <a:prstDash val="solid"/>
+                      <a:round/>
+                      <a:headEnd type="none" w="med" len="med"/>
+                      <a:tailEnd type="none" w="med" len="med"/>
+                    </a:lnB>
+                    <a:noFill/>
+                  </a:tcPr>
+                </a:tc>
+                <a:tc>
+                  <a:txBody>
+                    <a:bodyPr/>
+                    <a:lstStyle/>
+                    <a:p>
+                      <a:r>
+                        <a:rPr lang="en-IN"/>
+                        <a:t>Double Quote</a:t>
+                      </a:r>
+                    </a:p>
+                  </a:txBody>
+                  <a:tcPr anchor="ctr">
+                    <a:lnL w="12700" cap="flat" cmpd="sng" algn="ctr">
+                      <a:solidFill>
+                        <a:schemeClr val="bg1">
+                          <a:lumMod val="50000"/>
+                        </a:schemeClr>
+                      </a:solidFill>
+                      <a:prstDash val="solid"/>
+                      <a:round/>
+                      <a:headEnd type="none" w="med" len="med"/>
+                      <a:tailEnd type="none" w="med" len="med"/>
+                    </a:lnL>
+                    <a:lnR w="12700" cap="flat" cmpd="sng" algn="ctr">
+                      <a:solidFill>
+                        <a:schemeClr val="bg1">
+                          <a:lumMod val="50000"/>
+                        </a:schemeClr>
+                      </a:solidFill>
+                      <a:prstDash val="solid"/>
+                      <a:round/>
+                      <a:headEnd type="none" w="med" len="med"/>
+                      <a:tailEnd type="none" w="med" len="med"/>
+                    </a:lnR>
+                    <a:lnT w="12700" cap="flat" cmpd="sng" algn="ctr">
+                      <a:solidFill>
+                        <a:schemeClr val="bg1">
+                          <a:lumMod val="50000"/>
+                        </a:schemeClr>
+                      </a:solidFill>
+                      <a:prstDash val="solid"/>
+                      <a:round/>
+                      <a:headEnd type="none" w="med" len="med"/>
+                      <a:tailEnd type="none" w="med" len="med"/>
+                    </a:lnT>
+                    <a:lnB w="12700" cap="flat" cmpd="sng" algn="ctr">
+                      <a:solidFill>
+                        <a:schemeClr val="bg1">
+                          <a:lumMod val="50000"/>
+                        </a:schemeClr>
+                      </a:solidFill>
+                      <a:prstDash val="solid"/>
+                      <a:round/>
+                      <a:headEnd type="none" w="med" len="med"/>
+                      <a:tailEnd type="none" w="med" len="med"/>
+                    </a:lnB>
+                    <a:noFill/>
+                  </a:tcPr>
+                </a:tc>
+                <a:tc>
+                  <a:txBody>
+                    <a:bodyPr/>
+                    <a:lstStyle/>
+                    <a:p>
+                      <a:r>
+                        <a:rPr lang="en-IN" dirty="0">
+                          <a:solidFill>
+                            <a:srgbClr val="0009C4"/>
+                          </a:solidFill>
+                        </a:rPr>
+                        <a:t>print</a:t>
+                      </a:r>
+                      <a:r>
+                        <a:rPr lang="en-IN" dirty="0"/>
+                        <a:t>(</a:t>
+                      </a:r>
+                      <a:r>
+                        <a:rPr lang="en-IN" dirty="0">
+                          <a:solidFill>
+                            <a:schemeClr val="accent6">
+                              <a:lumMod val="75000"/>
+                            </a:schemeClr>
+                          </a:solidFill>
+                        </a:rPr>
+                        <a:t>"He said, \"Hi\""</a:t>
+                      </a:r>
+                      <a:r>
+                        <a:rPr lang="en-IN" dirty="0"/>
+                        <a:t>)</a:t>
+                      </a:r>
+                    </a:p>
+                  </a:txBody>
+                  <a:tcPr anchor="ctr">
+                    <a:lnL w="12700" cap="flat" cmpd="sng" algn="ctr">
+                      <a:solidFill>
+                        <a:schemeClr val="bg1">
+                          <a:lumMod val="50000"/>
+                        </a:schemeClr>
+                      </a:solidFill>
+                      <a:prstDash val="solid"/>
+                      <a:round/>
+                      <a:headEnd type="none" w="med" len="med"/>
+                      <a:tailEnd type="none" w="med" len="med"/>
+                    </a:lnL>
+                    <a:lnR w="12700" cap="flat" cmpd="sng" algn="ctr">
+                      <a:solidFill>
+                        <a:schemeClr val="bg1">
+                          <a:lumMod val="50000"/>
+                        </a:schemeClr>
+                      </a:solidFill>
+                      <a:prstDash val="solid"/>
+                      <a:round/>
+                      <a:headEnd type="none" w="med" len="med"/>
+                      <a:tailEnd type="none" w="med" len="med"/>
+                    </a:lnR>
+                    <a:lnT w="12700" cap="flat" cmpd="sng" algn="ctr">
+                      <a:solidFill>
+                        <a:schemeClr val="bg1">
+                          <a:lumMod val="50000"/>
+                        </a:schemeClr>
+                      </a:solidFill>
+                      <a:prstDash val="solid"/>
+                      <a:round/>
+                      <a:headEnd type="none" w="med" len="med"/>
+                      <a:tailEnd type="none" w="med" len="med"/>
+                    </a:lnT>
+                    <a:lnB w="12700" cap="flat" cmpd="sng" algn="ctr">
+                      <a:solidFill>
+                        <a:schemeClr val="bg1">
+                          <a:lumMod val="50000"/>
+                        </a:schemeClr>
+                      </a:solidFill>
+                      <a:prstDash val="solid"/>
+                      <a:round/>
+                      <a:headEnd type="none" w="med" len="med"/>
+                      <a:tailEnd type="none" w="med" len="med"/>
+                    </a:lnB>
+                    <a:noFill/>
+                  </a:tcPr>
+                </a:tc>
+                <a:tc>
+                  <a:txBody>
+                    <a:bodyPr/>
+                    <a:lstStyle/>
+                    <a:p>
+                      <a:r>
+                        <a:rPr lang="en-IN"/>
+                        <a:t>He said, "Hi"</a:t>
+                      </a:r>
+                    </a:p>
+                  </a:txBody>
+                  <a:tcPr anchor="ctr">
+                    <a:lnL w="12700" cap="flat" cmpd="sng" algn="ctr">
+                      <a:solidFill>
+                        <a:schemeClr val="bg1">
+                          <a:lumMod val="50000"/>
+                        </a:schemeClr>
+                      </a:solidFill>
+                      <a:prstDash val="solid"/>
+                      <a:round/>
+                      <a:headEnd type="none" w="med" len="med"/>
+                      <a:tailEnd type="none" w="med" len="med"/>
+                    </a:lnL>
+                    <a:lnR w="12700" cap="flat" cmpd="sng" algn="ctr">
+                      <a:solidFill>
+                        <a:schemeClr val="bg1">
+                          <a:lumMod val="50000"/>
+                        </a:schemeClr>
+                      </a:solidFill>
+                      <a:prstDash val="solid"/>
+                      <a:round/>
+                      <a:headEnd type="none" w="med" len="med"/>
+                      <a:tailEnd type="none" w="med" len="med"/>
+                    </a:lnR>
+                    <a:lnT w="12700" cap="flat" cmpd="sng" algn="ctr">
+                      <a:solidFill>
+                        <a:schemeClr val="bg1">
+                          <a:lumMod val="50000"/>
+                        </a:schemeClr>
+                      </a:solidFill>
+                      <a:prstDash val="solid"/>
+                      <a:round/>
+                      <a:headEnd type="none" w="med" len="med"/>
+                      <a:tailEnd type="none" w="med" len="med"/>
+                    </a:lnT>
+                    <a:lnB w="12700" cap="flat" cmpd="sng" algn="ctr">
+                      <a:solidFill>
+                        <a:schemeClr val="bg1">
+                          <a:lumMod val="50000"/>
+                        </a:schemeClr>
+                      </a:solidFill>
+                      <a:prstDash val="solid"/>
+                      <a:round/>
+                      <a:headEnd type="none" w="med" len="med"/>
+                      <a:tailEnd type="none" w="med" len="med"/>
+                    </a:lnB>
+                    <a:noFill/>
+                  </a:tcPr>
+                </a:tc>
+                <a:extLst>
+                  <a:ext uri="{0D108BD9-81ED-4DB2-BD59-A6C34878D82A}">
+                    <a16:rowId xmlns:a16="http://schemas.microsoft.com/office/drawing/2014/main" val="4256819050"/>
+                  </a:ext>
+                </a:extLst>
+              </a:tr>
+              <a:tr h="0">
+                <a:tc>
+                  <a:txBody>
+                    <a:bodyPr/>
+                    <a:lstStyle/>
+                    <a:p>
+                      <a:pPr algn="ctr"/>
+                      <a:r>
+                        <a:rPr lang="en-IN"/>
+                        <a:t>\r</a:t>
+                      </a:r>
+                    </a:p>
+                  </a:txBody>
+                  <a:tcPr anchor="ctr">
+                    <a:lnL w="12700" cap="flat" cmpd="sng" algn="ctr">
+                      <a:solidFill>
+                        <a:schemeClr val="bg1">
+                          <a:lumMod val="50000"/>
+                        </a:schemeClr>
+                      </a:solidFill>
+                      <a:prstDash val="solid"/>
+                      <a:round/>
+                      <a:headEnd type="none" w="med" len="med"/>
+                      <a:tailEnd type="none" w="med" len="med"/>
+                    </a:lnL>
+                    <a:lnR w="12700" cap="flat" cmpd="sng" algn="ctr">
+                      <a:solidFill>
+                        <a:schemeClr val="bg1">
+                          <a:lumMod val="50000"/>
+                        </a:schemeClr>
+                      </a:solidFill>
+                      <a:prstDash val="solid"/>
+                      <a:round/>
+                      <a:headEnd type="none" w="med" len="med"/>
+                      <a:tailEnd type="none" w="med" len="med"/>
+                    </a:lnR>
+                    <a:lnT w="12700" cap="flat" cmpd="sng" algn="ctr">
+                      <a:solidFill>
+                        <a:schemeClr val="bg1">
+                          <a:lumMod val="50000"/>
+                        </a:schemeClr>
+                      </a:solidFill>
+                      <a:prstDash val="solid"/>
+                      <a:round/>
+                      <a:headEnd type="none" w="med" len="med"/>
+                      <a:tailEnd type="none" w="med" len="med"/>
+                    </a:lnT>
+                    <a:lnB w="12700" cap="flat" cmpd="sng" algn="ctr">
+                      <a:solidFill>
+                        <a:schemeClr val="bg1">
+                          <a:lumMod val="50000"/>
+                        </a:schemeClr>
+                      </a:solidFill>
+                      <a:prstDash val="solid"/>
+                      <a:round/>
+                      <a:headEnd type="none" w="med" len="med"/>
+                      <a:tailEnd type="none" w="med" len="med"/>
+                    </a:lnB>
+                    <a:noFill/>
+                  </a:tcPr>
+                </a:tc>
+                <a:tc>
+                  <a:txBody>
+                    <a:bodyPr/>
+                    <a:lstStyle/>
+                    <a:p>
+                      <a:r>
+                        <a:rPr lang="en-IN"/>
+                        <a:t>Carriage Return</a:t>
+                      </a:r>
+                    </a:p>
+                  </a:txBody>
+                  <a:tcPr anchor="ctr">
+                    <a:lnL w="12700" cap="flat" cmpd="sng" algn="ctr">
+                      <a:solidFill>
+                        <a:schemeClr val="bg1">
+                          <a:lumMod val="50000"/>
+                        </a:schemeClr>
+                      </a:solidFill>
+                      <a:prstDash val="solid"/>
+                      <a:round/>
+                      <a:headEnd type="none" w="med" len="med"/>
+                      <a:tailEnd type="none" w="med" len="med"/>
+                    </a:lnL>
+                    <a:lnR w="12700" cap="flat" cmpd="sng" algn="ctr">
+                      <a:solidFill>
+                        <a:schemeClr val="bg1">
+                          <a:lumMod val="50000"/>
+                        </a:schemeClr>
+                      </a:solidFill>
+                      <a:prstDash val="solid"/>
+                      <a:round/>
+                      <a:headEnd type="none" w="med" len="med"/>
+                      <a:tailEnd type="none" w="med" len="med"/>
+                    </a:lnR>
+                    <a:lnT w="12700" cap="flat" cmpd="sng" algn="ctr">
+                      <a:solidFill>
+                        <a:schemeClr val="bg1">
+                          <a:lumMod val="50000"/>
+                        </a:schemeClr>
+                      </a:solidFill>
+                      <a:prstDash val="solid"/>
+                      <a:round/>
+                      <a:headEnd type="none" w="med" len="med"/>
+                      <a:tailEnd type="none" w="med" len="med"/>
+                    </a:lnT>
+                    <a:lnB w="12700" cap="flat" cmpd="sng" algn="ctr">
+                      <a:solidFill>
+                        <a:schemeClr val="bg1">
+                          <a:lumMod val="50000"/>
+                        </a:schemeClr>
+                      </a:solidFill>
+                      <a:prstDash val="solid"/>
+                      <a:round/>
+                      <a:headEnd type="none" w="med" len="med"/>
+                      <a:tailEnd type="none" w="med" len="med"/>
+                    </a:lnB>
+                    <a:noFill/>
+                  </a:tcPr>
+                </a:tc>
+                <a:tc>
+                  <a:txBody>
+                    <a:bodyPr/>
+                    <a:lstStyle/>
+                    <a:p>
+                      <a:r>
+                        <a:rPr lang="en-IN" dirty="0">
+                          <a:solidFill>
+                            <a:srgbClr val="0009C4"/>
+                          </a:solidFill>
+                        </a:rPr>
+                        <a:t>print</a:t>
+                      </a:r>
+                      <a:r>
+                        <a:rPr lang="en-IN" dirty="0"/>
+                        <a:t>(</a:t>
+                      </a:r>
+                      <a:r>
+                        <a:rPr lang="en-IN" dirty="0">
+                          <a:solidFill>
+                            <a:schemeClr val="accent6">
+                              <a:lumMod val="75000"/>
+                            </a:schemeClr>
+                          </a:solidFill>
+                        </a:rPr>
+                        <a:t>"12345\</a:t>
+                      </a:r>
+                      <a:r>
+                        <a:rPr lang="en-IN" dirty="0" err="1">
+                          <a:solidFill>
+                            <a:schemeClr val="accent6">
+                              <a:lumMod val="75000"/>
+                            </a:schemeClr>
+                          </a:solidFill>
+                        </a:rPr>
+                        <a:t>rHello</a:t>
+                      </a:r>
+                      <a:r>
+                        <a:rPr lang="en-IN" dirty="0">
+                          <a:solidFill>
+                            <a:schemeClr val="accent6">
+                              <a:lumMod val="75000"/>
+                            </a:schemeClr>
+                          </a:solidFill>
+                        </a:rPr>
+                        <a:t>"</a:t>
+                      </a:r>
+                      <a:r>
+                        <a:rPr lang="en-IN" dirty="0"/>
+                        <a:t>)</a:t>
+                      </a:r>
+                    </a:p>
+                  </a:txBody>
+                  <a:tcPr anchor="ctr">
+                    <a:lnL w="12700" cap="flat" cmpd="sng" algn="ctr">
+                      <a:solidFill>
+                        <a:schemeClr val="bg1">
+                          <a:lumMod val="50000"/>
+                        </a:schemeClr>
+                      </a:solidFill>
+                      <a:prstDash val="solid"/>
+                      <a:round/>
+                      <a:headEnd type="none" w="med" len="med"/>
+                      <a:tailEnd type="none" w="med" len="med"/>
+                    </a:lnL>
+                    <a:lnR w="12700" cap="flat" cmpd="sng" algn="ctr">
+                      <a:solidFill>
+                        <a:schemeClr val="bg1">
+                          <a:lumMod val="50000"/>
+                        </a:schemeClr>
+                      </a:solidFill>
+                      <a:prstDash val="solid"/>
+                      <a:round/>
+                      <a:headEnd type="none" w="med" len="med"/>
+                      <a:tailEnd type="none" w="med" len="med"/>
+                    </a:lnR>
+                    <a:lnT w="12700" cap="flat" cmpd="sng" algn="ctr">
+                      <a:solidFill>
+                        <a:schemeClr val="bg1">
+                          <a:lumMod val="50000"/>
+                        </a:schemeClr>
+                      </a:solidFill>
+                      <a:prstDash val="solid"/>
+                      <a:round/>
+                      <a:headEnd type="none" w="med" len="med"/>
+                      <a:tailEnd type="none" w="med" len="med"/>
+                    </a:lnT>
+                    <a:lnB w="12700" cap="flat" cmpd="sng" algn="ctr">
+                      <a:solidFill>
+                        <a:schemeClr val="bg1">
+                          <a:lumMod val="50000"/>
+                        </a:schemeClr>
+                      </a:solidFill>
+                      <a:prstDash val="solid"/>
+                      <a:round/>
+                      <a:headEnd type="none" w="med" len="med"/>
+                      <a:tailEnd type="none" w="med" len="med"/>
+                    </a:lnB>
+                    <a:noFill/>
+                  </a:tcPr>
+                </a:tc>
+                <a:tc>
+                  <a:txBody>
+                    <a:bodyPr/>
+                    <a:lstStyle/>
+                    <a:p>
+                      <a:r>
+                        <a:rPr lang="en-IN"/>
+                        <a:t>Hello (overwrites)</a:t>
+                      </a:r>
+                    </a:p>
+                  </a:txBody>
+                  <a:tcPr anchor="ctr">
+                    <a:lnL w="12700" cap="flat" cmpd="sng" algn="ctr">
+                      <a:solidFill>
+                        <a:schemeClr val="bg1">
+                          <a:lumMod val="50000"/>
+                        </a:schemeClr>
+                      </a:solidFill>
+                      <a:prstDash val="solid"/>
+                      <a:round/>
+                      <a:headEnd type="none" w="med" len="med"/>
+                      <a:tailEnd type="none" w="med" len="med"/>
+                    </a:lnL>
+                    <a:lnR w="12700" cap="flat" cmpd="sng" algn="ctr">
+                      <a:solidFill>
+                        <a:schemeClr val="bg1">
+                          <a:lumMod val="50000"/>
+                        </a:schemeClr>
+                      </a:solidFill>
+                      <a:prstDash val="solid"/>
+                      <a:round/>
+                      <a:headEnd type="none" w="med" len="med"/>
+                      <a:tailEnd type="none" w="med" len="med"/>
+                    </a:lnR>
+                    <a:lnT w="12700" cap="flat" cmpd="sng" algn="ctr">
+                      <a:solidFill>
+                        <a:schemeClr val="bg1">
+                          <a:lumMod val="50000"/>
+                        </a:schemeClr>
+                      </a:solidFill>
+                      <a:prstDash val="solid"/>
+                      <a:round/>
+                      <a:headEnd type="none" w="med" len="med"/>
+                      <a:tailEnd type="none" w="med" len="med"/>
+                    </a:lnT>
+                    <a:lnB w="12700" cap="flat" cmpd="sng" algn="ctr">
+                      <a:solidFill>
+                        <a:schemeClr val="bg1">
+                          <a:lumMod val="50000"/>
+                        </a:schemeClr>
+                      </a:solidFill>
+                      <a:prstDash val="solid"/>
+                      <a:round/>
+                      <a:headEnd type="none" w="med" len="med"/>
+                      <a:tailEnd type="none" w="med" len="med"/>
+                    </a:lnB>
+                    <a:noFill/>
+                  </a:tcPr>
+                </a:tc>
+                <a:extLst>
+                  <a:ext uri="{0D108BD9-81ED-4DB2-BD59-A6C34878D82A}">
+                    <a16:rowId xmlns:a16="http://schemas.microsoft.com/office/drawing/2014/main" val="3484184242"/>
+                  </a:ext>
+                </a:extLst>
+              </a:tr>
+              <a:tr h="0">
+                <a:tc>
+                  <a:txBody>
+                    <a:bodyPr/>
+                    <a:lstStyle/>
+                    <a:p>
+                      <a:pPr algn="ctr"/>
+                      <a:r>
+                        <a:rPr lang="en-IN" dirty="0"/>
+                        <a:t>\b</a:t>
+                      </a:r>
+                    </a:p>
+                  </a:txBody>
+                  <a:tcPr anchor="ctr">
+                    <a:lnL w="12700" cap="flat" cmpd="sng" algn="ctr">
+                      <a:solidFill>
+                        <a:schemeClr val="bg1">
+                          <a:lumMod val="50000"/>
+                        </a:schemeClr>
+                      </a:solidFill>
+                      <a:prstDash val="solid"/>
+                      <a:round/>
+                      <a:headEnd type="none" w="med" len="med"/>
+                      <a:tailEnd type="none" w="med" len="med"/>
+                    </a:lnL>
+                    <a:lnR w="12700" cap="flat" cmpd="sng" algn="ctr">
+                      <a:solidFill>
+                        <a:schemeClr val="bg1">
+                          <a:lumMod val="50000"/>
+                        </a:schemeClr>
+                      </a:solidFill>
+                      <a:prstDash val="solid"/>
+                      <a:round/>
+                      <a:headEnd type="none" w="med" len="med"/>
+                      <a:tailEnd type="none" w="med" len="med"/>
+                    </a:lnR>
+                    <a:lnT w="12700" cap="flat" cmpd="sng" algn="ctr">
+                      <a:solidFill>
+                        <a:schemeClr val="bg1">
+                          <a:lumMod val="50000"/>
+                        </a:schemeClr>
+                      </a:solidFill>
+                      <a:prstDash val="solid"/>
+                      <a:round/>
+                      <a:headEnd type="none" w="med" len="med"/>
+                      <a:tailEnd type="none" w="med" len="med"/>
+                    </a:lnT>
+                    <a:lnB w="12700" cap="flat" cmpd="sng" algn="ctr">
+                      <a:solidFill>
+                        <a:schemeClr val="bg1">
+                          <a:lumMod val="50000"/>
+                        </a:schemeClr>
+                      </a:solidFill>
+                      <a:prstDash val="solid"/>
+                      <a:round/>
+                      <a:headEnd type="none" w="med" len="med"/>
+                      <a:tailEnd type="none" w="med" len="med"/>
+                    </a:lnB>
+                    <a:noFill/>
+                  </a:tcPr>
+                </a:tc>
+                <a:tc>
+                  <a:txBody>
+                    <a:bodyPr/>
+                    <a:lstStyle/>
+                    <a:p>
+                      <a:r>
+                        <a:rPr lang="en-IN" dirty="0"/>
+                        <a:t>Backspace</a:t>
+                      </a:r>
+                    </a:p>
+                  </a:txBody>
+                  <a:tcPr anchor="ctr">
+                    <a:lnL w="12700" cap="flat" cmpd="sng" algn="ctr">
+                      <a:solidFill>
+                        <a:schemeClr val="bg1">
+                          <a:lumMod val="50000"/>
+                        </a:schemeClr>
+                      </a:solidFill>
+                      <a:prstDash val="solid"/>
+                      <a:round/>
+                      <a:headEnd type="none" w="med" len="med"/>
+                      <a:tailEnd type="none" w="med" len="med"/>
+                    </a:lnL>
+                    <a:lnR w="12700" cap="flat" cmpd="sng" algn="ctr">
+                      <a:solidFill>
+                        <a:schemeClr val="bg1">
+                          <a:lumMod val="50000"/>
+                        </a:schemeClr>
+                      </a:solidFill>
+                      <a:prstDash val="solid"/>
+                      <a:round/>
+                      <a:headEnd type="none" w="med" len="med"/>
+                      <a:tailEnd type="none" w="med" len="med"/>
+                    </a:lnR>
+                    <a:lnT w="12700" cap="flat" cmpd="sng" algn="ctr">
+                      <a:solidFill>
+                        <a:schemeClr val="bg1">
+                          <a:lumMod val="50000"/>
+                        </a:schemeClr>
+                      </a:solidFill>
+                      <a:prstDash val="solid"/>
+                      <a:round/>
+                      <a:headEnd type="none" w="med" len="med"/>
+                      <a:tailEnd type="none" w="med" len="med"/>
+                    </a:lnT>
+                    <a:lnB w="12700" cap="flat" cmpd="sng" algn="ctr">
+                      <a:solidFill>
+                        <a:schemeClr val="bg1">
+                          <a:lumMod val="50000"/>
+                        </a:schemeClr>
+                      </a:solidFill>
+                      <a:prstDash val="solid"/>
+                      <a:round/>
+                      <a:headEnd type="none" w="med" len="med"/>
+                      <a:tailEnd type="none" w="med" len="med"/>
+                    </a:lnB>
+                    <a:noFill/>
+                  </a:tcPr>
+                </a:tc>
+                <a:tc>
+                  <a:txBody>
+                    <a:bodyPr/>
+                    <a:lstStyle/>
+                    <a:p>
+                      <a:r>
+                        <a:rPr lang="en-IN" dirty="0">
+                          <a:solidFill>
+                            <a:srgbClr val="0009C4"/>
+                          </a:solidFill>
+                        </a:rPr>
+                        <a:t>print</a:t>
+                      </a:r>
+                      <a:r>
+                        <a:rPr lang="en-IN" dirty="0"/>
+                        <a:t>(</a:t>
+                      </a:r>
+                      <a:r>
+                        <a:rPr lang="en-IN" dirty="0">
+                          <a:solidFill>
+                            <a:schemeClr val="accent6">
+                              <a:lumMod val="75000"/>
+                            </a:schemeClr>
+                          </a:solidFill>
+                        </a:rPr>
+                        <a:t>"Hello\</a:t>
+                      </a:r>
+                      <a:r>
+                        <a:rPr lang="en-IN" dirty="0" err="1">
+                          <a:solidFill>
+                            <a:schemeClr val="accent6">
+                              <a:lumMod val="75000"/>
+                            </a:schemeClr>
+                          </a:solidFill>
+                        </a:rPr>
+                        <a:t>bWorld</a:t>
+                      </a:r>
+                      <a:r>
+                        <a:rPr lang="en-IN" dirty="0">
+                          <a:solidFill>
+                            <a:schemeClr val="accent6">
+                              <a:lumMod val="75000"/>
+                            </a:schemeClr>
+                          </a:solidFill>
+                        </a:rPr>
+                        <a:t>"</a:t>
+                      </a:r>
+                      <a:r>
+                        <a:rPr lang="en-IN" dirty="0"/>
+                        <a:t>)</a:t>
+                      </a:r>
+                    </a:p>
+                  </a:txBody>
+                  <a:tcPr anchor="ctr">
+                    <a:lnL w="12700" cap="flat" cmpd="sng" algn="ctr">
+                      <a:solidFill>
+                        <a:schemeClr val="bg1">
+                          <a:lumMod val="50000"/>
+                        </a:schemeClr>
+                      </a:solidFill>
+                      <a:prstDash val="solid"/>
+                      <a:round/>
+                      <a:headEnd type="none" w="med" len="med"/>
+                      <a:tailEnd type="none" w="med" len="med"/>
+                    </a:lnL>
+                    <a:lnR w="12700" cap="flat" cmpd="sng" algn="ctr">
+                      <a:solidFill>
+                        <a:schemeClr val="bg1">
+                          <a:lumMod val="50000"/>
+                        </a:schemeClr>
+                      </a:solidFill>
+                      <a:prstDash val="solid"/>
+                      <a:round/>
+                      <a:headEnd type="none" w="med" len="med"/>
+                      <a:tailEnd type="none" w="med" len="med"/>
+                    </a:lnR>
+                    <a:lnT w="12700" cap="flat" cmpd="sng" algn="ctr">
+                      <a:solidFill>
+                        <a:schemeClr val="bg1">
+                          <a:lumMod val="50000"/>
+                        </a:schemeClr>
+                      </a:solidFill>
+                      <a:prstDash val="solid"/>
+                      <a:round/>
+                      <a:headEnd type="none" w="med" len="med"/>
+                      <a:tailEnd type="none" w="med" len="med"/>
+                    </a:lnT>
+                    <a:lnB w="12700" cap="flat" cmpd="sng" algn="ctr">
+                      <a:solidFill>
+                        <a:schemeClr val="bg1">
+                          <a:lumMod val="50000"/>
+                        </a:schemeClr>
+                      </a:solidFill>
+                      <a:prstDash val="solid"/>
+                      <a:round/>
+                      <a:headEnd type="none" w="med" len="med"/>
+                      <a:tailEnd type="none" w="med" len="med"/>
+                    </a:lnB>
+                    <a:noFill/>
+                  </a:tcPr>
+                </a:tc>
+                <a:tc>
+                  <a:txBody>
+                    <a:bodyPr/>
+                    <a:lstStyle/>
+                    <a:p>
+                      <a:r>
+                        <a:rPr lang="en-IN" dirty="0" err="1"/>
+                        <a:t>HellWorld</a:t>
+                      </a:r>
+                      <a:endParaRPr lang="en-IN" dirty="0"/>
+                    </a:p>
+                  </a:txBody>
+                  <a:tcPr anchor="ctr">
+                    <a:lnL w="12700" cap="flat" cmpd="sng" algn="ctr">
+                      <a:solidFill>
+                        <a:schemeClr val="bg1">
+                          <a:lumMod val="50000"/>
+                        </a:schemeClr>
+                      </a:solidFill>
+                      <a:prstDash val="solid"/>
+                      <a:round/>
+                      <a:headEnd type="none" w="med" len="med"/>
+                      <a:tailEnd type="none" w="med" len="med"/>
+                    </a:lnL>
+                    <a:lnR w="12700" cap="flat" cmpd="sng" algn="ctr">
+                      <a:solidFill>
+                        <a:schemeClr val="bg1">
+                          <a:lumMod val="50000"/>
+                        </a:schemeClr>
+                      </a:solidFill>
+                      <a:prstDash val="solid"/>
+                      <a:round/>
+                      <a:headEnd type="none" w="med" len="med"/>
+                      <a:tailEnd type="none" w="med" len="med"/>
+                    </a:lnR>
+                    <a:lnT w="12700" cap="flat" cmpd="sng" algn="ctr">
+                      <a:solidFill>
+                        <a:schemeClr val="bg1">
+                          <a:lumMod val="50000"/>
+                        </a:schemeClr>
+                      </a:solidFill>
+                      <a:prstDash val="solid"/>
+                      <a:round/>
+                      <a:headEnd type="none" w="med" len="med"/>
+                      <a:tailEnd type="none" w="med" len="med"/>
+                    </a:lnT>
+                    <a:lnB w="12700" cap="flat" cmpd="sng" algn="ctr">
+                      <a:solidFill>
+                        <a:schemeClr val="bg1">
+                          <a:lumMod val="50000"/>
+                        </a:schemeClr>
+                      </a:solidFill>
+                      <a:prstDash val="solid"/>
+                      <a:round/>
+                      <a:headEnd type="none" w="med" len="med"/>
+                      <a:tailEnd type="none" w="med" len="med"/>
+                    </a:lnB>
+                    <a:noFill/>
+                  </a:tcPr>
+                </a:tc>
+                <a:extLst>
+                  <a:ext uri="{0D108BD9-81ED-4DB2-BD59-A6C34878D82A}">
+                    <a16:rowId xmlns:a16="http://schemas.microsoft.com/office/drawing/2014/main" val="2222128653"/>
+                  </a:ext>
+                </a:extLst>
+              </a:tr>
+            </a:tbl>
+          </a:graphicData>
+        </a:graphic>
+      </p:graphicFrame>
+    </p:spTree>
+    <p:extLst>
+      <p:ext uri="{BB962C8B-B14F-4D97-AF65-F5344CB8AC3E}">
+        <p14:creationId xmlns:p14="http://schemas.microsoft.com/office/powerpoint/2010/main" val="4118815707"/>
+      </p:ext>
+    </p:extLst>
+  </p:cSld>
+  <p:clrMapOvr>
+    <a:masterClrMapping/>
+  </p:clrMapOvr>
 </p:sld>
 </file>
 
